--- a/docs/AgileX-第三轮-操作方式与仿真.pptx
+++ b/docs/AgileX-第三轮-操作方式与仿真.pptx
@@ -18,6 +18,11 @@
     <p:sldId id="266" r:id="rId18"/>
     <p:sldId id="267" r:id="rId19"/>
     <p:sldId id="268" r:id="rId20"/>
+    <p:sldId id="269" r:id="rId21"/>
+    <p:sldId id="270" r:id="rId22"/>
+    <p:sldId id="271" r:id="rId23"/>
+    <p:sldId id="272" r:id="rId24"/>
+    <p:sldId id="273" r:id="rId25"/>
   </p:sldIdLst>
   <p:sldSz cx="12191695" cy="6858000" type="screen4x3"/>
   <p:notesSz cx="6858000" cy="9144000"/>
@@ -795,6 +800,356 @@
           <a:p>
             <a:r>
               <a:t>Placeholder summary; the verified research table goes on the next slide.</a:t>
+            </a:r>
+          </a:p>
+        </p:txBody>
+      </p:sp>
+      <p:sp>
+        <p:nvSpPr>
+          <p:cNvPr id="4" name="Slide Number Placeholder 3"/>
+          <p:cNvSpPr>
+            <a:spLocks noGrp="1"/>
+          </p:cNvSpPr>
+          <p:nvPr>
+            <p:ph type="sldNum" idx="5" sz="quarter"/>
+          </p:nvPr>
+        </p:nvSpPr>
+        <p:spPr/>
+      </p:sp>
+    </p:spTree>
+  </p:cSld>
+  <p:clrMapOvr>
+    <a:masterClrMapping/>
+  </p:clrMapOvr>
+</p:notes>
+</file>
+
+<file path=ppt/notesSlides/notesSlide14.xml><?xml version="1.0" encoding="utf-8"?>
+<p:notes xmlns:a="http://schemas.openxmlformats.org/drawingml/2006/main" xmlns:p="http://schemas.openxmlformats.org/presentationml/2006/main" xmlns:r="http://schemas.openxmlformats.org/officeDocument/2006/relationships">
+  <p:cSld>
+    <p:spTree>
+      <p:nvGrpSpPr>
+        <p:cNvPr id="1" name=""/>
+        <p:cNvGrpSpPr/>
+        <p:nvPr/>
+      </p:nvGrpSpPr>
+      <p:grpSpPr>
+        <a:xfrm>
+          <a:off x="0" y="0"/>
+          <a:ext cx="0" cy="0"/>
+          <a:chOff x="0" y="0"/>
+          <a:chExt cx="0" cy="0"/>
+        </a:xfrm>
+      </p:grpSpPr>
+      <p:sp>
+        <p:nvSpPr>
+          <p:cNvPr id="2" name="Slide Image Placeholder 1"/>
+          <p:cNvSpPr>
+            <a:spLocks noGrp="1"/>
+          </p:cNvSpPr>
+          <p:nvPr>
+            <p:ph type="sldImg" idx="2"/>
+          </p:nvPr>
+        </p:nvSpPr>
+        <p:spPr/>
+      </p:sp>
+      <p:sp>
+        <p:nvSpPr>
+          <p:cNvPr id="3" name="Notes Placeholder 2"/>
+          <p:cNvSpPr>
+            <a:spLocks noGrp="1"/>
+          </p:cNvSpPr>
+          <p:nvPr>
+            <p:ph type="body" idx="3" sz="quarter"/>
+          </p:nvPr>
+        </p:nvSpPr>
+        <p:spPr/>
+        <p:txBody>
+          <a:bodyPr/>
+          <a:lstStyle/>
+          <a:p>
+            <a:r>
+              <a:t>Verified by fetching each page/API. The villekuosmanen/agilex_* trap matters: those are ARX5 arms, not Piper, and would poison a dataset search.</a:t>
+            </a:r>
+          </a:p>
+        </p:txBody>
+      </p:sp>
+      <p:sp>
+        <p:nvSpPr>
+          <p:cNvPr id="4" name="Slide Number Placeholder 3"/>
+          <p:cNvSpPr>
+            <a:spLocks noGrp="1"/>
+          </p:cNvSpPr>
+          <p:nvPr>
+            <p:ph type="sldNum" idx="5" sz="quarter"/>
+          </p:nvPr>
+        </p:nvSpPr>
+        <p:spPr/>
+      </p:sp>
+    </p:spTree>
+  </p:cSld>
+  <p:clrMapOvr>
+    <a:masterClrMapping/>
+  </p:clrMapOvr>
+</p:notes>
+</file>
+
+<file path=ppt/notesSlides/notesSlide15.xml><?xml version="1.0" encoding="utf-8"?>
+<p:notes xmlns:a="http://schemas.openxmlformats.org/drawingml/2006/main" xmlns:p="http://schemas.openxmlformats.org/presentationml/2006/main" xmlns:r="http://schemas.openxmlformats.org/officeDocument/2006/relationships">
+  <p:cSld>
+    <p:spTree>
+      <p:nvGrpSpPr>
+        <p:cNvPr id="1" name=""/>
+        <p:cNvGrpSpPr/>
+        <p:nvPr/>
+      </p:nvGrpSpPr>
+      <p:grpSpPr>
+        <a:xfrm>
+          <a:off x="0" y="0"/>
+          <a:ext cx="0" cy="0"/>
+          <a:chOff x="0" y="0"/>
+          <a:chExt cx="0" cy="0"/>
+        </a:xfrm>
+      </p:grpSpPr>
+      <p:sp>
+        <p:nvSpPr>
+          <p:cNvPr id="2" name="Slide Image Placeholder 1"/>
+          <p:cNvSpPr>
+            <a:spLocks noGrp="1"/>
+          </p:cNvSpPr>
+          <p:nvPr>
+            <p:ph type="sldImg" idx="2"/>
+          </p:nvPr>
+        </p:nvSpPr>
+        <p:spPr/>
+      </p:sp>
+      <p:sp>
+        <p:nvSpPr>
+          <p:cNvPr id="3" name="Notes Placeholder 2"/>
+          <p:cNvSpPr>
+            <a:spLocks noGrp="1"/>
+          </p:cNvSpPr>
+          <p:nvPr>
+            <p:ph type="body" idx="3" sz="quarter"/>
+          </p:nvPr>
+        </p:nvSpPr>
+        <p:spPr/>
+        <p:txBody>
+          <a:bodyPr/>
+          <a:lstStyle/>
+          <a:p>
+            <a:r>
+              <a:t>piper_sdk ships no URDF at all - only the CAN layer. That surprises people.</a:t>
+            </a:r>
+          </a:p>
+        </p:txBody>
+      </p:sp>
+      <p:sp>
+        <p:nvSpPr>
+          <p:cNvPr id="4" name="Slide Number Placeholder 3"/>
+          <p:cNvSpPr>
+            <a:spLocks noGrp="1"/>
+          </p:cNvSpPr>
+          <p:nvPr>
+            <p:ph type="sldNum" idx="5" sz="quarter"/>
+          </p:nvPr>
+        </p:nvSpPr>
+        <p:spPr/>
+      </p:sp>
+    </p:spTree>
+  </p:cSld>
+  <p:clrMapOvr>
+    <a:masterClrMapping/>
+  </p:clrMapOvr>
+</p:notes>
+</file>
+
+<file path=ppt/notesSlides/notesSlide16.xml><?xml version="1.0" encoding="utf-8"?>
+<p:notes xmlns:a="http://schemas.openxmlformats.org/drawingml/2006/main" xmlns:p="http://schemas.openxmlformats.org/presentationml/2006/main" xmlns:r="http://schemas.openxmlformats.org/officeDocument/2006/relationships">
+  <p:cSld>
+    <p:spTree>
+      <p:nvGrpSpPr>
+        <p:cNvPr id="1" name=""/>
+        <p:cNvGrpSpPr/>
+        <p:nvPr/>
+      </p:nvGrpSpPr>
+      <p:grpSpPr>
+        <a:xfrm>
+          <a:off x="0" y="0"/>
+          <a:ext cx="0" cy="0"/>
+          <a:chOff x="0" y="0"/>
+          <a:chExt cx="0" cy="0"/>
+        </a:xfrm>
+      </p:grpSpPr>
+      <p:sp>
+        <p:nvSpPr>
+          <p:cNvPr id="2" name="Slide Image Placeholder 1"/>
+          <p:cNvSpPr>
+            <a:spLocks noGrp="1"/>
+          </p:cNvSpPr>
+          <p:nvPr>
+            <p:ph type="sldImg" idx="2"/>
+          </p:nvPr>
+        </p:nvSpPr>
+        <p:spPr/>
+      </p:sp>
+      <p:sp>
+        <p:nvSpPr>
+          <p:cNvPr id="3" name="Notes Placeholder 2"/>
+          <p:cNvSpPr>
+            <a:spLocks noGrp="1"/>
+          </p:cNvSpPr>
+          <p:nvPr>
+            <p:ph type="body" idx="3" sz="quarter"/>
+          </p:nvPr>
+        </p:nvSpPr>
+        <p:spPr/>
+        <p:txBody>
+          <a:bodyPr/>
+          <a:lstStyle/>
+          <a:p>
+            <a:r>
+              <a:t>Real Menagerie model, offscreen render. The +/-70 deg wrist pitch limit is a real constraint on any top-down task and only showed up in simulation.</a:t>
+            </a:r>
+          </a:p>
+        </p:txBody>
+      </p:sp>
+      <p:sp>
+        <p:nvSpPr>
+          <p:cNvPr id="4" name="Slide Number Placeholder 3"/>
+          <p:cNvSpPr>
+            <a:spLocks noGrp="1"/>
+          </p:cNvSpPr>
+          <p:nvPr>
+            <p:ph type="sldNum" idx="5" sz="quarter"/>
+          </p:nvPr>
+        </p:nvSpPr>
+        <p:spPr/>
+      </p:sp>
+    </p:spTree>
+  </p:cSld>
+  <p:clrMapOvr>
+    <a:masterClrMapping/>
+  </p:clrMapOvr>
+</p:notes>
+</file>
+
+<file path=ppt/notesSlides/notesSlide17.xml><?xml version="1.0" encoding="utf-8"?>
+<p:notes xmlns:a="http://schemas.openxmlformats.org/drawingml/2006/main" xmlns:p="http://schemas.openxmlformats.org/presentationml/2006/main" xmlns:r="http://schemas.openxmlformats.org/officeDocument/2006/relationships">
+  <p:cSld>
+    <p:spTree>
+      <p:nvGrpSpPr>
+        <p:cNvPr id="1" name=""/>
+        <p:cNvGrpSpPr/>
+        <p:nvPr/>
+      </p:nvGrpSpPr>
+      <p:grpSpPr>
+        <a:xfrm>
+          <a:off x="0" y="0"/>
+          <a:ext cx="0" cy="0"/>
+          <a:chOff x="0" y="0"/>
+          <a:chExt cx="0" cy="0"/>
+        </a:xfrm>
+      </p:grpSpPr>
+      <p:sp>
+        <p:nvSpPr>
+          <p:cNvPr id="2" name="Slide Image Placeholder 1"/>
+          <p:cNvSpPr>
+            <a:spLocks noGrp="1"/>
+          </p:cNvSpPr>
+          <p:nvPr>
+            <p:ph type="sldImg" idx="2"/>
+          </p:nvPr>
+        </p:nvSpPr>
+        <p:spPr/>
+      </p:sp>
+      <p:sp>
+        <p:nvSpPr>
+          <p:cNvPr id="3" name="Notes Placeholder 2"/>
+          <p:cNvSpPr>
+            <a:spLocks noGrp="1"/>
+          </p:cNvSpPr>
+          <p:nvPr>
+            <p:ph type="body" idx="3" sz="quarter"/>
+          </p:nvPr>
+        </p:nvSpPr>
+        <p:spPr/>
+        <p:txBody>
+          <a:bodyPr/>
+          <a:lstStyle/>
+          <a:p>
+            <a:r>
+              <a:t>Decouple the base with Nav2. Handover needs a head camera, which this robot lacks.</a:t>
+            </a:r>
+          </a:p>
+        </p:txBody>
+      </p:sp>
+      <p:sp>
+        <p:nvSpPr>
+          <p:cNvPr id="4" name="Slide Number Placeholder 3"/>
+          <p:cNvSpPr>
+            <a:spLocks noGrp="1"/>
+          </p:cNvSpPr>
+          <p:nvPr>
+            <p:ph type="sldNum" idx="5" sz="quarter"/>
+          </p:nvPr>
+        </p:nvSpPr>
+        <p:spPr/>
+      </p:sp>
+    </p:spTree>
+  </p:cSld>
+  <p:clrMapOvr>
+    <a:masterClrMapping/>
+  </p:clrMapOvr>
+</p:notes>
+</file>
+
+<file path=ppt/notesSlides/notesSlide18.xml><?xml version="1.0" encoding="utf-8"?>
+<p:notes xmlns:a="http://schemas.openxmlformats.org/drawingml/2006/main" xmlns:p="http://schemas.openxmlformats.org/presentationml/2006/main" xmlns:r="http://schemas.openxmlformats.org/officeDocument/2006/relationships">
+  <p:cSld>
+    <p:spTree>
+      <p:nvGrpSpPr>
+        <p:cNvPr id="1" name=""/>
+        <p:cNvGrpSpPr/>
+        <p:nvPr/>
+      </p:nvGrpSpPr>
+      <p:grpSpPr>
+        <a:xfrm>
+          <a:off x="0" y="0"/>
+          <a:ext cx="0" cy="0"/>
+          <a:chOff x="0" y="0"/>
+          <a:chExt cx="0" cy="0"/>
+        </a:xfrm>
+      </p:grpSpPr>
+      <p:sp>
+        <p:nvSpPr>
+          <p:cNvPr id="2" name="Slide Image Placeholder 1"/>
+          <p:cNvSpPr>
+            <a:spLocks noGrp="1"/>
+          </p:cNvSpPr>
+          <p:nvPr>
+            <p:ph type="sldImg" idx="2"/>
+          </p:nvPr>
+        </p:nvSpPr>
+        <p:spPr/>
+      </p:sp>
+      <p:sp>
+        <p:nvSpPr>
+          <p:cNvPr id="3" name="Notes Placeholder 2"/>
+          <p:cNvSpPr>
+            <a:spLocks noGrp="1"/>
+          </p:cNvSpPr>
+          <p:nvPr>
+            <p:ph type="body" idx="3" sz="quarter"/>
+          </p:nvPr>
+        </p:nvSpPr>
+        <p:spPr/>
+        <p:txBody>
+          <a:bodyPr/>
+          <a:lstStyle/>
+          <a:p>
+            <a:r>
+              <a:t>Honest close: no turnkey checkpoint, but two usable datasets and a runnable sim.</a:t>
             </a:r>
           </a:p>
         </p:txBody>
@@ -8478,6 +8833,5617 @@
                 <a:cs typeface="PingFang SC"/>
               </a:rPr>
               <a:t>所以这一轮把力气放在「怎么更便宜地产数据」上 —— 拖动示教和主从臂，而不是继续找不存在的预训练权重。</a:t>
+            </a:r>
+          </a:p>
+        </p:txBody>
+      </p:sp>
+    </p:spTree>
+  </p:cSld>
+  <p:clrMapOvr>
+    <a:masterClrMapping/>
+  </p:clrMapOvr>
+</p:sld>
+</file>
+
+<file path=ppt/slides/slide14.xml><?xml version="1.0" encoding="utf-8"?>
+<p:sld xmlns:a="http://schemas.openxmlformats.org/drawingml/2006/main" xmlns:p="http://schemas.openxmlformats.org/presentationml/2006/main" xmlns:r="http://schemas.openxmlformats.org/officeDocument/2006/relationships">
+  <p:cSld>
+    <p:spTree>
+      <p:nvGrpSpPr>
+        <p:cNvPr id="1" name=""/>
+        <p:cNvGrpSpPr/>
+        <p:nvPr/>
+      </p:nvGrpSpPr>
+      <p:grpSpPr/>
+      <p:sp>
+        <p:nvSpPr>
+          <p:cNvPr id="2" name="Rectangle 1"/>
+          <p:cNvSpPr/>
+          <p:nvPr/>
+        </p:nvSpPr>
+        <p:spPr>
+          <a:xfrm>
+            <a:off x="0" y="0"/>
+            <a:ext cx="12191695" cy="6858000"/>
+          </a:xfrm>
+          <a:prstGeom prst="rect">
+            <a:avLst/>
+          </a:prstGeom>
+          <a:solidFill>
+            <a:srgbClr val="0E1116"/>
+          </a:solidFill>
+          <a:ln>
+            <a:noFill/>
+          </a:ln>
+          <a:effectLst/>
+        </p:spPr>
+        <p:style>
+          <a:lnRef idx="1">
+            <a:schemeClr val="accent1"/>
+          </a:lnRef>
+          <a:fillRef idx="3">
+            <a:schemeClr val="accent1"/>
+          </a:fillRef>
+          <a:effectRef idx="2">
+            <a:schemeClr val="accent1"/>
+          </a:effectRef>
+          <a:fontRef idx="minor">
+            <a:schemeClr val="lt1"/>
+          </a:fontRef>
+        </p:style>
+        <p:txBody>
+          <a:bodyPr rtlCol="0" anchor="ctr"/>
+          <a:lstStyle/>
+          <a:p>
+            <a:pPr algn="ctr"/>
+          </a:p>
+        </p:txBody>
+      </p:sp>
+      <p:sp>
+        <p:nvSpPr>
+          <p:cNvPr id="3" name="Rectangle 2"/>
+          <p:cNvSpPr/>
+          <p:nvPr/>
+        </p:nvSpPr>
+        <p:spPr>
+          <a:xfrm>
+            <a:off x="566928" y="457200"/>
+            <a:ext cx="566928" cy="41148"/>
+          </a:xfrm>
+          <a:prstGeom prst="rect">
+            <a:avLst/>
+          </a:prstGeom>
+          <a:solidFill>
+            <a:srgbClr val="3EC5C9"/>
+          </a:solidFill>
+          <a:ln>
+            <a:noFill/>
+          </a:ln>
+          <a:effectLst/>
+        </p:spPr>
+        <p:style>
+          <a:lnRef idx="1">
+            <a:schemeClr val="accent1"/>
+          </a:lnRef>
+          <a:fillRef idx="3">
+            <a:schemeClr val="accent1"/>
+          </a:fillRef>
+          <a:effectRef idx="2">
+            <a:schemeClr val="accent1"/>
+          </a:effectRef>
+          <a:fontRef idx="minor">
+            <a:schemeClr val="lt1"/>
+          </a:fontRef>
+        </p:style>
+        <p:txBody>
+          <a:bodyPr rtlCol="0" anchor="ctr"/>
+          <a:lstStyle/>
+          <a:p>
+            <a:pPr algn="ctr"/>
+          </a:p>
+        </p:txBody>
+      </p:sp>
+      <p:sp>
+        <p:nvSpPr>
+          <p:cNvPr id="4" name="TextBox 3"/>
+          <p:cNvSpPr txBox="1"/>
+          <p:nvPr/>
+        </p:nvSpPr>
+        <p:spPr>
+          <a:xfrm>
+            <a:off x="566928" y="566928"/>
+            <a:ext cx="10058400" cy="274320"/>
+          </a:xfrm>
+          <a:prstGeom prst="rect">
+            <a:avLst/>
+          </a:prstGeom>
+          <a:noFill/>
+        </p:spPr>
+        <p:txBody>
+          <a:bodyPr wrap="square" lIns="0" rIns="0" tIns="0" bIns="0" anchor="t">
+            <a:spAutoFit/>
+          </a:bodyPr>
+          <a:lstStyle/>
+          <a:p>
+            <a:pPr algn="l">
+              <a:spcBef>
+                <a:spcPts val="0"/>
+              </a:spcBef>
+              <a:spcAft>
+                <a:spcPts val="0"/>
+              </a:spcAft>
+            </a:pPr>
+            <a:r>
+              <a:rPr sz="1150" b="1">
+                <a:solidFill>
+                  <a:srgbClr val="3EC5C9"/>
+                </a:solidFill>
+                <a:latin typeface="PingFang SC"/>
+                <a:ea typeface="PingFang SC"/>
+                <a:cs typeface="PingFang SC"/>
+              </a:rPr>
+              <a:t>OPEN SOURCE · VERIFIED</a:t>
+            </a:r>
+          </a:p>
+        </p:txBody>
+      </p:sp>
+      <p:sp>
+        <p:nvSpPr>
+          <p:cNvPr id="5" name="TextBox 4"/>
+          <p:cNvSpPr txBox="1"/>
+          <p:nvPr/>
+        </p:nvSpPr>
+        <p:spPr>
+          <a:xfrm>
+            <a:off x="566928" y="822960"/>
+            <a:ext cx="10607040" cy="566928"/>
+          </a:xfrm>
+          <a:prstGeom prst="rect">
+            <a:avLst/>
+          </a:prstGeom>
+          <a:noFill/>
+        </p:spPr>
+        <p:txBody>
+          <a:bodyPr wrap="square" lIns="0" rIns="0" tIns="0" bIns="0" anchor="t">
+            <a:spAutoFit/>
+          </a:bodyPr>
+          <a:lstStyle/>
+          <a:p>
+            <a:pPr algn="l">
+              <a:spcBef>
+                <a:spcPts val="0"/>
+              </a:spcBef>
+              <a:spcAft>
+                <a:spcPts val="0"/>
+              </a:spcAft>
+            </a:pPr>
+            <a:r>
+              <a:rPr sz="2900" b="1">
+                <a:solidFill>
+                  <a:srgbClr val="E6EDF3"/>
+                </a:solidFill>
+                <a:latin typeface="PingFang SC"/>
+                <a:ea typeface="PingFang SC"/>
+                <a:cs typeface="PingFang SC"/>
+              </a:rPr>
+              <a:t>逐条核实过的公开资源</a:t>
+            </a:r>
+          </a:p>
+        </p:txBody>
+      </p:sp>
+      <p:sp>
+        <p:nvSpPr>
+          <p:cNvPr id="6" name="TextBox 5"/>
+          <p:cNvSpPr txBox="1"/>
+          <p:nvPr/>
+        </p:nvSpPr>
+        <p:spPr>
+          <a:xfrm>
+            <a:off x="566928" y="1389888"/>
+            <a:ext cx="10607040" cy="310896"/>
+          </a:xfrm>
+          <a:prstGeom prst="rect">
+            <a:avLst/>
+          </a:prstGeom>
+          <a:noFill/>
+        </p:spPr>
+        <p:txBody>
+          <a:bodyPr wrap="square" lIns="0" rIns="0" tIns="0" bIns="0" anchor="t">
+            <a:spAutoFit/>
+          </a:bodyPr>
+          <a:lstStyle/>
+          <a:p>
+            <a:pPr algn="l">
+              <a:spcBef>
+                <a:spcPts val="0"/>
+              </a:spcBef>
+              <a:spcAft>
+                <a:spcPts val="0"/>
+              </a:spcAft>
+            </a:pPr>
+            <a:r>
+              <a:rPr sz="1300" b="0">
+                <a:solidFill>
+                  <a:srgbClr val="8B949E"/>
+                </a:solidFill>
+                <a:latin typeface="PingFang SC"/>
+                <a:ea typeface="PingFang SC"/>
+                <a:cs typeface="PingFang SC"/>
+              </a:rPr>
+              <a:t>48 个 URL 逐一抓取核对：48 VERIFIED / 13 LIKELY / 7 NOT FOUND</a:t>
+            </a:r>
+          </a:p>
+        </p:txBody>
+      </p:sp>
+      <p:sp>
+        <p:nvSpPr>
+          <p:cNvPr id="7" name="Rectangle 6"/>
+          <p:cNvSpPr/>
+          <p:nvPr/>
+        </p:nvSpPr>
+        <p:spPr>
+          <a:xfrm>
+            <a:off x="566928" y="6345936"/>
+            <a:ext cx="11057839" cy="9525"/>
+          </a:xfrm>
+          <a:prstGeom prst="rect">
+            <a:avLst/>
+          </a:prstGeom>
+          <a:solidFill>
+            <a:srgbClr val="2A313C"/>
+          </a:solidFill>
+          <a:ln>
+            <a:noFill/>
+          </a:ln>
+          <a:effectLst/>
+        </p:spPr>
+        <p:style>
+          <a:lnRef idx="1">
+            <a:schemeClr val="accent1"/>
+          </a:lnRef>
+          <a:fillRef idx="3">
+            <a:schemeClr val="accent1"/>
+          </a:fillRef>
+          <a:effectRef idx="2">
+            <a:schemeClr val="accent1"/>
+          </a:effectRef>
+          <a:fontRef idx="minor">
+            <a:schemeClr val="lt1"/>
+          </a:fontRef>
+        </p:style>
+        <p:txBody>
+          <a:bodyPr rtlCol="0" anchor="ctr"/>
+          <a:lstStyle/>
+          <a:p>
+            <a:pPr algn="ctr"/>
+          </a:p>
+        </p:txBody>
+      </p:sp>
+      <p:sp>
+        <p:nvSpPr>
+          <p:cNvPr id="8" name="TextBox 7"/>
+          <p:cNvSpPr txBox="1"/>
+          <p:nvPr/>
+        </p:nvSpPr>
+        <p:spPr>
+          <a:xfrm>
+            <a:off x="566928" y="6428232"/>
+            <a:ext cx="8229600" cy="256032"/>
+          </a:xfrm>
+          <a:prstGeom prst="rect">
+            <a:avLst/>
+          </a:prstGeom>
+          <a:noFill/>
+        </p:spPr>
+        <p:txBody>
+          <a:bodyPr wrap="square" lIns="0" rIns="0" tIns="0" bIns="0" anchor="t">
+            <a:spAutoFit/>
+          </a:bodyPr>
+          <a:lstStyle/>
+          <a:p>
+            <a:pPr algn="l">
+              <a:spcBef>
+                <a:spcPts val="0"/>
+              </a:spcBef>
+              <a:spcAft>
+                <a:spcPts val="0"/>
+              </a:spcAft>
+            </a:pPr>
+            <a:r>
+              <a:rPr sz="950" b="0">
+                <a:solidFill>
+                  <a:srgbClr val="8B949E"/>
+                </a:solidFill>
+                <a:latin typeface="PingFang SC"/>
+                <a:ea typeface="PingFang SC"/>
+                <a:cs typeface="PingFang SC"/>
+              </a:rPr>
+              <a:t>第三轮 · 操作方式 / 开源数据 / 仿真 · 2026-10-29</a:t>
+            </a:r>
+          </a:p>
+        </p:txBody>
+      </p:sp>
+      <p:sp>
+        <p:nvSpPr>
+          <p:cNvPr id="9" name="TextBox 8"/>
+          <p:cNvSpPr txBox="1"/>
+          <p:nvPr/>
+        </p:nvSpPr>
+        <p:spPr>
+          <a:xfrm>
+            <a:off x="10710367" y="6428232"/>
+            <a:ext cx="914400" cy="256032"/>
+          </a:xfrm>
+          <a:prstGeom prst="rect">
+            <a:avLst/>
+          </a:prstGeom>
+          <a:noFill/>
+        </p:spPr>
+        <p:txBody>
+          <a:bodyPr wrap="square" lIns="0" rIns="0" tIns="0" bIns="0" anchor="t">
+            <a:spAutoFit/>
+          </a:bodyPr>
+          <a:lstStyle/>
+          <a:p>
+            <a:pPr algn="r">
+              <a:spcBef>
+                <a:spcPts val="0"/>
+              </a:spcBef>
+              <a:spcAft>
+                <a:spcPts val="0"/>
+              </a:spcAft>
+            </a:pPr>
+            <a:r>
+              <a:rPr sz="1000" b="1">
+                <a:solidFill>
+                  <a:srgbClr val="3EC5C9"/>
+                </a:solidFill>
+                <a:latin typeface="Helvetica Neue"/>
+                <a:ea typeface="PingFang SC"/>
+                <a:cs typeface="PingFang SC"/>
+              </a:rPr>
+              <a:t>14</a:t>
+            </a:r>
+          </a:p>
+        </p:txBody>
+      </p:sp>
+      <p:graphicFrame>
+        <p:nvGraphicFramePr>
+          <p:cNvPr id="10" name="Table 9"/>
+          <p:cNvGraphicFramePr>
+            <a:graphicFrameLocks noGrp="1"/>
+          </p:cNvGraphicFramePr>
+          <p:nvPr/>
+        </p:nvGraphicFramePr>
+        <p:xfrm>
+          <a:off x="566928" y="1719072"/>
+          <a:ext cx="11055096" cy="3218688"/>
+        </p:xfrm>
+        <a:graphic>
+          <a:graphicData uri="http://schemas.openxmlformats.org/drawingml/2006/table">
+            <a:tbl>
+              <a:tblPr firstRow="1" bandRow="1">
+                <a:tableStyleId>{5C22544A-7EE6-4342-B048-85BDC9FD1C3A}</a:tableStyleId>
+              </a:tblPr>
+              <a:tblGrid>
+                <a:gridCol w="3520440"/>
+                <a:gridCol w="4846320"/>
+                <a:gridCol w="2688336"/>
+              </a:tblGrid>
+              <a:tr h="402336">
+                <a:tc>
+                  <a:txBody>
+                    <a:bodyPr wrap="square"/>
+                    <a:lstStyle/>
+                    <a:p>
+                      <a:pPr algn="l"/>
+                      <a:r>
+                        <a:rPr sz="980" b="1">
+                          <a:solidFill>
+                            <a:srgbClr val="8B949E"/>
+                          </a:solidFill>
+                          <a:latin typeface="PingFang SC"/>
+                          <a:ea typeface="PingFang SC"/>
+                          <a:cs typeface="PingFang SC"/>
+                        </a:rPr>
+                        <a:t>资源</a:t>
+                      </a:r>
+                    </a:p>
+                  </a:txBody>
+                  <a:tcPr marL="91440" marR="54864" marT="18288" marB="18288" anchor="ctr">
+                    <a:solidFill>
+                      <a:srgbClr val="1C222B"/>
+                    </a:solidFill>
+                  </a:tcPr>
+                </a:tc>
+                <a:tc>
+                  <a:txBody>
+                    <a:bodyPr wrap="square"/>
+                    <a:lstStyle/>
+                    <a:p>
+                      <a:pPr algn="l"/>
+                      <a:r>
+                        <a:rPr sz="980" b="1">
+                          <a:solidFill>
+                            <a:srgbClr val="8B949E"/>
+                          </a:solidFill>
+                          <a:latin typeface="PingFang SC"/>
+                          <a:ea typeface="PingFang SC"/>
+                          <a:cs typeface="PingFang SC"/>
+                        </a:rPr>
+                        <a:t>内容</a:t>
+                      </a:r>
+                    </a:p>
+                  </a:txBody>
+                  <a:tcPr marL="91440" marR="54864" marT="18288" marB="18288" anchor="ctr">
+                    <a:solidFill>
+                      <a:srgbClr val="1C222B"/>
+                    </a:solidFill>
+                  </a:tcPr>
+                </a:tc>
+                <a:tc>
+                  <a:txBody>
+                    <a:bodyPr wrap="square"/>
+                    <a:lstStyle/>
+                    <a:p>
+                      <a:pPr algn="l"/>
+                      <a:r>
+                        <a:rPr sz="980" b="1">
+                          <a:solidFill>
+                            <a:srgbClr val="8B949E"/>
+                          </a:solidFill>
+                          <a:latin typeface="PingFang SC"/>
+                          <a:ea typeface="PingFang SC"/>
+                          <a:cs typeface="PingFang SC"/>
+                        </a:rPr>
+                        <a:t>对本机是否可用</a:t>
+                      </a:r>
+                    </a:p>
+                  </a:txBody>
+                  <a:tcPr marL="91440" marR="54864" marT="18288" marB="18288" anchor="ctr">
+                    <a:solidFill>
+                      <a:srgbClr val="1C222B"/>
+                    </a:solidFill>
+                  </a:tcPr>
+                </a:tc>
+              </a:tr>
+              <a:tr h="402336">
+                <a:tc>
+                  <a:txBody>
+                    <a:bodyPr wrap="square"/>
+                    <a:lstStyle/>
+                    <a:p>
+                      <a:pPr algn="l"/>
+                      <a:r>
+                        <a:rPr sz="919" b="0">
+                          <a:solidFill>
+                            <a:srgbClr val="E6EDF3"/>
+                          </a:solidFill>
+                          <a:latin typeface="PingFang SC"/>
+                          <a:ea typeface="PingFang SC"/>
+                          <a:cs typeface="PingFang SC"/>
+                        </a:rPr>
+                        <a:t>HITdongdong/piper_dual_tube</a:t>
+                      </a:r>
+                    </a:p>
+                  </a:txBody>
+                  <a:tcPr marL="91440" marR="54864" marT="18288" marB="18288" anchor="ctr">
+                    <a:solidFill>
+                      <a:srgbClr val="161B22"/>
+                    </a:solidFill>
+                  </a:tcPr>
+                </a:tc>
+                <a:tc>
+                  <a:txBody>
+                    <a:bodyPr wrap="square"/>
+                    <a:lstStyle/>
+                    <a:p>
+                      <a:pPr algn="l"/>
+                      <a:r>
+                        <a:rPr sz="919" b="0">
+                          <a:solidFill>
+                            <a:srgbClr val="E6EDF3"/>
+                          </a:solidFill>
+                          <a:latin typeface="PingFang SC"/>
+                          <a:ea typeface="PingFang SC"/>
+                          <a:cs typeface="PingFang SC"/>
+                        </a:rPr>
+                        <a:t>LeRobot v2.1 · 200 eps / 131k 帧 · 14 维 · 3 相机</a:t>
+                      </a:r>
+                    </a:p>
+                  </a:txBody>
+                  <a:tcPr marL="91440" marR="54864" marT="18288" marB="18288" anchor="ctr">
+                    <a:solidFill>
+                      <a:srgbClr val="161B22"/>
+                    </a:solidFill>
+                  </a:tcPr>
+                </a:tc>
+                <a:tc>
+                  <a:txBody>
+                    <a:bodyPr wrap="square"/>
+                    <a:lstStyle/>
+                    <a:p>
+                      <a:pPr algn="l"/>
+                      <a:r>
+                        <a:rPr sz="919" b="0">
+                          <a:solidFill>
+                            <a:srgbClr val="3FB950"/>
+                          </a:solidFill>
+                          <a:latin typeface="PingFang SC"/>
+                          <a:ea typeface="PingFang SC"/>
+                          <a:cs typeface="PingFang SC"/>
+                        </a:rPr>
+                        <a:t>✓ 相机布局与本机一致</a:t>
+                      </a:r>
+                    </a:p>
+                  </a:txBody>
+                  <a:tcPr marL="91440" marR="54864" marT="18288" marB="18288" anchor="ctr">
+                    <a:solidFill>
+                      <a:srgbClr val="161B22"/>
+                    </a:solidFill>
+                  </a:tcPr>
+                </a:tc>
+              </a:tr>
+              <a:tr h="402336">
+                <a:tc>
+                  <a:txBody>
+                    <a:bodyPr wrap="square"/>
+                    <a:lstStyle/>
+                    <a:p>
+                      <a:pPr algn="l"/>
+                      <a:r>
+                        <a:rPr sz="919" b="0">
+                          <a:solidFill>
+                            <a:srgbClr val="E6EDF3"/>
+                          </a:solidFill>
+                          <a:latin typeface="PingFang SC"/>
+                          <a:ea typeface="PingFang SC"/>
+                          <a:cs typeface="PingFang SC"/>
+                        </a:rPr>
+                        <a:t>gauravpradeep/t01_piper_bimanual_lerobot</a:t>
+                      </a:r>
+                    </a:p>
+                  </a:txBody>
+                  <a:tcPr marL="91440" marR="54864" marT="18288" marB="18288" anchor="ctr">
+                    <a:solidFill>
+                      <a:srgbClr val="0E1116"/>
+                    </a:solidFill>
+                  </a:tcPr>
+                </a:tc>
+                <a:tc>
+                  <a:txBody>
+                    <a:bodyPr wrap="square"/>
+                    <a:lstStyle/>
+                    <a:p>
+                      <a:pPr algn="l"/>
+                      <a:r>
+                        <a:rPr sz="919" b="0">
+                          <a:solidFill>
+                            <a:srgbClr val="E6EDF3"/>
+                          </a:solidFill>
+                          <a:latin typeface="PingFang SC"/>
+                          <a:ea typeface="PingFang SC"/>
+                          <a:cs typeface="PingFang SC"/>
+                        </a:rPr>
+                        <a:t>128 eps / 51,983 帧 · 14 维 · Apache-2.0</a:t>
+                      </a:r>
+                    </a:p>
+                  </a:txBody>
+                  <a:tcPr marL="91440" marR="54864" marT="18288" marB="18288" anchor="ctr">
+                    <a:solidFill>
+                      <a:srgbClr val="0E1116"/>
+                    </a:solidFill>
+                  </a:tcPr>
+                </a:tc>
+                <a:tc>
+                  <a:txBody>
+                    <a:bodyPr wrap="square"/>
+                    <a:lstStyle/>
+                    <a:p>
+                      <a:pPr algn="l"/>
+                      <a:r>
+                        <a:rPr sz="919" b="0">
+                          <a:solidFill>
+                            <a:srgbClr val="3FB950"/>
+                          </a:solidFill>
+                          <a:latin typeface="PingFang SC"/>
+                          <a:ea typeface="PingFang SC"/>
+                          <a:cs typeface="PingFang SC"/>
+                        </a:rPr>
+                        <a:t>✓ 许可清晰，可直接用</a:t>
+                      </a:r>
+                    </a:p>
+                  </a:txBody>
+                  <a:tcPr marL="91440" marR="54864" marT="18288" marB="18288" anchor="ctr">
+                    <a:solidFill>
+                      <a:srgbClr val="0E1116"/>
+                    </a:solidFill>
+                  </a:tcPr>
+                </a:tc>
+              </a:tr>
+              <a:tr h="402336">
+                <a:tc>
+                  <a:txBody>
+                    <a:bodyPr wrap="square"/>
+                    <a:lstStyle/>
+                    <a:p>
+                      <a:pPr algn="l"/>
+                      <a:r>
+                        <a:rPr sz="919" b="0">
+                          <a:solidFill>
+                            <a:srgbClr val="E6EDF3"/>
+                          </a:solidFill>
+                          <a:latin typeface="PingFang SC"/>
+                          <a:ea typeface="PingFang SC"/>
+                          <a:cs typeface="PingFang SC"/>
+                        </a:rPr>
+                        <a:t>LBST/t16_..._agilex_smolvla_18k</a:t>
+                      </a:r>
+                    </a:p>
+                  </a:txBody>
+                  <a:tcPr marL="91440" marR="54864" marT="18288" marB="18288" anchor="ctr">
+                    <a:solidFill>
+                      <a:srgbClr val="161B22"/>
+                    </a:solidFill>
+                  </a:tcPr>
+                </a:tc>
+                <a:tc>
+                  <a:txBody>
+                    <a:bodyPr wrap="square"/>
+                    <a:lstStyle/>
+                    <a:p>
+                      <a:pPr algn="l"/>
+                      <a:r>
+                        <a:rPr sz="919" b="0">
+                          <a:solidFill>
+                            <a:srgbClr val="E6EDF3"/>
+                          </a:solidFill>
+                          <a:latin typeface="PingFang SC"/>
+                          <a:ea typeface="PingFang SC"/>
+                          <a:cs typeface="PingFang SC"/>
+                        </a:rPr>
+                        <a:t>SmolVLA 权重 · action[14] · 3 相机</a:t>
+                      </a:r>
+                    </a:p>
+                  </a:txBody>
+                  <a:tcPr marL="91440" marR="54864" marT="18288" marB="18288" anchor="ctr">
+                    <a:solidFill>
+                      <a:srgbClr val="161B22"/>
+                    </a:solidFill>
+                  </a:tcPr>
+                </a:tc>
+                <a:tc>
+                  <a:txBody>
+                    <a:bodyPr wrap="square"/>
+                    <a:lstStyle/>
+                    <a:p>
+                      <a:pPr algn="l"/>
+                      <a:r>
+                        <a:rPr sz="919" b="0">
+                          <a:solidFill>
+                            <a:srgbClr val="3FB950"/>
+                          </a:solidFill>
+                          <a:latin typeface="PingFang SC"/>
+                          <a:ea typeface="PingFang SC"/>
+                          <a:cs typeface="PingFang SC"/>
+                        </a:rPr>
+                        <a:t>✓ 最接近的现成起点</a:t>
+                      </a:r>
+                    </a:p>
+                  </a:txBody>
+                  <a:tcPr marL="91440" marR="54864" marT="18288" marB="18288" anchor="ctr">
+                    <a:solidFill>
+                      <a:srgbClr val="161B22"/>
+                    </a:solidFill>
+                  </a:tcPr>
+                </a:tc>
+              </a:tr>
+              <a:tr h="402336">
+                <a:tc>
+                  <a:txBody>
+                    <a:bodyPr wrap="square"/>
+                    <a:lstStyle/>
+                    <a:p>
+                      <a:pPr algn="l"/>
+                      <a:r>
+                        <a:rPr sz="919" b="0">
+                          <a:solidFill>
+                            <a:srgbClr val="E6EDF3"/>
+                          </a:solidFill>
+                          <a:latin typeface="PingFang SC"/>
+                          <a:ea typeface="PingFang SC"/>
+                          <a:cs typeface="PingFang SC"/>
+                        </a:rPr>
+                        <a:t>Godrlic/piper-dual-arm</a:t>
+                      </a:r>
+                    </a:p>
+                  </a:txBody>
+                  <a:tcPr marL="91440" marR="54864" marT="18288" marB="18288" anchor="ctr">
+                    <a:solidFill>
+                      <a:srgbClr val="0E1116"/>
+                    </a:solidFill>
+                  </a:tcPr>
+                </a:tc>
+                <a:tc>
+                  <a:txBody>
+                    <a:bodyPr wrap="square"/>
+                    <a:lstStyle/>
+                    <a:p>
+                      <a:pPr algn="l"/>
+                      <a:r>
+                        <a:rPr sz="919" b="0">
+                          <a:solidFill>
+                            <a:srgbClr val="E6EDF3"/>
+                          </a:solidFill>
+                          <a:latin typeface="PingFang SC"/>
+                          <a:ea typeface="PingFang SC"/>
+                          <a:cs typeface="PingFang SC"/>
+                        </a:rPr>
+                        <a:t>HDF5 · plug_insertion 11.4 GB</a:t>
+                      </a:r>
+                    </a:p>
+                  </a:txBody>
+                  <a:tcPr marL="91440" marR="54864" marT="18288" marB="18288" anchor="ctr">
+                    <a:solidFill>
+                      <a:srgbClr val="0E1116"/>
+                    </a:solidFill>
+                  </a:tcPr>
+                </a:tc>
+                <a:tc>
+                  <a:txBody>
+                    <a:bodyPr wrap="square"/>
+                    <a:lstStyle/>
+                    <a:p>
+                      <a:pPr algn="l"/>
+                      <a:r>
+                        <a:rPr sz="919" b="0">
+                          <a:solidFill>
+                            <a:srgbClr val="D29922"/>
+                          </a:solidFill>
+                          <a:latin typeface="PingFang SC"/>
+                          <a:ea typeface="PingFang SC"/>
+                          <a:cs typeface="PingFang SC"/>
+                        </a:rPr>
+                        <a:t>⚠ 需转 LeRobot 格式</a:t>
+                      </a:r>
+                    </a:p>
+                  </a:txBody>
+                  <a:tcPr marL="91440" marR="54864" marT="18288" marB="18288" anchor="ctr">
+                    <a:solidFill>
+                      <a:srgbClr val="0E1116"/>
+                    </a:solidFill>
+                  </a:tcPr>
+                </a:tc>
+              </a:tr>
+              <a:tr h="402336">
+                <a:tc>
+                  <a:txBody>
+                    <a:bodyPr wrap="square"/>
+                    <a:lstStyle/>
+                    <a:p>
+                      <a:pPr algn="l"/>
+                      <a:r>
+                        <a:rPr sz="919" b="0">
+                          <a:solidFill>
+                            <a:srgbClr val="E6EDF3"/>
+                          </a:solidFill>
+                          <a:latin typeface="PingFang SC"/>
+                          <a:ea typeface="PingFang SC"/>
+                          <a:cs typeface="PingFang SC"/>
+                        </a:rPr>
+                        <a:t>Open X-Embodiment / RLDS</a:t>
+                      </a:r>
+                    </a:p>
+                  </a:txBody>
+                  <a:tcPr marL="91440" marR="54864" marT="18288" marB="18288" anchor="ctr">
+                    <a:solidFill>
+                      <a:srgbClr val="161B22"/>
+                    </a:solidFill>
+                  </a:tcPr>
+                </a:tc>
+                <a:tc>
+                  <a:txBody>
+                    <a:bodyPr wrap="square"/>
+                    <a:lstStyle/>
+                    <a:p>
+                      <a:pPr algn="l"/>
+                      <a:r>
+                        <a:rPr sz="919" b="0">
+                          <a:solidFill>
+                            <a:srgbClr val="E6EDF3"/>
+                          </a:solidFill>
+                          <a:latin typeface="PingFang SC"/>
+                          <a:ea typeface="PingFang SC"/>
+                          <a:cs typeface="PingFang SC"/>
+                        </a:rPr>
+                        <a:t>70 个键里 0 条 Piper</a:t>
+                      </a:r>
+                    </a:p>
+                  </a:txBody>
+                  <a:tcPr marL="91440" marR="54864" marT="18288" marB="18288" anchor="ctr">
+                    <a:solidFill>
+                      <a:srgbClr val="161B22"/>
+                    </a:solidFill>
+                  </a:tcPr>
+                </a:tc>
+                <a:tc>
+                  <a:txBody>
+                    <a:bodyPr wrap="square"/>
+                    <a:lstStyle/>
+                    <a:p>
+                      <a:pPr algn="l"/>
+                      <a:r>
+                        <a:rPr sz="919" b="0">
+                          <a:solidFill>
+                            <a:srgbClr val="F85149"/>
+                          </a:solidFill>
+                          <a:latin typeface="PingFang SC"/>
+                          <a:ea typeface="PingFang SC"/>
+                          <a:cs typeface="PingFang SC"/>
+                        </a:rPr>
+                        <a:t>✗ 不可用</a:t>
+                      </a:r>
+                    </a:p>
+                  </a:txBody>
+                  <a:tcPr marL="91440" marR="54864" marT="18288" marB="18288" anchor="ctr">
+                    <a:solidFill>
+                      <a:srgbClr val="161B22"/>
+                    </a:solidFill>
+                  </a:tcPr>
+                </a:tc>
+              </a:tr>
+              <a:tr h="402336">
+                <a:tc>
+                  <a:txBody>
+                    <a:bodyPr wrap="square"/>
+                    <a:lstStyle/>
+                    <a:p>
+                      <a:pPr algn="l"/>
+                      <a:r>
+                        <a:rPr sz="919" b="0">
+                          <a:solidFill>
+                            <a:srgbClr val="E6EDF3"/>
+                          </a:solidFill>
+                          <a:latin typeface="PingFang SC"/>
+                          <a:ea typeface="PingFang SC"/>
+                          <a:cs typeface="PingFang SC"/>
+                        </a:rPr>
+                        <a:t>villekuosmanen/agilex_*  (~40 个)</a:t>
+                      </a:r>
+                    </a:p>
+                  </a:txBody>
+                  <a:tcPr marL="91440" marR="54864" marT="18288" marB="18288" anchor="ctr">
+                    <a:solidFill>
+                      <a:srgbClr val="0E1116"/>
+                    </a:solidFill>
+                  </a:tcPr>
+                </a:tc>
+                <a:tc>
+                  <a:txBody>
+                    <a:bodyPr wrap="square"/>
+                    <a:lstStyle/>
+                    <a:p>
+                      <a:pPr algn="l"/>
+                      <a:r>
+                        <a:rPr sz="919" b="0">
+                          <a:solidFill>
+                            <a:srgbClr val="E6EDF3"/>
+                          </a:solidFill>
+                          <a:latin typeface="PingFang SC"/>
+                          <a:ea typeface="PingFang SC"/>
+                          <a:cs typeface="PingFang SC"/>
+                        </a:rPr>
+                        <a:t>robot_type = arx5_bimanual</a:t>
+                      </a:r>
+                    </a:p>
+                  </a:txBody>
+                  <a:tcPr marL="91440" marR="54864" marT="18288" marB="18288" anchor="ctr">
+                    <a:solidFill>
+                      <a:srgbClr val="0E1116"/>
+                    </a:solidFill>
+                  </a:tcPr>
+                </a:tc>
+                <a:tc>
+                  <a:txBody>
+                    <a:bodyPr wrap="square"/>
+                    <a:lstStyle/>
+                    <a:p>
+                      <a:pPr algn="l"/>
+                      <a:r>
+                        <a:rPr sz="919" b="0">
+                          <a:solidFill>
+                            <a:srgbClr val="F85149"/>
+                          </a:solidFill>
+                          <a:latin typeface="PingFang SC"/>
+                          <a:ea typeface="PingFang SC"/>
+                          <a:cs typeface="PingFang SC"/>
+                        </a:rPr>
+                        <a:t>✗ 陷阱：ARX5 不是 Piper</a:t>
+                      </a:r>
+                    </a:p>
+                  </a:txBody>
+                  <a:tcPr marL="91440" marR="54864" marT="18288" marB="18288" anchor="ctr">
+                    <a:solidFill>
+                      <a:srgbClr val="0E1116"/>
+                    </a:solidFill>
+                  </a:tcPr>
+                </a:tc>
+              </a:tr>
+              <a:tr h="402336">
+                <a:tc>
+                  <a:txBody>
+                    <a:bodyPr wrap="square"/>
+                    <a:lstStyle/>
+                    <a:p>
+                      <a:pPr algn="l"/>
+                      <a:r>
+                        <a:rPr sz="919" b="0">
+                          <a:solidFill>
+                            <a:srgbClr val="E6EDF3"/>
+                          </a:solidFill>
+                          <a:latin typeface="PingFang SC"/>
+                          <a:ea typeface="PingFang SC"/>
+                          <a:cs typeface="PingFang SC"/>
+                        </a:rPr>
+                        <a:t>openpi-agilex</a:t>
+                      </a:r>
+                    </a:p>
+                  </a:txBody>
+                  <a:tcPr marL="91440" marR="54864" marT="18288" marB="18288" anchor="ctr">
+                    <a:solidFill>
+                      <a:srgbClr val="161B22"/>
+                    </a:solidFill>
+                  </a:tcPr>
+                </a:tc>
+                <a:tc>
+                  <a:txBody>
+                    <a:bodyPr wrap="square"/>
+                    <a:lstStyle/>
+                    <a:p>
+                      <a:pPr algn="l"/>
+                      <a:r>
+                        <a:rPr sz="919" b="0">
+                          <a:solidFill>
+                            <a:srgbClr val="E6EDF3"/>
+                          </a:solidFill>
+                          <a:latin typeface="PingFang SC"/>
+                          <a:ea typeface="PingFang SC"/>
+                          <a:cs typeface="PingFang SC"/>
+                        </a:rPr>
+                        <a:t>只有 ALOHA 配置 + piper_FK/IK 脚本</a:t>
+                      </a:r>
+                    </a:p>
+                  </a:txBody>
+                  <a:tcPr marL="91440" marR="54864" marT="18288" marB="18288" anchor="ctr">
+                    <a:solidFill>
+                      <a:srgbClr val="161B22"/>
+                    </a:solidFill>
+                  </a:tcPr>
+                </a:tc>
+                <a:tc>
+                  <a:txBody>
+                    <a:bodyPr wrap="square"/>
+                    <a:lstStyle/>
+                    <a:p>
+                      <a:pPr algn="l"/>
+                      <a:r>
+                        <a:rPr sz="919" b="0">
+                          <a:solidFill>
+                            <a:srgbClr val="F85149"/>
+                          </a:solidFill>
+                          <a:latin typeface="PingFang SC"/>
+                          <a:ea typeface="PingFang SC"/>
+                          <a:cs typeface="PingFang SC"/>
+                        </a:rPr>
+                        <a:t>✗ 没有 Piper 的 TrainConfig</a:t>
+                      </a:r>
+                    </a:p>
+                  </a:txBody>
+                  <a:tcPr marL="91440" marR="54864" marT="18288" marB="18288" anchor="ctr">
+                    <a:solidFill>
+                      <a:srgbClr val="161B22"/>
+                    </a:solidFill>
+                  </a:tcPr>
+                </a:tc>
+              </a:tr>
+            </a:tbl>
+          </a:graphicData>
+        </a:graphic>
+      </p:graphicFrame>
+      <p:sp>
+        <p:nvSpPr>
+          <p:cNvPr id="11" name="TextBox 10"/>
+          <p:cNvSpPr txBox="1"/>
+          <p:nvPr/>
+        </p:nvSpPr>
+        <p:spPr>
+          <a:xfrm>
+            <a:off x="566928" y="5394960"/>
+            <a:ext cx="10881360" cy="914400"/>
+          </a:xfrm>
+          <a:prstGeom prst="rect">
+            <a:avLst/>
+          </a:prstGeom>
+          <a:noFill/>
+        </p:spPr>
+        <p:txBody>
+          <a:bodyPr wrap="square" lIns="0" rIns="0" tIns="0" bIns="0" anchor="t">
+            <a:spAutoFit/>
+          </a:bodyPr>
+          <a:lstStyle/>
+          <a:p>
+            <a:pPr algn="l">
+              <a:spcBef>
+                <a:spcPts val="0"/>
+              </a:spcBef>
+              <a:spcAft>
+                <a:spcPts val="0"/>
+              </a:spcAft>
+            </a:pPr>
+            <a:r>
+              <a:rPr sz="1250" b="1">
+                <a:solidFill>
+                  <a:srgbClr val="3EC5C9"/>
+                </a:solidFill>
+                <a:latin typeface="PingFang SC"/>
+                <a:ea typeface="PingFang SC"/>
+                <a:cs typeface="PingFang SC"/>
+              </a:rPr>
+              <a:t>最关键的一条：32 维 padding</a:t>
+            </a:r>
+          </a:p>
+          <a:p>
+            <a:pPr>
+              <a:spcBef>
+                <a:spcPts val="0"/>
+              </a:spcBef>
+              <a:spcAft>
+                <a:spcPts val="0"/>
+              </a:spcAft>
+            </a:pPr>
+            <a:r>
+              <a:rPr sz="1200" b="0">
+                <a:solidFill>
+                  <a:srgbClr val="E6EDF3"/>
+                </a:solidFill>
+                <a:latin typeface="PingFang SC"/>
+                <a:ea typeface="PingFang SC"/>
+                <a:cs typeface="PingFang SC"/>
+              </a:rPr>
+              <a:t>pi0 / pi0.5 / pi0-FAST / SmolVLA 的动作头都是 32 维 padded（action_dim=32），所以 14 维双臂在结构上放得下 —— 但必须微调，不能零样本迁移。</a:t>
+            </a:r>
+          </a:p>
+          <a:p>
+            <a:pPr>
+              <a:spcBef>
+                <a:spcPts val="0"/>
+              </a:spcBef>
+              <a:spcAft>
+                <a:spcPts val="0"/>
+              </a:spcAft>
+            </a:pPr>
+            <a:r>
+              <a:rPr sz="1200" b="0">
+                <a:solidFill>
+                  <a:srgbClr val="8B949E"/>
+                </a:solidFill>
+                <a:latin typeface="PingFang SC"/>
+                <a:ea typeface="PingFang SC"/>
+                <a:cs typeface="PingFang SC"/>
+              </a:rPr>
+              <a:t>已有人做到：yuffish/robotwin-pi0_aloha-agilex_clean-50 的 norm_stats 就是 14-in-32。</a:t>
+            </a:r>
+          </a:p>
+        </p:txBody>
+      </p:sp>
+    </p:spTree>
+  </p:cSld>
+  <p:clrMapOvr>
+    <a:masterClrMapping/>
+  </p:clrMapOvr>
+</p:sld>
+</file>
+
+<file path=ppt/slides/slide15.xml><?xml version="1.0" encoding="utf-8"?>
+<p:sld xmlns:a="http://schemas.openxmlformats.org/drawingml/2006/main" xmlns:p="http://schemas.openxmlformats.org/presentationml/2006/main" xmlns:r="http://schemas.openxmlformats.org/officeDocument/2006/relationships">
+  <p:cSld>
+    <p:spTree>
+      <p:nvGrpSpPr>
+        <p:cNvPr id="1" name=""/>
+        <p:cNvGrpSpPr/>
+        <p:nvPr/>
+      </p:nvGrpSpPr>
+      <p:grpSpPr/>
+      <p:sp>
+        <p:nvSpPr>
+          <p:cNvPr id="2" name="Rectangle 1"/>
+          <p:cNvSpPr/>
+          <p:nvPr/>
+        </p:nvSpPr>
+        <p:spPr>
+          <a:xfrm>
+            <a:off x="0" y="0"/>
+            <a:ext cx="12191695" cy="6858000"/>
+          </a:xfrm>
+          <a:prstGeom prst="rect">
+            <a:avLst/>
+          </a:prstGeom>
+          <a:solidFill>
+            <a:srgbClr val="0E1116"/>
+          </a:solidFill>
+          <a:ln>
+            <a:noFill/>
+          </a:ln>
+          <a:effectLst/>
+        </p:spPr>
+        <p:style>
+          <a:lnRef idx="1">
+            <a:schemeClr val="accent1"/>
+          </a:lnRef>
+          <a:fillRef idx="3">
+            <a:schemeClr val="accent1"/>
+          </a:fillRef>
+          <a:effectRef idx="2">
+            <a:schemeClr val="accent1"/>
+          </a:effectRef>
+          <a:fontRef idx="minor">
+            <a:schemeClr val="lt1"/>
+          </a:fontRef>
+        </p:style>
+        <p:txBody>
+          <a:bodyPr rtlCol="0" anchor="ctr"/>
+          <a:lstStyle/>
+          <a:p>
+            <a:pPr algn="ctr"/>
+          </a:p>
+        </p:txBody>
+      </p:sp>
+      <p:sp>
+        <p:nvSpPr>
+          <p:cNvPr id="3" name="Rectangle 2"/>
+          <p:cNvSpPr/>
+          <p:nvPr/>
+        </p:nvSpPr>
+        <p:spPr>
+          <a:xfrm>
+            <a:off x="566928" y="457200"/>
+            <a:ext cx="566928" cy="41148"/>
+          </a:xfrm>
+          <a:prstGeom prst="rect">
+            <a:avLst/>
+          </a:prstGeom>
+          <a:solidFill>
+            <a:srgbClr val="3EC5C9"/>
+          </a:solidFill>
+          <a:ln>
+            <a:noFill/>
+          </a:ln>
+          <a:effectLst/>
+        </p:spPr>
+        <p:style>
+          <a:lnRef idx="1">
+            <a:schemeClr val="accent1"/>
+          </a:lnRef>
+          <a:fillRef idx="3">
+            <a:schemeClr val="accent1"/>
+          </a:fillRef>
+          <a:effectRef idx="2">
+            <a:schemeClr val="accent1"/>
+          </a:effectRef>
+          <a:fontRef idx="minor">
+            <a:schemeClr val="lt1"/>
+          </a:fontRef>
+        </p:style>
+        <p:txBody>
+          <a:bodyPr rtlCol="0" anchor="ctr"/>
+          <a:lstStyle/>
+          <a:p>
+            <a:pPr algn="ctr"/>
+          </a:p>
+        </p:txBody>
+      </p:sp>
+      <p:sp>
+        <p:nvSpPr>
+          <p:cNvPr id="4" name="TextBox 3"/>
+          <p:cNvSpPr txBox="1"/>
+          <p:nvPr/>
+        </p:nvSpPr>
+        <p:spPr>
+          <a:xfrm>
+            <a:off x="566928" y="566928"/>
+            <a:ext cx="10058400" cy="274320"/>
+          </a:xfrm>
+          <a:prstGeom prst="rect">
+            <a:avLst/>
+          </a:prstGeom>
+          <a:noFill/>
+        </p:spPr>
+        <p:txBody>
+          <a:bodyPr wrap="square" lIns="0" rIns="0" tIns="0" bIns="0" anchor="t">
+            <a:spAutoFit/>
+          </a:bodyPr>
+          <a:lstStyle/>
+          <a:p>
+            <a:pPr algn="l">
+              <a:spcBef>
+                <a:spcPts val="0"/>
+              </a:spcBef>
+              <a:spcAft>
+                <a:spcPts val="0"/>
+              </a:spcAft>
+            </a:pPr>
+            <a:r>
+              <a:rPr sz="1150" b="1">
+                <a:solidFill>
+                  <a:srgbClr val="3EC5C9"/>
+                </a:solidFill>
+                <a:latin typeface="PingFang SC"/>
+                <a:ea typeface="PingFang SC"/>
+                <a:cs typeface="PingFang SC"/>
+              </a:rPr>
+              <a:t>SIMULATION</a:t>
+            </a:r>
+          </a:p>
+        </p:txBody>
+      </p:sp>
+      <p:sp>
+        <p:nvSpPr>
+          <p:cNvPr id="5" name="TextBox 4"/>
+          <p:cNvSpPr txBox="1"/>
+          <p:nvPr/>
+        </p:nvSpPr>
+        <p:spPr>
+          <a:xfrm>
+            <a:off x="566928" y="822960"/>
+            <a:ext cx="10607040" cy="566928"/>
+          </a:xfrm>
+          <a:prstGeom prst="rect">
+            <a:avLst/>
+          </a:prstGeom>
+          <a:noFill/>
+        </p:spPr>
+        <p:txBody>
+          <a:bodyPr wrap="square" lIns="0" rIns="0" tIns="0" bIns="0" anchor="t">
+            <a:spAutoFit/>
+          </a:bodyPr>
+          <a:lstStyle/>
+          <a:p>
+            <a:pPr algn="l">
+              <a:spcBef>
+                <a:spcPts val="0"/>
+              </a:spcBef>
+              <a:spcAft>
+                <a:spcPts val="0"/>
+              </a:spcAft>
+            </a:pPr>
+            <a:r>
+              <a:rPr sz="2900" b="1">
+                <a:solidFill>
+                  <a:srgbClr val="E6EDF3"/>
+                </a:solidFill>
+                <a:latin typeface="PingFang SC"/>
+                <a:ea typeface="PingFang SC"/>
+                <a:cs typeface="PingFang SC"/>
+              </a:rPr>
+              <a:t>哪个仿真环境真的能用</a:t>
+            </a:r>
+          </a:p>
+        </p:txBody>
+      </p:sp>
+      <p:sp>
+        <p:nvSpPr>
+          <p:cNvPr id="6" name="TextBox 5"/>
+          <p:cNvSpPr txBox="1"/>
+          <p:nvPr/>
+        </p:nvSpPr>
+        <p:spPr>
+          <a:xfrm>
+            <a:off x="566928" y="1389888"/>
+            <a:ext cx="10607040" cy="310896"/>
+          </a:xfrm>
+          <a:prstGeom prst="rect">
+            <a:avLst/>
+          </a:prstGeom>
+          <a:noFill/>
+        </p:spPr>
+        <p:txBody>
+          <a:bodyPr wrap="square" lIns="0" rIns="0" tIns="0" bIns="0" anchor="t">
+            <a:spAutoFit/>
+          </a:bodyPr>
+          <a:lstStyle/>
+          <a:p>
+            <a:pPr algn="l">
+              <a:spcBef>
+                <a:spcPts val="0"/>
+              </a:spcBef>
+              <a:spcAft>
+                <a:spcPts val="0"/>
+              </a:spcAft>
+            </a:pPr>
+            <a:r>
+              <a:rPr sz="1300" b="0">
+                <a:solidFill>
+                  <a:srgbClr val="8B949E"/>
+                </a:solidFill>
+                <a:latin typeface="PingFang SC"/>
+                <a:ea typeface="PingFang SC"/>
+                <a:cs typeface="PingFang SC"/>
+              </a:rPr>
+              <a:t>判据：有真实 Piper 模型、能在 Mac 上装、不需要 GPU</a:t>
+            </a:r>
+          </a:p>
+        </p:txBody>
+      </p:sp>
+      <p:sp>
+        <p:nvSpPr>
+          <p:cNvPr id="7" name="Rectangle 6"/>
+          <p:cNvSpPr/>
+          <p:nvPr/>
+        </p:nvSpPr>
+        <p:spPr>
+          <a:xfrm>
+            <a:off x="566928" y="6345936"/>
+            <a:ext cx="11057839" cy="9525"/>
+          </a:xfrm>
+          <a:prstGeom prst="rect">
+            <a:avLst/>
+          </a:prstGeom>
+          <a:solidFill>
+            <a:srgbClr val="2A313C"/>
+          </a:solidFill>
+          <a:ln>
+            <a:noFill/>
+          </a:ln>
+          <a:effectLst/>
+        </p:spPr>
+        <p:style>
+          <a:lnRef idx="1">
+            <a:schemeClr val="accent1"/>
+          </a:lnRef>
+          <a:fillRef idx="3">
+            <a:schemeClr val="accent1"/>
+          </a:fillRef>
+          <a:effectRef idx="2">
+            <a:schemeClr val="accent1"/>
+          </a:effectRef>
+          <a:fontRef idx="minor">
+            <a:schemeClr val="lt1"/>
+          </a:fontRef>
+        </p:style>
+        <p:txBody>
+          <a:bodyPr rtlCol="0" anchor="ctr"/>
+          <a:lstStyle/>
+          <a:p>
+            <a:pPr algn="ctr"/>
+          </a:p>
+        </p:txBody>
+      </p:sp>
+      <p:sp>
+        <p:nvSpPr>
+          <p:cNvPr id="8" name="TextBox 7"/>
+          <p:cNvSpPr txBox="1"/>
+          <p:nvPr/>
+        </p:nvSpPr>
+        <p:spPr>
+          <a:xfrm>
+            <a:off x="566928" y="6428232"/>
+            <a:ext cx="8229600" cy="256032"/>
+          </a:xfrm>
+          <a:prstGeom prst="rect">
+            <a:avLst/>
+          </a:prstGeom>
+          <a:noFill/>
+        </p:spPr>
+        <p:txBody>
+          <a:bodyPr wrap="square" lIns="0" rIns="0" tIns="0" bIns="0" anchor="t">
+            <a:spAutoFit/>
+          </a:bodyPr>
+          <a:lstStyle/>
+          <a:p>
+            <a:pPr algn="l">
+              <a:spcBef>
+                <a:spcPts val="0"/>
+              </a:spcBef>
+              <a:spcAft>
+                <a:spcPts val="0"/>
+              </a:spcAft>
+            </a:pPr>
+            <a:r>
+              <a:rPr sz="950" b="0">
+                <a:solidFill>
+                  <a:srgbClr val="8B949E"/>
+                </a:solidFill>
+                <a:latin typeface="PingFang SC"/>
+                <a:ea typeface="PingFang SC"/>
+                <a:cs typeface="PingFang SC"/>
+              </a:rPr>
+              <a:t>第三轮 · 操作方式 / 开源数据 / 仿真 · 2026-10-29</a:t>
+            </a:r>
+          </a:p>
+        </p:txBody>
+      </p:sp>
+      <p:sp>
+        <p:nvSpPr>
+          <p:cNvPr id="9" name="TextBox 8"/>
+          <p:cNvSpPr txBox="1"/>
+          <p:nvPr/>
+        </p:nvSpPr>
+        <p:spPr>
+          <a:xfrm>
+            <a:off x="10710367" y="6428232"/>
+            <a:ext cx="914400" cy="256032"/>
+          </a:xfrm>
+          <a:prstGeom prst="rect">
+            <a:avLst/>
+          </a:prstGeom>
+          <a:noFill/>
+        </p:spPr>
+        <p:txBody>
+          <a:bodyPr wrap="square" lIns="0" rIns="0" tIns="0" bIns="0" anchor="t">
+            <a:spAutoFit/>
+          </a:bodyPr>
+          <a:lstStyle/>
+          <a:p>
+            <a:pPr algn="r">
+              <a:spcBef>
+                <a:spcPts val="0"/>
+              </a:spcBef>
+              <a:spcAft>
+                <a:spcPts val="0"/>
+              </a:spcAft>
+            </a:pPr>
+            <a:r>
+              <a:rPr sz="1000" b="1">
+                <a:solidFill>
+                  <a:srgbClr val="3EC5C9"/>
+                </a:solidFill>
+                <a:latin typeface="Helvetica Neue"/>
+                <a:ea typeface="PingFang SC"/>
+                <a:cs typeface="PingFang SC"/>
+              </a:rPr>
+              <a:t>15</a:t>
+            </a:r>
+          </a:p>
+        </p:txBody>
+      </p:sp>
+      <p:graphicFrame>
+        <p:nvGraphicFramePr>
+          <p:cNvPr id="10" name="Table 9"/>
+          <p:cNvGraphicFramePr>
+            <a:graphicFrameLocks noGrp="1"/>
+          </p:cNvGraphicFramePr>
+          <p:nvPr/>
+        </p:nvGraphicFramePr>
+        <p:xfrm>
+          <a:off x="566928" y="1737360"/>
+          <a:ext cx="11055095" cy="3200400"/>
+        </p:xfrm>
+        <a:graphic>
+          <a:graphicData uri="http://schemas.openxmlformats.org/drawingml/2006/table">
+            <a:tbl>
+              <a:tblPr firstRow="1" bandRow="1">
+                <a:tableStyleId>{5C22544A-7EE6-4342-B048-85BDC9FD1C3A}</a:tableStyleId>
+              </a:tblPr>
+              <a:tblGrid>
+                <a:gridCol w="1874519"/>
+                <a:gridCol w="4892040"/>
+                <a:gridCol w="2103120"/>
+                <a:gridCol w="2185416"/>
+              </a:tblGrid>
+              <a:tr h="457200">
+                <a:tc>
+                  <a:txBody>
+                    <a:bodyPr wrap="square"/>
+                    <a:lstStyle/>
+                    <a:p>
+                      <a:pPr algn="l"/>
+                      <a:r>
+                        <a:rPr sz="1019" b="1">
+                          <a:solidFill>
+                            <a:srgbClr val="8B949E"/>
+                          </a:solidFill>
+                          <a:latin typeface="PingFang SC"/>
+                          <a:ea typeface="PingFang SC"/>
+                          <a:cs typeface="PingFang SC"/>
+                        </a:rPr>
+                        <a:t>环境</a:t>
+                      </a:r>
+                    </a:p>
+                  </a:txBody>
+                  <a:tcPr marL="91440" marR="54864" marT="18288" marB="18288" anchor="ctr">
+                    <a:solidFill>
+                      <a:srgbClr val="1C222B"/>
+                    </a:solidFill>
+                  </a:tcPr>
+                </a:tc>
+                <a:tc>
+                  <a:txBody>
+                    <a:bodyPr wrap="square"/>
+                    <a:lstStyle/>
+                    <a:p>
+                      <a:pPr algn="l"/>
+                      <a:r>
+                        <a:rPr sz="1019" b="1">
+                          <a:solidFill>
+                            <a:srgbClr val="8B949E"/>
+                          </a:solidFill>
+                          <a:latin typeface="PingFang SC"/>
+                          <a:ea typeface="PingFang SC"/>
+                          <a:cs typeface="PingFang SC"/>
+                        </a:rPr>
+                        <a:t>Piper 资产</a:t>
+                      </a:r>
+                    </a:p>
+                  </a:txBody>
+                  <a:tcPr marL="91440" marR="54864" marT="18288" marB="18288" anchor="ctr">
+                    <a:solidFill>
+                      <a:srgbClr val="1C222B"/>
+                    </a:solidFill>
+                  </a:tcPr>
+                </a:tc>
+                <a:tc>
+                  <a:txBody>
+                    <a:bodyPr wrap="square"/>
+                    <a:lstStyle/>
+                    <a:p>
+                      <a:pPr algn="l"/>
+                      <a:r>
+                        <a:rPr sz="1019" b="1">
+                          <a:solidFill>
+                            <a:srgbClr val="8B949E"/>
+                          </a:solidFill>
+                          <a:latin typeface="PingFang SC"/>
+                          <a:ea typeface="PingFang SC"/>
+                          <a:cs typeface="PingFang SC"/>
+                        </a:rPr>
+                        <a:t>安装难度</a:t>
+                      </a:r>
+                    </a:p>
+                  </a:txBody>
+                  <a:tcPr marL="91440" marR="54864" marT="18288" marB="18288" anchor="ctr">
+                    <a:solidFill>
+                      <a:srgbClr val="1C222B"/>
+                    </a:solidFill>
+                  </a:tcPr>
+                </a:tc>
+                <a:tc>
+                  <a:txBody>
+                    <a:bodyPr wrap="square"/>
+                    <a:lstStyle/>
+                    <a:p>
+                      <a:pPr algn="l"/>
+                      <a:r>
+                        <a:rPr sz="1019" b="1">
+                          <a:solidFill>
+                            <a:srgbClr val="8B949E"/>
+                          </a:solidFill>
+                          <a:latin typeface="PingFang SC"/>
+                          <a:ea typeface="PingFang SC"/>
+                          <a:cs typeface="PingFang SC"/>
+                        </a:rPr>
+                        <a:t>结论</a:t>
+                      </a:r>
+                    </a:p>
+                  </a:txBody>
+                  <a:tcPr marL="91440" marR="54864" marT="18288" marB="18288" anchor="ctr">
+                    <a:solidFill>
+                      <a:srgbClr val="1C222B"/>
+                    </a:solidFill>
+                  </a:tcPr>
+                </a:tc>
+              </a:tr>
+              <a:tr h="457200">
+                <a:tc>
+                  <a:txBody>
+                    <a:bodyPr wrap="square"/>
+                    <a:lstStyle/>
+                    <a:p>
+                      <a:pPr algn="l"/>
+                      <a:r>
+                        <a:rPr sz="980" b="0">
+                          <a:solidFill>
+                            <a:srgbClr val="E6EDF3"/>
+                          </a:solidFill>
+                          <a:latin typeface="PingFang SC"/>
+                          <a:ea typeface="PingFang SC"/>
+                          <a:cs typeface="PingFang SC"/>
+                        </a:rPr>
+                        <a:t>MuJoCo + Menagerie</a:t>
+                      </a:r>
+                    </a:p>
+                  </a:txBody>
+                  <a:tcPr marL="91440" marR="54864" marT="18288" marB="18288" anchor="ctr">
+                    <a:solidFill>
+                      <a:srgbClr val="161B22"/>
+                    </a:solidFill>
+                  </a:tcPr>
+                </a:tc>
+                <a:tc>
+                  <a:txBody>
+                    <a:bodyPr wrap="square"/>
+                    <a:lstStyle/>
+                    <a:p>
+                      <a:pPr algn="l"/>
+                      <a:r>
+                        <a:rPr sz="980" b="0">
+                          <a:solidFill>
+                            <a:srgbClr val="E6EDF3"/>
+                          </a:solidFill>
+                          <a:latin typeface="PingFang SC"/>
+                          <a:ea typeface="PingFang SC"/>
+                          <a:cs typeface="PingFang SC"/>
+                        </a:rPr>
+                        <a:t>agilex_piper（由官方 piper_description URDF 派生，MIT）</a:t>
+                      </a:r>
+                    </a:p>
+                  </a:txBody>
+                  <a:tcPr marL="91440" marR="54864" marT="18288" marB="18288" anchor="ctr">
+                    <a:solidFill>
+                      <a:srgbClr val="161B22"/>
+                    </a:solidFill>
+                  </a:tcPr>
+                </a:tc>
+                <a:tc>
+                  <a:txBody>
+                    <a:bodyPr wrap="square"/>
+                    <a:lstStyle/>
+                    <a:p>
+                      <a:pPr algn="l"/>
+                      <a:r>
+                        <a:rPr sz="980" b="0">
+                          <a:solidFill>
+                            <a:srgbClr val="E6EDF3"/>
+                          </a:solidFill>
+                          <a:latin typeface="PingFang SC"/>
+                          <a:ea typeface="PingFang SC"/>
+                          <a:cs typeface="PingFang SC"/>
+                        </a:rPr>
+                        <a:t>pip install mujoco</a:t>
+                      </a:r>
+                    </a:p>
+                  </a:txBody>
+                  <a:tcPr marL="91440" marR="54864" marT="18288" marB="18288" anchor="ctr">
+                    <a:solidFill>
+                      <a:srgbClr val="161B22"/>
+                    </a:solidFill>
+                  </a:tcPr>
+                </a:tc>
+                <a:tc>
+                  <a:txBody>
+                    <a:bodyPr wrap="square"/>
+                    <a:lstStyle/>
+                    <a:p>
+                      <a:pPr algn="l"/>
+                      <a:r>
+                        <a:rPr sz="980" b="0">
+                          <a:solidFill>
+                            <a:srgbClr val="3FB950"/>
+                          </a:solidFill>
+                          <a:latin typeface="PingFang SC"/>
+                          <a:ea typeface="PingFang SC"/>
+                          <a:cs typeface="PingFang SC"/>
+                        </a:rPr>
+                        <a:t>✓ 选它</a:t>
+                      </a:r>
+                    </a:p>
+                  </a:txBody>
+                  <a:tcPr marL="91440" marR="54864" marT="18288" marB="18288" anchor="ctr">
+                    <a:solidFill>
+                      <a:srgbClr val="161B22"/>
+                    </a:solidFill>
+                  </a:tcPr>
+                </a:tc>
+              </a:tr>
+              <a:tr h="457200">
+                <a:tc>
+                  <a:txBody>
+                    <a:bodyPr wrap="square"/>
+                    <a:lstStyle/>
+                    <a:p>
+                      <a:pPr algn="l"/>
+                      <a:r>
+                        <a:rPr sz="980" b="0">
+                          <a:solidFill>
+                            <a:srgbClr val="E6EDF3"/>
+                          </a:solidFill>
+                          <a:latin typeface="PingFang SC"/>
+                          <a:ea typeface="PingFang SC"/>
+                          <a:cs typeface="PingFang SC"/>
+                        </a:rPr>
+                        <a:t>Gazebo</a:t>
+                      </a:r>
+                    </a:p>
+                  </a:txBody>
+                  <a:tcPr marL="91440" marR="54864" marT="18288" marB="18288" anchor="ctr">
+                    <a:solidFill>
+                      <a:srgbClr val="0E1116"/>
+                    </a:solidFill>
+                  </a:tcPr>
+                </a:tc>
+                <a:tc>
+                  <a:txBody>
+                    <a:bodyPr wrap="square"/>
+                    <a:lstStyle/>
+                    <a:p>
+                      <a:pPr algn="l"/>
+                      <a:r>
+                        <a:rPr sz="980" b="0">
+                          <a:solidFill>
+                            <a:srgbClr val="E6EDF3"/>
+                          </a:solidFill>
+                          <a:latin typeface="PingFang SC"/>
+                          <a:ea typeface="PingFang SC"/>
+                          <a:cs typeface="PingFang SC"/>
+                        </a:rPr>
+                        <a:t>piper_ros 的 piper_description_gazebo.xacro（MIT）</a:t>
+                      </a:r>
+                    </a:p>
+                  </a:txBody>
+                  <a:tcPr marL="91440" marR="54864" marT="18288" marB="18288" anchor="ctr">
+                    <a:solidFill>
+                      <a:srgbClr val="0E1116"/>
+                    </a:solidFill>
+                  </a:tcPr>
+                </a:tc>
+                <a:tc>
+                  <a:txBody>
+                    <a:bodyPr wrap="square"/>
+                    <a:lstStyle/>
+                    <a:p>
+                      <a:pPr algn="l"/>
+                      <a:r>
+                        <a:rPr sz="980" b="0">
+                          <a:solidFill>
+                            <a:srgbClr val="E6EDF3"/>
+                          </a:solidFill>
+                          <a:latin typeface="PingFang SC"/>
+                          <a:ea typeface="PingFang SC"/>
+                          <a:cs typeface="PingFang SC"/>
+                        </a:rPr>
+                        <a:t>需 ROS 2 全套</a:t>
+                      </a:r>
+                    </a:p>
+                  </a:txBody>
+                  <a:tcPr marL="91440" marR="54864" marT="18288" marB="18288" anchor="ctr">
+                    <a:solidFill>
+                      <a:srgbClr val="0E1116"/>
+                    </a:solidFill>
+                  </a:tcPr>
+                </a:tc>
+                <a:tc>
+                  <a:txBody>
+                    <a:bodyPr wrap="square"/>
+                    <a:lstStyle/>
+                    <a:p>
+                      <a:pPr algn="l"/>
+                      <a:r>
+                        <a:rPr sz="980" b="0">
+                          <a:solidFill>
+                            <a:srgbClr val="D29922"/>
+                          </a:solidFill>
+                          <a:latin typeface="PingFang SC"/>
+                          <a:ea typeface="PingFang SC"/>
+                          <a:cs typeface="PingFang SC"/>
+                        </a:rPr>
+                        <a:t>⚠ 只适合 ROS 内集成</a:t>
+                      </a:r>
+                    </a:p>
+                  </a:txBody>
+                  <a:tcPr marL="91440" marR="54864" marT="18288" marB="18288" anchor="ctr">
+                    <a:solidFill>
+                      <a:srgbClr val="0E1116"/>
+                    </a:solidFill>
+                  </a:tcPr>
+                </a:tc>
+              </a:tr>
+              <a:tr h="457200">
+                <a:tc>
+                  <a:txBody>
+                    <a:bodyPr wrap="square"/>
+                    <a:lstStyle/>
+                    <a:p>
+                      <a:pPr algn="l"/>
+                      <a:r>
+                        <a:rPr sz="980" b="0">
+                          <a:solidFill>
+                            <a:srgbClr val="E6EDF3"/>
+                          </a:solidFill>
+                          <a:latin typeface="PingFang SC"/>
+                          <a:ea typeface="PingFang SC"/>
+                          <a:cs typeface="PingFang SC"/>
+                        </a:rPr>
+                        <a:t>Isaac Sim</a:t>
+                      </a:r>
+                    </a:p>
+                  </a:txBody>
+                  <a:tcPr marL="91440" marR="54864" marT="18288" marB="18288" anchor="ctr">
+                    <a:solidFill>
+                      <a:srgbClr val="161B22"/>
+                    </a:solidFill>
+                  </a:tcPr>
+                </a:tc>
+                <a:tc>
+                  <a:txBody>
+                    <a:bodyPr wrap="square"/>
+                    <a:lstStyle/>
+                    <a:p>
+                      <a:pPr algn="l"/>
+                      <a:r>
+                        <a:rPr sz="980" b="0">
+                          <a:solidFill>
+                            <a:srgbClr val="E6EDF3"/>
+                          </a:solidFill>
+                          <a:latin typeface="PingFang SC"/>
+                          <a:ea typeface="PingFang SC"/>
+                          <a:cs typeface="PingFang SC"/>
+                        </a:rPr>
+                        <a:t>piper_isaac_sim 提供 USD</a:t>
+                      </a:r>
+                    </a:p>
+                  </a:txBody>
+                  <a:tcPr marL="91440" marR="54864" marT="18288" marB="18288" anchor="ctr">
+                    <a:solidFill>
+                      <a:srgbClr val="161B22"/>
+                    </a:solidFill>
+                  </a:tcPr>
+                </a:tc>
+                <a:tc>
+                  <a:txBody>
+                    <a:bodyPr wrap="square"/>
+                    <a:lstStyle/>
+                    <a:p>
+                      <a:pPr algn="l"/>
+                      <a:r>
+                        <a:rPr sz="980" b="0">
+                          <a:solidFill>
+                            <a:srgbClr val="E6EDF3"/>
+                          </a:solidFill>
+                          <a:latin typeface="PingFang SC"/>
+                          <a:ea typeface="PingFang SC"/>
+                          <a:cs typeface="PingFang SC"/>
+                        </a:rPr>
+                        <a:t>重、需 GPU</a:t>
+                      </a:r>
+                    </a:p>
+                  </a:txBody>
+                  <a:tcPr marL="91440" marR="54864" marT="18288" marB="18288" anchor="ctr">
+                    <a:solidFill>
+                      <a:srgbClr val="161B22"/>
+                    </a:solidFill>
+                  </a:tcPr>
+                </a:tc>
+                <a:tc>
+                  <a:txBody>
+                    <a:bodyPr wrap="square"/>
+                    <a:lstStyle/>
+                    <a:p>
+                      <a:pPr algn="l"/>
+                      <a:r>
+                        <a:rPr sz="980" b="0">
+                          <a:solidFill>
+                            <a:srgbClr val="D29922"/>
+                          </a:solidFill>
+                          <a:latin typeface="PingFang SC"/>
+                          <a:ea typeface="PingFang SC"/>
+                          <a:cs typeface="PingFang SC"/>
+                        </a:rPr>
+                        <a:t>⚠ 太重</a:t>
+                      </a:r>
+                    </a:p>
+                  </a:txBody>
+                  <a:tcPr marL="91440" marR="54864" marT="18288" marB="18288" anchor="ctr">
+                    <a:solidFill>
+                      <a:srgbClr val="161B22"/>
+                    </a:solidFill>
+                  </a:tcPr>
+                </a:tc>
+              </a:tr>
+              <a:tr h="457200">
+                <a:tc>
+                  <a:txBody>
+                    <a:bodyPr wrap="square"/>
+                    <a:lstStyle/>
+                    <a:p>
+                      <a:pPr algn="l"/>
+                      <a:r>
+                        <a:rPr sz="980" b="0">
+                          <a:solidFill>
+                            <a:srgbClr val="E6EDF3"/>
+                          </a:solidFill>
+                          <a:latin typeface="PingFang SC"/>
+                          <a:ea typeface="PingFang SC"/>
+                          <a:cs typeface="PingFang SC"/>
+                        </a:rPr>
+                        <a:t>Isaac Lab</a:t>
+                      </a:r>
+                    </a:p>
+                  </a:txBody>
+                  <a:tcPr marL="91440" marR="54864" marT="18288" marB="18288" anchor="ctr">
+                    <a:solidFill>
+                      <a:srgbClr val="0E1116"/>
+                    </a:solidFill>
+                  </a:tcPr>
+                </a:tc>
+                <a:tc>
+                  <a:txBody>
+                    <a:bodyPr wrap="square"/>
+                    <a:lstStyle/>
+                    <a:p>
+                      <a:pPr algn="l"/>
+                      <a:r>
+                        <a:rPr sz="980" b="0">
+                          <a:solidFill>
+                            <a:srgbClr val="E6EDF3"/>
+                          </a:solidFill>
+                          <a:latin typeface="PingFang SC"/>
+                          <a:ea typeface="PingFang SC"/>
+                          <a:cs typeface="PingFang SC"/>
+                        </a:rPr>
+                        <a:t>无内置；agilexrobotics/robot_lab 另加</a:t>
+                      </a:r>
+                    </a:p>
+                  </a:txBody>
+                  <a:tcPr marL="91440" marR="54864" marT="18288" marB="18288" anchor="ctr">
+                    <a:solidFill>
+                      <a:srgbClr val="0E1116"/>
+                    </a:solidFill>
+                  </a:tcPr>
+                </a:tc>
+                <a:tc>
+                  <a:txBody>
+                    <a:bodyPr wrap="square"/>
+                    <a:lstStyle/>
+                    <a:p>
+                      <a:pPr algn="l"/>
+                      <a:r>
+                        <a:rPr sz="980" b="0">
+                          <a:solidFill>
+                            <a:srgbClr val="E6EDF3"/>
+                          </a:solidFill>
+                          <a:latin typeface="PingFang SC"/>
+                          <a:ea typeface="PingFang SC"/>
+                          <a:cs typeface="PingFang SC"/>
+                        </a:rPr>
+                        <a:t>重、需 GPU</a:t>
+                      </a:r>
+                    </a:p>
+                  </a:txBody>
+                  <a:tcPr marL="91440" marR="54864" marT="18288" marB="18288" anchor="ctr">
+                    <a:solidFill>
+                      <a:srgbClr val="0E1116"/>
+                    </a:solidFill>
+                  </a:tcPr>
+                </a:tc>
+                <a:tc>
+                  <a:txBody>
+                    <a:bodyPr wrap="square"/>
+                    <a:lstStyle/>
+                    <a:p>
+                      <a:pPr algn="l"/>
+                      <a:r>
+                        <a:rPr sz="980" b="0">
+                          <a:solidFill>
+                            <a:srgbClr val="F85149"/>
+                          </a:solidFill>
+                          <a:latin typeface="PingFang SC"/>
+                          <a:ea typeface="PingFang SC"/>
+                          <a:cs typeface="PingFang SC"/>
+                        </a:rPr>
+                        <a:t>✗ 本次不用</a:t>
+                      </a:r>
+                    </a:p>
+                  </a:txBody>
+                  <a:tcPr marL="91440" marR="54864" marT="18288" marB="18288" anchor="ctr">
+                    <a:solidFill>
+                      <a:srgbClr val="0E1116"/>
+                    </a:solidFill>
+                  </a:tcPr>
+                </a:tc>
+              </a:tr>
+              <a:tr h="457200">
+                <a:tc>
+                  <a:txBody>
+                    <a:bodyPr wrap="square"/>
+                    <a:lstStyle/>
+                    <a:p>
+                      <a:pPr algn="l"/>
+                      <a:r>
+                        <a:rPr sz="980" b="0">
+                          <a:solidFill>
+                            <a:srgbClr val="E6EDF3"/>
+                          </a:solidFill>
+                          <a:latin typeface="PingFang SC"/>
+                          <a:ea typeface="PingFang SC"/>
+                          <a:cs typeface="PingFang SC"/>
+                        </a:rPr>
+                        <a:t>PyBullet</a:t>
+                      </a:r>
+                    </a:p>
+                  </a:txBody>
+                  <a:tcPr marL="91440" marR="54864" marT="18288" marB="18288" anchor="ctr">
+                    <a:solidFill>
+                      <a:srgbClr val="161B22"/>
+                    </a:solidFill>
+                  </a:tcPr>
+                </a:tc>
+                <a:tc>
+                  <a:txBody>
+                    <a:bodyPr wrap="square"/>
+                    <a:lstStyle/>
+                    <a:p>
+                      <a:pPr algn="l"/>
+                      <a:r>
+                        <a:rPr sz="980" b="0">
+                          <a:solidFill>
+                            <a:srgbClr val="E6EDF3"/>
+                          </a:solidFill>
+                          <a:latin typeface="PingFang SC"/>
+                          <a:ea typeface="PingFang SC"/>
+                          <a:cs typeface="PingFang SC"/>
+                        </a:rPr>
+                        <a:t>仓库搜索 total_count: 0</a:t>
+                      </a:r>
+                    </a:p>
+                  </a:txBody>
+                  <a:tcPr marL="91440" marR="54864" marT="18288" marB="18288" anchor="ctr">
+                    <a:solidFill>
+                      <a:srgbClr val="161B22"/>
+                    </a:solidFill>
+                  </a:tcPr>
+                </a:tc>
+                <a:tc>
+                  <a:txBody>
+                    <a:bodyPr wrap="square"/>
+                    <a:lstStyle/>
+                    <a:p>
+                      <a:pPr algn="l"/>
+                      <a:r>
+                        <a:rPr sz="980" b="0">
+                          <a:solidFill>
+                            <a:srgbClr val="E6EDF3"/>
+                          </a:solidFill>
+                          <a:latin typeface="PingFang SC"/>
+                          <a:ea typeface="PingFang SC"/>
+                          <a:cs typeface="PingFang SC"/>
+                        </a:rPr>
+                        <a:t>—</a:t>
+                      </a:r>
+                    </a:p>
+                  </a:txBody>
+                  <a:tcPr marL="91440" marR="54864" marT="18288" marB="18288" anchor="ctr">
+                    <a:solidFill>
+                      <a:srgbClr val="161B22"/>
+                    </a:solidFill>
+                  </a:tcPr>
+                </a:tc>
+                <a:tc>
+                  <a:txBody>
+                    <a:bodyPr wrap="square"/>
+                    <a:lstStyle/>
+                    <a:p>
+                      <a:pPr algn="l"/>
+                      <a:r>
+                        <a:rPr sz="980" b="0">
+                          <a:solidFill>
+                            <a:srgbClr val="F85149"/>
+                          </a:solidFill>
+                          <a:latin typeface="PingFang SC"/>
+                          <a:ea typeface="PingFang SC"/>
+                          <a:cs typeface="PingFang SC"/>
+                        </a:rPr>
+                        <a:t>✗ 没有 Piper 模型</a:t>
+                      </a:r>
+                    </a:p>
+                  </a:txBody>
+                  <a:tcPr marL="91440" marR="54864" marT="18288" marB="18288" anchor="ctr">
+                    <a:solidFill>
+                      <a:srgbClr val="161B22"/>
+                    </a:solidFill>
+                  </a:tcPr>
+                </a:tc>
+              </a:tr>
+              <a:tr h="457200">
+                <a:tc>
+                  <a:txBody>
+                    <a:bodyPr wrap="square"/>
+                    <a:lstStyle/>
+                    <a:p>
+                      <a:pPr algn="l"/>
+                      <a:r>
+                        <a:rPr sz="980" b="0">
+                          <a:solidFill>
+                            <a:srgbClr val="E6EDF3"/>
+                          </a:solidFill>
+                          <a:latin typeface="PingFang SC"/>
+                          <a:ea typeface="PingFang SC"/>
+                          <a:cs typeface="PingFang SC"/>
+                        </a:rPr>
+                        <a:t>SAPIEN / ManiSkill</a:t>
+                      </a:r>
+                    </a:p>
+                  </a:txBody>
+                  <a:tcPr marL="91440" marR="54864" marT="18288" marB="18288" anchor="ctr">
+                    <a:solidFill>
+                      <a:srgbClr val="0E1116"/>
+                    </a:solidFill>
+                  </a:tcPr>
+                </a:tc>
+                <a:tc>
+                  <a:txBody>
+                    <a:bodyPr wrap="square"/>
+                    <a:lstStyle/>
+                    <a:p>
+                      <a:pPr algn="l"/>
+                      <a:r>
+                        <a:rPr sz="980" b="0">
+                          <a:solidFill>
+                            <a:srgbClr val="E6EDF3"/>
+                          </a:solidFill>
+                          <a:latin typeface="PingFang SC"/>
+                          <a:ea typeface="PingFang SC"/>
+                          <a:cs typeface="PingFang SC"/>
+                        </a:rPr>
+                        <a:t>ManiSkill-Piper 存在</a:t>
+                      </a:r>
+                    </a:p>
+                  </a:txBody>
+                  <a:tcPr marL="91440" marR="54864" marT="18288" marB="18288" anchor="ctr">
+                    <a:solidFill>
+                      <a:srgbClr val="0E1116"/>
+                    </a:solidFill>
+                  </a:tcPr>
+                </a:tc>
+                <a:tc>
+                  <a:txBody>
+                    <a:bodyPr wrap="square"/>
+                    <a:lstStyle/>
+                    <a:p>
+                      <a:pPr algn="l"/>
+                      <a:r>
+                        <a:rPr sz="980" b="0">
+                          <a:solidFill>
+                            <a:srgbClr val="E6EDF3"/>
+                          </a:solidFill>
+                          <a:latin typeface="PingFang SC"/>
+                          <a:ea typeface="PingFang SC"/>
+                          <a:cs typeface="PingFang SC"/>
+                        </a:rPr>
+                        <a:t>仅 Linux</a:t>
+                      </a:r>
+                    </a:p>
+                  </a:txBody>
+                  <a:tcPr marL="91440" marR="54864" marT="18288" marB="18288" anchor="ctr">
+                    <a:solidFill>
+                      <a:srgbClr val="0E1116"/>
+                    </a:solidFill>
+                  </a:tcPr>
+                </a:tc>
+                <a:tc>
+                  <a:txBody>
+                    <a:bodyPr wrap="square"/>
+                    <a:lstStyle/>
+                    <a:p>
+                      <a:pPr algn="l"/>
+                      <a:r>
+                        <a:rPr sz="980" b="0">
+                          <a:solidFill>
+                            <a:srgbClr val="F85149"/>
+                          </a:solidFill>
+                          <a:latin typeface="PingFang SC"/>
+                          <a:ea typeface="PingFang SC"/>
+                          <a:cs typeface="PingFang SC"/>
+                        </a:rPr>
+                        <a:t>✗ macOS 不可用</a:t>
+                      </a:r>
+                    </a:p>
+                  </a:txBody>
+                  <a:tcPr marL="91440" marR="54864" marT="18288" marB="18288" anchor="ctr">
+                    <a:solidFill>
+                      <a:srgbClr val="0E1116"/>
+                    </a:solidFill>
+                  </a:tcPr>
+                </a:tc>
+              </a:tr>
+            </a:tbl>
+          </a:graphicData>
+        </a:graphic>
+      </p:graphicFrame>
+      <p:sp>
+        <p:nvSpPr>
+          <p:cNvPr id="11" name="TextBox 10"/>
+          <p:cNvSpPr txBox="1"/>
+          <p:nvPr/>
+        </p:nvSpPr>
+        <p:spPr>
+          <a:xfrm>
+            <a:off x="566928" y="5349240"/>
+            <a:ext cx="10881360" cy="914400"/>
+          </a:xfrm>
+          <a:prstGeom prst="rect">
+            <a:avLst/>
+          </a:prstGeom>
+          <a:noFill/>
+        </p:spPr>
+        <p:txBody>
+          <a:bodyPr wrap="square" lIns="0" rIns="0" tIns="0" bIns="0" anchor="t">
+            <a:spAutoFit/>
+          </a:bodyPr>
+          <a:lstStyle/>
+          <a:p>
+            <a:pPr algn="l">
+              <a:spcBef>
+                <a:spcPts val="0"/>
+              </a:spcBef>
+              <a:spcAft>
+                <a:spcPts val="0"/>
+              </a:spcAft>
+            </a:pPr>
+            <a:r>
+              <a:rPr sz="1250" b="1">
+                <a:solidFill>
+                  <a:srgbClr val="3EC5C9"/>
+                </a:solidFill>
+                <a:latin typeface="PingFang SC"/>
+                <a:ea typeface="PingFang SC"/>
+                <a:cs typeface="PingFang SC"/>
+              </a:rPr>
+              <a:t>顺手确认的一件事</a:t>
+            </a:r>
+          </a:p>
+          <a:p>
+            <a:pPr>
+              <a:spcBef>
+                <a:spcPts val="0"/>
+              </a:spcBef>
+              <a:spcAft>
+                <a:spcPts val="0"/>
+              </a:spcAft>
+            </a:pPr>
+            <a:r>
+              <a:rPr sz="1200" b="0">
+                <a:solidFill>
+                  <a:srgbClr val="E6EDF3"/>
+                </a:solidFill>
+                <a:latin typeface="PingFang SC"/>
+                <a:ea typeface="PingFang SC"/>
+                <a:cs typeface="PingFang SC"/>
+              </a:rPr>
+              <a:t>piper_sdk 0.6.2 里没有任何 URDF / mesh —— 只有 CAN 层。想要模型必须另找 piper_ros 或 Menagerie，这一点很容易踩空。</a:t>
+            </a:r>
+          </a:p>
+          <a:p>
+            <a:pPr>
+              <a:spcBef>
+                <a:spcPts val="0"/>
+              </a:spcBef>
+              <a:spcAft>
+                <a:spcPts val="0"/>
+              </a:spcAft>
+            </a:pPr>
+            <a:r>
+              <a:rPr sz="1200" b="0">
+                <a:solidFill>
+                  <a:srgbClr val="8B949E"/>
+                </a:solidFill>
+                <a:latin typeface="PingFang SC"/>
+                <a:ea typeface="PingFang SC"/>
+                <a:cs typeface="PingFang SC"/>
+              </a:rPr>
+              <a:t>渲染不需要 X / EGL：离屏 mujoco.Renderer + MUJOCO_GL=cgl，在 macOS 上直接出图。</a:t>
+            </a:r>
+          </a:p>
+        </p:txBody>
+      </p:sp>
+    </p:spTree>
+  </p:cSld>
+  <p:clrMapOvr>
+    <a:masterClrMapping/>
+  </p:clrMapOvr>
+</p:sld>
+</file>
+
+<file path=ppt/slides/slide16.xml><?xml version="1.0" encoding="utf-8"?>
+<p:sld xmlns:a="http://schemas.openxmlformats.org/drawingml/2006/main" xmlns:p="http://schemas.openxmlformats.org/presentationml/2006/main" xmlns:r="http://schemas.openxmlformats.org/officeDocument/2006/relationships">
+  <p:cSld>
+    <p:spTree>
+      <p:nvGrpSpPr>
+        <p:cNvPr id="1" name=""/>
+        <p:cNvGrpSpPr/>
+        <p:nvPr/>
+      </p:nvGrpSpPr>
+      <p:grpSpPr/>
+      <p:sp>
+        <p:nvSpPr>
+          <p:cNvPr id="2" name="Rectangle 1"/>
+          <p:cNvSpPr/>
+          <p:nvPr/>
+        </p:nvSpPr>
+        <p:spPr>
+          <a:xfrm>
+            <a:off x="0" y="0"/>
+            <a:ext cx="12191695" cy="6858000"/>
+          </a:xfrm>
+          <a:prstGeom prst="rect">
+            <a:avLst/>
+          </a:prstGeom>
+          <a:solidFill>
+            <a:srgbClr val="0E1116"/>
+          </a:solidFill>
+          <a:ln>
+            <a:noFill/>
+          </a:ln>
+          <a:effectLst/>
+        </p:spPr>
+        <p:style>
+          <a:lnRef idx="1">
+            <a:schemeClr val="accent1"/>
+          </a:lnRef>
+          <a:fillRef idx="3">
+            <a:schemeClr val="accent1"/>
+          </a:fillRef>
+          <a:effectRef idx="2">
+            <a:schemeClr val="accent1"/>
+          </a:effectRef>
+          <a:fontRef idx="minor">
+            <a:schemeClr val="lt1"/>
+          </a:fontRef>
+        </p:style>
+        <p:txBody>
+          <a:bodyPr rtlCol="0" anchor="ctr"/>
+          <a:lstStyle/>
+          <a:p>
+            <a:pPr algn="ctr"/>
+          </a:p>
+        </p:txBody>
+      </p:sp>
+      <p:sp>
+        <p:nvSpPr>
+          <p:cNvPr id="3" name="Rectangle 2"/>
+          <p:cNvSpPr/>
+          <p:nvPr/>
+        </p:nvSpPr>
+        <p:spPr>
+          <a:xfrm>
+            <a:off x="566928" y="457200"/>
+            <a:ext cx="566928" cy="41148"/>
+          </a:xfrm>
+          <a:prstGeom prst="rect">
+            <a:avLst/>
+          </a:prstGeom>
+          <a:solidFill>
+            <a:srgbClr val="3EC5C9"/>
+          </a:solidFill>
+          <a:ln>
+            <a:noFill/>
+          </a:ln>
+          <a:effectLst/>
+        </p:spPr>
+        <p:style>
+          <a:lnRef idx="1">
+            <a:schemeClr val="accent1"/>
+          </a:lnRef>
+          <a:fillRef idx="3">
+            <a:schemeClr val="accent1"/>
+          </a:fillRef>
+          <a:effectRef idx="2">
+            <a:schemeClr val="accent1"/>
+          </a:effectRef>
+          <a:fontRef idx="minor">
+            <a:schemeClr val="lt1"/>
+          </a:fontRef>
+        </p:style>
+        <p:txBody>
+          <a:bodyPr rtlCol="0" anchor="ctr"/>
+          <a:lstStyle/>
+          <a:p>
+            <a:pPr algn="ctr"/>
+          </a:p>
+        </p:txBody>
+      </p:sp>
+      <p:sp>
+        <p:nvSpPr>
+          <p:cNvPr id="4" name="TextBox 3"/>
+          <p:cNvSpPr txBox="1"/>
+          <p:nvPr/>
+        </p:nvSpPr>
+        <p:spPr>
+          <a:xfrm>
+            <a:off x="566928" y="566928"/>
+            <a:ext cx="10058400" cy="274320"/>
+          </a:xfrm>
+          <a:prstGeom prst="rect">
+            <a:avLst/>
+          </a:prstGeom>
+          <a:noFill/>
+        </p:spPr>
+        <p:txBody>
+          <a:bodyPr wrap="square" lIns="0" rIns="0" tIns="0" bIns="0" anchor="t">
+            <a:spAutoFit/>
+          </a:bodyPr>
+          <a:lstStyle/>
+          <a:p>
+            <a:pPr algn="l">
+              <a:spcBef>
+                <a:spcPts val="0"/>
+              </a:spcBef>
+              <a:spcAft>
+                <a:spcPts val="0"/>
+              </a:spcAft>
+            </a:pPr>
+            <a:r>
+              <a:rPr sz="1150" b="1">
+                <a:solidFill>
+                  <a:srgbClr val="3EC5C9"/>
+                </a:solidFill>
+                <a:latin typeface="PingFang SC"/>
+                <a:ea typeface="PingFang SC"/>
+                <a:cs typeface="PingFang SC"/>
+              </a:rPr>
+              <a:t>SIMULATION · RESULT</a:t>
+            </a:r>
+          </a:p>
+        </p:txBody>
+      </p:sp>
+      <p:sp>
+        <p:nvSpPr>
+          <p:cNvPr id="5" name="TextBox 4"/>
+          <p:cNvSpPr txBox="1"/>
+          <p:nvPr/>
+        </p:nvSpPr>
+        <p:spPr>
+          <a:xfrm>
+            <a:off x="566928" y="822960"/>
+            <a:ext cx="10607040" cy="566928"/>
+          </a:xfrm>
+          <a:prstGeom prst="rect">
+            <a:avLst/>
+          </a:prstGeom>
+          <a:noFill/>
+        </p:spPr>
+        <p:txBody>
+          <a:bodyPr wrap="square" lIns="0" rIns="0" tIns="0" bIns="0" anchor="t">
+            <a:spAutoFit/>
+          </a:bodyPr>
+          <a:lstStyle/>
+          <a:p>
+            <a:pPr algn="l">
+              <a:spcBef>
+                <a:spcPts val="0"/>
+              </a:spcBef>
+              <a:spcAft>
+                <a:spcPts val="0"/>
+              </a:spcAft>
+            </a:pPr>
+            <a:r>
+              <a:rPr sz="2900" b="1">
+                <a:solidFill>
+                  <a:srgbClr val="E6EDF3"/>
+                </a:solidFill>
+                <a:latin typeface="PingFang SC"/>
+                <a:ea typeface="PingFang SC"/>
+                <a:cs typeface="PingFang SC"/>
+              </a:rPr>
+              <a:t>真模型跑通了一次抓放</a:t>
+            </a:r>
+          </a:p>
+        </p:txBody>
+      </p:sp>
+      <p:sp>
+        <p:nvSpPr>
+          <p:cNvPr id="6" name="TextBox 5"/>
+          <p:cNvSpPr txBox="1"/>
+          <p:nvPr/>
+        </p:nvSpPr>
+        <p:spPr>
+          <a:xfrm>
+            <a:off x="566928" y="1389888"/>
+            <a:ext cx="10607040" cy="310896"/>
+          </a:xfrm>
+          <a:prstGeom prst="rect">
+            <a:avLst/>
+          </a:prstGeom>
+          <a:noFill/>
+        </p:spPr>
+        <p:txBody>
+          <a:bodyPr wrap="square" lIns="0" rIns="0" tIns="0" bIns="0" anchor="t">
+            <a:spAutoFit/>
+          </a:bodyPr>
+          <a:lstStyle/>
+          <a:p>
+            <a:pPr algn="l">
+              <a:spcBef>
+                <a:spcPts val="0"/>
+              </a:spcBef>
+              <a:spcAft>
+                <a:spcPts val="0"/>
+              </a:spcAft>
+            </a:pPr>
+            <a:r>
+              <a:rPr sz="1300" b="0">
+                <a:solidFill>
+                  <a:srgbClr val="8B949E"/>
+                </a:solidFill>
+                <a:latin typeface="PingFang SC"/>
+                <a:ea typeface="PingFang SC"/>
+                <a:cs typeface="PingFang SC"/>
+              </a:rPr>
+              <a:t>不是动画：抓取失败脚本会非零退出，所以它同时是一个测试</a:t>
+            </a:r>
+          </a:p>
+        </p:txBody>
+      </p:sp>
+      <p:sp>
+        <p:nvSpPr>
+          <p:cNvPr id="7" name="Rectangle 6"/>
+          <p:cNvSpPr/>
+          <p:nvPr/>
+        </p:nvSpPr>
+        <p:spPr>
+          <a:xfrm>
+            <a:off x="566928" y="6345936"/>
+            <a:ext cx="11057839" cy="9525"/>
+          </a:xfrm>
+          <a:prstGeom prst="rect">
+            <a:avLst/>
+          </a:prstGeom>
+          <a:solidFill>
+            <a:srgbClr val="2A313C"/>
+          </a:solidFill>
+          <a:ln>
+            <a:noFill/>
+          </a:ln>
+          <a:effectLst/>
+        </p:spPr>
+        <p:style>
+          <a:lnRef idx="1">
+            <a:schemeClr val="accent1"/>
+          </a:lnRef>
+          <a:fillRef idx="3">
+            <a:schemeClr val="accent1"/>
+          </a:fillRef>
+          <a:effectRef idx="2">
+            <a:schemeClr val="accent1"/>
+          </a:effectRef>
+          <a:fontRef idx="minor">
+            <a:schemeClr val="lt1"/>
+          </a:fontRef>
+        </p:style>
+        <p:txBody>
+          <a:bodyPr rtlCol="0" anchor="ctr"/>
+          <a:lstStyle/>
+          <a:p>
+            <a:pPr algn="ctr"/>
+          </a:p>
+        </p:txBody>
+      </p:sp>
+      <p:sp>
+        <p:nvSpPr>
+          <p:cNvPr id="8" name="TextBox 7"/>
+          <p:cNvSpPr txBox="1"/>
+          <p:nvPr/>
+        </p:nvSpPr>
+        <p:spPr>
+          <a:xfrm>
+            <a:off x="566928" y="6428232"/>
+            <a:ext cx="8229600" cy="256032"/>
+          </a:xfrm>
+          <a:prstGeom prst="rect">
+            <a:avLst/>
+          </a:prstGeom>
+          <a:noFill/>
+        </p:spPr>
+        <p:txBody>
+          <a:bodyPr wrap="square" lIns="0" rIns="0" tIns="0" bIns="0" anchor="t">
+            <a:spAutoFit/>
+          </a:bodyPr>
+          <a:lstStyle/>
+          <a:p>
+            <a:pPr algn="l">
+              <a:spcBef>
+                <a:spcPts val="0"/>
+              </a:spcBef>
+              <a:spcAft>
+                <a:spcPts val="0"/>
+              </a:spcAft>
+            </a:pPr>
+            <a:r>
+              <a:rPr sz="950" b="0">
+                <a:solidFill>
+                  <a:srgbClr val="8B949E"/>
+                </a:solidFill>
+                <a:latin typeface="PingFang SC"/>
+                <a:ea typeface="PingFang SC"/>
+                <a:cs typeface="PingFang SC"/>
+              </a:rPr>
+              <a:t>第三轮 · 操作方式 / 开源数据 / 仿真 · 2026-10-29</a:t>
+            </a:r>
+          </a:p>
+        </p:txBody>
+      </p:sp>
+      <p:sp>
+        <p:nvSpPr>
+          <p:cNvPr id="9" name="TextBox 8"/>
+          <p:cNvSpPr txBox="1"/>
+          <p:nvPr/>
+        </p:nvSpPr>
+        <p:spPr>
+          <a:xfrm>
+            <a:off x="10710367" y="6428232"/>
+            <a:ext cx="914400" cy="256032"/>
+          </a:xfrm>
+          <a:prstGeom prst="rect">
+            <a:avLst/>
+          </a:prstGeom>
+          <a:noFill/>
+        </p:spPr>
+        <p:txBody>
+          <a:bodyPr wrap="square" lIns="0" rIns="0" tIns="0" bIns="0" anchor="t">
+            <a:spAutoFit/>
+          </a:bodyPr>
+          <a:lstStyle/>
+          <a:p>
+            <a:pPr algn="r">
+              <a:spcBef>
+                <a:spcPts val="0"/>
+              </a:spcBef>
+              <a:spcAft>
+                <a:spcPts val="0"/>
+              </a:spcAft>
+            </a:pPr>
+            <a:r>
+              <a:rPr sz="1000" b="1">
+                <a:solidFill>
+                  <a:srgbClr val="3EC5C9"/>
+                </a:solidFill>
+                <a:latin typeface="Helvetica Neue"/>
+                <a:ea typeface="PingFang SC"/>
+                <a:cs typeface="PingFang SC"/>
+              </a:rPr>
+              <a:t>16</a:t>
+            </a:r>
+          </a:p>
+        </p:txBody>
+      </p:sp>
+      <p:pic>
+        <p:nvPicPr>
+          <p:cNvPr id="10" name="Picture 9" descr="00_start_home.png"/>
+          <p:cNvPicPr>
+            <a:picLocks noChangeAspect="1"/>
+          </p:cNvPicPr>
+          <p:nvPr/>
+        </p:nvPicPr>
+        <p:blipFill>
+          <a:blip r:embed="rId2"/>
+          <a:stretch>
+            <a:fillRect/>
+          </a:stretch>
+        </p:blipFill>
+        <p:spPr>
+          <a:xfrm>
+            <a:off x="566928" y="1755648"/>
+            <a:ext cx="3520440" cy="2640330"/>
+          </a:xfrm>
+          <a:prstGeom prst="rect">
+            <a:avLst/>
+          </a:prstGeom>
+          <a:ln w="12700">
+            <a:solidFill>
+              <a:srgbClr val="2A313C"/>
+            </a:solidFill>
+          </a:ln>
+        </p:spPr>
+      </p:pic>
+      <p:sp>
+        <p:nvSpPr>
+          <p:cNvPr id="11" name="TextBox 10"/>
+          <p:cNvSpPr txBox="1"/>
+          <p:nvPr/>
+        </p:nvSpPr>
+        <p:spPr>
+          <a:xfrm>
+            <a:off x="566928" y="4441698"/>
+            <a:ext cx="3520440" cy="219456"/>
+          </a:xfrm>
+          <a:prstGeom prst="rect">
+            <a:avLst/>
+          </a:prstGeom>
+          <a:noFill/>
+        </p:spPr>
+        <p:txBody>
+          <a:bodyPr wrap="square" lIns="0" rIns="0" tIns="0" bIns="0" anchor="t">
+            <a:spAutoFit/>
+          </a:bodyPr>
+          <a:lstStyle/>
+          <a:p>
+            <a:pPr algn="l">
+              <a:spcBef>
+                <a:spcPts val="0"/>
+              </a:spcBef>
+              <a:spcAft>
+                <a:spcPts val="0"/>
+              </a:spcAft>
+            </a:pPr>
+            <a:r>
+              <a:rPr sz="900" b="0">
+                <a:solidFill>
+                  <a:srgbClr val="8B949E"/>
+                </a:solidFill>
+                <a:latin typeface="PingFang SC"/>
+                <a:ea typeface="PingFang SC"/>
+                <a:cs typeface="PingFang SC"/>
+              </a:rPr>
+              <a:t>起始</a:t>
+            </a:r>
+          </a:p>
+        </p:txBody>
+      </p:sp>
+      <p:pic>
+        <p:nvPicPr>
+          <p:cNvPr id="12" name="Picture 11" descr="02_grasp_closed.png"/>
+          <p:cNvPicPr>
+            <a:picLocks noChangeAspect="1"/>
+          </p:cNvPicPr>
+          <p:nvPr/>
+        </p:nvPicPr>
+        <p:blipFill>
+          <a:blip r:embed="rId3"/>
+          <a:stretch>
+            <a:fillRect/>
+          </a:stretch>
+        </p:blipFill>
+        <p:spPr>
+          <a:xfrm>
+            <a:off x="4270248" y="1755648"/>
+            <a:ext cx="3520440" cy="2640330"/>
+          </a:xfrm>
+          <a:prstGeom prst="rect">
+            <a:avLst/>
+          </a:prstGeom>
+          <a:ln w="12700">
+            <a:solidFill>
+              <a:srgbClr val="2A313C"/>
+            </a:solidFill>
+          </a:ln>
+        </p:spPr>
+      </p:pic>
+      <p:sp>
+        <p:nvSpPr>
+          <p:cNvPr id="13" name="TextBox 12"/>
+          <p:cNvSpPr txBox="1"/>
+          <p:nvPr/>
+        </p:nvSpPr>
+        <p:spPr>
+          <a:xfrm>
+            <a:off x="4270248" y="4441698"/>
+            <a:ext cx="3520440" cy="219456"/>
+          </a:xfrm>
+          <a:prstGeom prst="rect">
+            <a:avLst/>
+          </a:prstGeom>
+          <a:noFill/>
+        </p:spPr>
+        <p:txBody>
+          <a:bodyPr wrap="square" lIns="0" rIns="0" tIns="0" bIns="0" anchor="t">
+            <a:spAutoFit/>
+          </a:bodyPr>
+          <a:lstStyle/>
+          <a:p>
+            <a:pPr algn="l">
+              <a:spcBef>
+                <a:spcPts val="0"/>
+              </a:spcBef>
+              <a:spcAft>
+                <a:spcPts val="0"/>
+              </a:spcAft>
+            </a:pPr>
+            <a:r>
+              <a:rPr sz="900" b="0">
+                <a:solidFill>
+                  <a:srgbClr val="8B949E"/>
+                </a:solidFill>
+                <a:latin typeface="PingFang SC"/>
+                <a:ea typeface="PingFang SC"/>
+                <a:cs typeface="PingFang SC"/>
+              </a:rPr>
+              <a:t>抓取</a:t>
+            </a:r>
+          </a:p>
+        </p:txBody>
+      </p:sp>
+      <p:pic>
+        <p:nvPicPr>
+          <p:cNvPr id="14" name="Picture 13" descr="05_place_release.png"/>
+          <p:cNvPicPr>
+            <a:picLocks noChangeAspect="1"/>
+          </p:cNvPicPr>
+          <p:nvPr/>
+        </p:nvPicPr>
+        <p:blipFill>
+          <a:blip r:embed="rId4"/>
+          <a:stretch>
+            <a:fillRect/>
+          </a:stretch>
+        </p:blipFill>
+        <p:spPr>
+          <a:xfrm>
+            <a:off x="7973568" y="1755648"/>
+            <a:ext cx="3520440" cy="2640330"/>
+          </a:xfrm>
+          <a:prstGeom prst="rect">
+            <a:avLst/>
+          </a:prstGeom>
+          <a:ln w="12700">
+            <a:solidFill>
+              <a:srgbClr val="2A313C"/>
+            </a:solidFill>
+          </a:ln>
+        </p:spPr>
+      </p:pic>
+      <p:sp>
+        <p:nvSpPr>
+          <p:cNvPr id="15" name="TextBox 14"/>
+          <p:cNvSpPr txBox="1"/>
+          <p:nvPr/>
+        </p:nvSpPr>
+        <p:spPr>
+          <a:xfrm>
+            <a:off x="7973568" y="4441698"/>
+            <a:ext cx="3520440" cy="219456"/>
+          </a:xfrm>
+          <a:prstGeom prst="rect">
+            <a:avLst/>
+          </a:prstGeom>
+          <a:noFill/>
+        </p:spPr>
+        <p:txBody>
+          <a:bodyPr wrap="square" lIns="0" rIns="0" tIns="0" bIns="0" anchor="t">
+            <a:spAutoFit/>
+          </a:bodyPr>
+          <a:lstStyle/>
+          <a:p>
+            <a:pPr algn="l">
+              <a:spcBef>
+                <a:spcPts val="0"/>
+              </a:spcBef>
+              <a:spcAft>
+                <a:spcPts val="0"/>
+              </a:spcAft>
+            </a:pPr>
+            <a:r>
+              <a:rPr sz="900" b="0">
+                <a:solidFill>
+                  <a:srgbClr val="8B949E"/>
+                </a:solidFill>
+                <a:latin typeface="PingFang SC"/>
+                <a:ea typeface="PingFang SC"/>
+                <a:cs typeface="PingFang SC"/>
+              </a:rPr>
+              <a:t>放置</a:t>
+            </a:r>
+          </a:p>
+        </p:txBody>
+      </p:sp>
+      <p:sp>
+        <p:nvSpPr>
+          <p:cNvPr id="16" name="Rounded Rectangle 15"/>
+          <p:cNvSpPr/>
+          <p:nvPr/>
+        </p:nvSpPr>
+        <p:spPr>
+          <a:xfrm>
+            <a:off x="566928" y="4160520"/>
+            <a:ext cx="5349240" cy="1783080"/>
+          </a:xfrm>
+          <a:prstGeom prst="roundRect">
+            <a:avLst>
+              <a:gd name="adj" fmla="val 6000"/>
+            </a:avLst>
+          </a:prstGeom>
+          <a:solidFill>
+            <a:srgbClr val="161B22"/>
+          </a:solidFill>
+          <a:ln w="12700">
+            <a:solidFill>
+              <a:srgbClr val="2A313C"/>
+            </a:solidFill>
+          </a:ln>
+          <a:effectLst/>
+        </p:spPr>
+        <p:style>
+          <a:lnRef idx="1">
+            <a:schemeClr val="accent1"/>
+          </a:lnRef>
+          <a:fillRef idx="3">
+            <a:schemeClr val="accent1"/>
+          </a:fillRef>
+          <a:effectRef idx="2">
+            <a:schemeClr val="accent1"/>
+          </a:effectRef>
+          <a:fontRef idx="minor">
+            <a:schemeClr val="lt1"/>
+          </a:fontRef>
+        </p:style>
+        <p:txBody>
+          <a:bodyPr rtlCol="0" anchor="ctr"/>
+          <a:lstStyle/>
+          <a:p>
+            <a:pPr algn="ctr"/>
+          </a:p>
+        </p:txBody>
+      </p:sp>
+      <p:sp>
+        <p:nvSpPr>
+          <p:cNvPr id="17" name="Rectangle 16"/>
+          <p:cNvSpPr/>
+          <p:nvPr/>
+        </p:nvSpPr>
+        <p:spPr>
+          <a:xfrm>
+            <a:off x="566928" y="4251960"/>
+            <a:ext cx="41148" cy="1600200"/>
+          </a:xfrm>
+          <a:prstGeom prst="rect">
+            <a:avLst/>
+          </a:prstGeom>
+          <a:solidFill>
+            <a:srgbClr val="3FB950"/>
+          </a:solidFill>
+          <a:ln>
+            <a:noFill/>
+          </a:ln>
+          <a:effectLst/>
+        </p:spPr>
+        <p:style>
+          <a:lnRef idx="1">
+            <a:schemeClr val="accent1"/>
+          </a:lnRef>
+          <a:fillRef idx="3">
+            <a:schemeClr val="accent1"/>
+          </a:fillRef>
+          <a:effectRef idx="2">
+            <a:schemeClr val="accent1"/>
+          </a:effectRef>
+          <a:fontRef idx="minor">
+            <a:schemeClr val="lt1"/>
+          </a:fontRef>
+        </p:style>
+        <p:txBody>
+          <a:bodyPr rtlCol="0" anchor="ctr"/>
+          <a:lstStyle/>
+          <a:p>
+            <a:pPr algn="ctr"/>
+          </a:p>
+        </p:txBody>
+      </p:sp>
+      <p:sp>
+        <p:nvSpPr>
+          <p:cNvPr id="18" name="TextBox 17"/>
+          <p:cNvSpPr txBox="1"/>
+          <p:nvPr/>
+        </p:nvSpPr>
+        <p:spPr>
+          <a:xfrm>
+            <a:off x="768096" y="4288536"/>
+            <a:ext cx="4983480" cy="274320"/>
+          </a:xfrm>
+          <a:prstGeom prst="rect">
+            <a:avLst/>
+          </a:prstGeom>
+          <a:noFill/>
+        </p:spPr>
+        <p:txBody>
+          <a:bodyPr wrap="square" lIns="0" rIns="0" tIns="0" bIns="0" anchor="t">
+            <a:spAutoFit/>
+          </a:bodyPr>
+          <a:lstStyle/>
+          <a:p>
+            <a:pPr algn="l">
+              <a:spcBef>
+                <a:spcPts val="0"/>
+              </a:spcBef>
+              <a:spcAft>
+                <a:spcPts val="0"/>
+              </a:spcAft>
+            </a:pPr>
+            <a:r>
+              <a:rPr sz="1350" b="1">
+                <a:solidFill>
+                  <a:srgbClr val="3FB950"/>
+                </a:solidFill>
+                <a:latin typeface="PingFang SC"/>
+                <a:ea typeface="PingFang SC"/>
+                <a:cs typeface="PingFang SC"/>
+              </a:rPr>
+              <a:t>量化结果</a:t>
+            </a:r>
+          </a:p>
+        </p:txBody>
+      </p:sp>
+      <p:sp>
+        <p:nvSpPr>
+          <p:cNvPr id="19" name="TextBox 18"/>
+          <p:cNvSpPr txBox="1"/>
+          <p:nvPr/>
+        </p:nvSpPr>
+        <p:spPr>
+          <a:xfrm>
+            <a:off x="768096" y="4617720"/>
+            <a:ext cx="4983480" cy="1216152"/>
+          </a:xfrm>
+          <a:prstGeom prst="rect">
+            <a:avLst/>
+          </a:prstGeom>
+          <a:noFill/>
+        </p:spPr>
+        <p:txBody>
+          <a:bodyPr wrap="square" lIns="0" rIns="0" tIns="0" bIns="0" anchor="t">
+            <a:spAutoFit/>
+          </a:bodyPr>
+          <a:lstStyle/>
+          <a:p>
+            <a:pPr algn="l">
+              <a:lnSpc>
+                <a:spcPct val="115000"/>
+              </a:lnSpc>
+              <a:spcBef>
+                <a:spcPts val="0"/>
+              </a:spcBef>
+              <a:spcAft>
+                <a:spcPts val="300"/>
+              </a:spcAft>
+            </a:pPr>
+            <a:r>
+              <a:rPr sz="1100" b="0">
+                <a:solidFill>
+                  <a:srgbClr val="E6EDF3"/>
+                </a:solidFill>
+                <a:latin typeface="PingFang SC"/>
+                <a:ea typeface="PingFang SC"/>
+                <a:cs typeface="PingFang SC"/>
+              </a:rPr>
+              <a:t>· 立方体抬起 +0.102 m（0.021 → 0.123）</a:t>
+            </a:r>
+          </a:p>
+          <a:p>
+            <a:pPr>
+              <a:lnSpc>
+                <a:spcPct val="115000"/>
+              </a:lnSpc>
+              <a:spcBef>
+                <a:spcPts val="0"/>
+              </a:spcBef>
+              <a:spcAft>
+                <a:spcPts val="300"/>
+              </a:spcAft>
+            </a:pPr>
+            <a:r>
+              <a:rPr sz="1100" b="0">
+                <a:solidFill>
+                  <a:srgbClr val="E6EDF3"/>
+                </a:solidFill>
+                <a:latin typeface="PingFang SC"/>
+                <a:ea typeface="PingFang SC"/>
+                <a:cs typeface="PingFang SC"/>
+              </a:rPr>
+              <a:t>· 放回落点偏差 4.0 mm</a:t>
+            </a:r>
+          </a:p>
+          <a:p>
+            <a:pPr>
+              <a:lnSpc>
+                <a:spcPct val="115000"/>
+              </a:lnSpc>
+              <a:spcBef>
+                <a:spcPts val="0"/>
+              </a:spcBef>
+              <a:spcAft>
+                <a:spcPts val="300"/>
+              </a:spcAft>
+            </a:pPr>
+            <a:r>
+              <a:rPr sz="1100" b="0">
+                <a:solidFill>
+                  <a:srgbClr val="E6EDF3"/>
+                </a:solidFill>
+                <a:latin typeface="PingFang SC"/>
+                <a:ea typeface="PingFang SC"/>
+                <a:cs typeface="PingFang SC"/>
+              </a:rPr>
+              <a:t>· 800×600 / 25 fps / 292 帧 / 11.68 s</a:t>
+            </a:r>
+          </a:p>
+          <a:p>
+            <a:pPr>
+              <a:lnSpc>
+                <a:spcPct val="115000"/>
+              </a:lnSpc>
+              <a:spcBef>
+                <a:spcPts val="0"/>
+              </a:spcBef>
+              <a:spcAft>
+                <a:spcPts val="300"/>
+              </a:spcAft>
+            </a:pPr>
+            <a:r>
+              <a:rPr sz="1100" b="0">
+                <a:solidFill>
+                  <a:srgbClr val="E6EDF3"/>
+                </a:solidFill>
+                <a:latin typeface="PingFang SC"/>
+                <a:ea typeface="PingFang SC"/>
+                <a:cs typeface="PingFang SC"/>
+              </a:rPr>
+              <a:t>· 全流程约 20 s，纯 CPU</a:t>
+            </a:r>
+          </a:p>
+        </p:txBody>
+      </p:sp>
+      <p:sp>
+        <p:nvSpPr>
+          <p:cNvPr id="20" name="Rounded Rectangle 19"/>
+          <p:cNvSpPr/>
+          <p:nvPr/>
+        </p:nvSpPr>
+        <p:spPr>
+          <a:xfrm>
+            <a:off x="6099048" y="4160520"/>
+            <a:ext cx="5349240" cy="1783080"/>
+          </a:xfrm>
+          <a:prstGeom prst="roundRect">
+            <a:avLst>
+              <a:gd name="adj" fmla="val 6000"/>
+            </a:avLst>
+          </a:prstGeom>
+          <a:solidFill>
+            <a:srgbClr val="161B22"/>
+          </a:solidFill>
+          <a:ln w="12700">
+            <a:solidFill>
+              <a:srgbClr val="2A313C"/>
+            </a:solidFill>
+          </a:ln>
+          <a:effectLst/>
+        </p:spPr>
+        <p:style>
+          <a:lnRef idx="1">
+            <a:schemeClr val="accent1"/>
+          </a:lnRef>
+          <a:fillRef idx="3">
+            <a:schemeClr val="accent1"/>
+          </a:fillRef>
+          <a:effectRef idx="2">
+            <a:schemeClr val="accent1"/>
+          </a:effectRef>
+          <a:fontRef idx="minor">
+            <a:schemeClr val="lt1"/>
+          </a:fontRef>
+        </p:style>
+        <p:txBody>
+          <a:bodyPr rtlCol="0" anchor="ctr"/>
+          <a:lstStyle/>
+          <a:p>
+            <a:pPr algn="ctr"/>
+          </a:p>
+        </p:txBody>
+      </p:sp>
+      <p:sp>
+        <p:nvSpPr>
+          <p:cNvPr id="21" name="Rectangle 20"/>
+          <p:cNvSpPr/>
+          <p:nvPr/>
+        </p:nvSpPr>
+        <p:spPr>
+          <a:xfrm>
+            <a:off x="6099048" y="4251960"/>
+            <a:ext cx="41148" cy="1600200"/>
+          </a:xfrm>
+          <a:prstGeom prst="rect">
+            <a:avLst/>
+          </a:prstGeom>
+          <a:solidFill>
+            <a:srgbClr val="F85149"/>
+          </a:solidFill>
+          <a:ln>
+            <a:noFill/>
+          </a:ln>
+          <a:effectLst/>
+        </p:spPr>
+        <p:style>
+          <a:lnRef idx="1">
+            <a:schemeClr val="accent1"/>
+          </a:lnRef>
+          <a:fillRef idx="3">
+            <a:schemeClr val="accent1"/>
+          </a:fillRef>
+          <a:effectRef idx="2">
+            <a:schemeClr val="accent1"/>
+          </a:effectRef>
+          <a:fontRef idx="minor">
+            <a:schemeClr val="lt1"/>
+          </a:fontRef>
+        </p:style>
+        <p:txBody>
+          <a:bodyPr rtlCol="0" anchor="ctr"/>
+          <a:lstStyle/>
+          <a:p>
+            <a:pPr algn="ctr"/>
+          </a:p>
+        </p:txBody>
+      </p:sp>
+      <p:sp>
+        <p:nvSpPr>
+          <p:cNvPr id="22" name="TextBox 21"/>
+          <p:cNvSpPr txBox="1"/>
+          <p:nvPr/>
+        </p:nvSpPr>
+        <p:spPr>
+          <a:xfrm>
+            <a:off x="6300216" y="4288536"/>
+            <a:ext cx="4983480" cy="274320"/>
+          </a:xfrm>
+          <a:prstGeom prst="rect">
+            <a:avLst/>
+          </a:prstGeom>
+          <a:noFill/>
+        </p:spPr>
+        <p:txBody>
+          <a:bodyPr wrap="square" lIns="0" rIns="0" tIns="0" bIns="0" anchor="t">
+            <a:spAutoFit/>
+          </a:bodyPr>
+          <a:lstStyle/>
+          <a:p>
+            <a:pPr algn="l">
+              <a:spcBef>
+                <a:spcPts val="0"/>
+              </a:spcBef>
+              <a:spcAft>
+                <a:spcPts val="0"/>
+              </a:spcAft>
+            </a:pPr>
+            <a:r>
+              <a:rPr sz="1350" b="1">
+                <a:solidFill>
+                  <a:srgbClr val="F85149"/>
+                </a:solidFill>
+                <a:latin typeface="PingFang SC"/>
+                <a:ea typeface="PingFang SC"/>
+                <a:cs typeface="PingFang SC"/>
+              </a:rPr>
+              <a:t>必须说清的限制</a:t>
+            </a:r>
+          </a:p>
+        </p:txBody>
+      </p:sp>
+      <p:sp>
+        <p:nvSpPr>
+          <p:cNvPr id="23" name="TextBox 22"/>
+          <p:cNvSpPr txBox="1"/>
+          <p:nvPr/>
+        </p:nvSpPr>
+        <p:spPr>
+          <a:xfrm>
+            <a:off x="6300216" y="4617720"/>
+            <a:ext cx="4983480" cy="1216152"/>
+          </a:xfrm>
+          <a:prstGeom prst="rect">
+            <a:avLst/>
+          </a:prstGeom>
+          <a:noFill/>
+        </p:spPr>
+        <p:txBody>
+          <a:bodyPr wrap="square" lIns="0" rIns="0" tIns="0" bIns="0" anchor="t">
+            <a:spAutoFit/>
+          </a:bodyPr>
+          <a:lstStyle/>
+          <a:p>
+            <a:pPr algn="l">
+              <a:lnSpc>
+                <a:spcPct val="115000"/>
+              </a:lnSpc>
+              <a:spcBef>
+                <a:spcPts val="0"/>
+              </a:spcBef>
+              <a:spcAft>
+                <a:spcPts val="300"/>
+              </a:spcAft>
+            </a:pPr>
+            <a:r>
+              <a:rPr sz="1100" b="0">
+                <a:solidFill>
+                  <a:srgbClr val="E6EDF3"/>
+                </a:solidFill>
+                <a:latin typeface="PingFang SC"/>
+                <a:ea typeface="PingFang SC"/>
+                <a:cs typeface="PingFang SC"/>
+              </a:rPr>
+              <a:t>· 固定基座、单臂、无底盘</a:t>
+            </a:r>
+          </a:p>
+          <a:p>
+            <a:pPr>
+              <a:lnSpc>
+                <a:spcPct val="115000"/>
+              </a:lnSpc>
+              <a:spcBef>
+                <a:spcPts val="0"/>
+              </a:spcBef>
+              <a:spcAft>
+                <a:spcPts val="300"/>
+              </a:spcAft>
+            </a:pPr>
+            <a:r>
+              <a:rPr sz="1100" b="0">
+                <a:solidFill>
+                  <a:srgbClr val="E6EDF3"/>
+                </a:solidFill>
+                <a:latin typeface="PingFang SC"/>
+                <a:ea typeface="PingFang SC"/>
+                <a:cs typeface="PingFang SC"/>
+              </a:rPr>
+              <a:t>· 脚本化 IK 路点，无碰撞规划</a:t>
+            </a:r>
+          </a:p>
+          <a:p>
+            <a:pPr>
+              <a:lnSpc>
+                <a:spcPct val="115000"/>
+              </a:lnSpc>
+              <a:spcBef>
+                <a:spcPts val="0"/>
+              </a:spcBef>
+              <a:spcAft>
+                <a:spcPts val="300"/>
+              </a:spcAft>
+            </a:pPr>
+            <a:r>
+              <a:rPr sz="1100" b="0">
+                <a:solidFill>
+                  <a:srgbClr val="E6EDF3"/>
+                </a:solidFill>
+                <a:latin typeface="PingFang SC"/>
+                <a:ea typeface="PingFang SC"/>
+                <a:cs typeface="PingFang SC"/>
+              </a:rPr>
+              <a:t>· 腕部俯仰只有 ±70°：夹爪无法在</a:t>
+            </a:r>
+          </a:p>
+          <a:p>
+            <a:pPr>
+              <a:lnSpc>
+                <a:spcPct val="115000"/>
+              </a:lnSpc>
+              <a:spcBef>
+                <a:spcPts val="0"/>
+              </a:spcBef>
+              <a:spcAft>
+                <a:spcPts val="300"/>
+              </a:spcAft>
+            </a:pPr>
+            <a:r>
+              <a:rPr sz="1100" b="0">
+                <a:solidFill>
+                  <a:srgbClr val="E6EDF3"/>
+                </a:solidFill>
+                <a:latin typeface="PingFang SC"/>
+                <a:ea typeface="PingFang SC"/>
+                <a:cs typeface="PingFang SC"/>
+              </a:rPr>
+              <a:t>  0.17 m 以上竖直朝下 → 顶抓受限</a:t>
+            </a:r>
+          </a:p>
+        </p:txBody>
+      </p:sp>
+    </p:spTree>
+  </p:cSld>
+  <p:clrMapOvr>
+    <a:masterClrMapping/>
+  </p:clrMapOvr>
+</p:sld>
+</file>
+
+<file path=ppt/slides/slide17.xml><?xml version="1.0" encoding="utf-8"?>
+<p:sld xmlns:a="http://schemas.openxmlformats.org/drawingml/2006/main" xmlns:p="http://schemas.openxmlformats.org/presentationml/2006/main" xmlns:r="http://schemas.openxmlformats.org/officeDocument/2006/relationships">
+  <p:cSld>
+    <p:spTree>
+      <p:nvGrpSpPr>
+        <p:cNvPr id="1" name=""/>
+        <p:cNvGrpSpPr/>
+        <p:nvPr/>
+      </p:nvGrpSpPr>
+      <p:grpSpPr/>
+      <p:sp>
+        <p:nvSpPr>
+          <p:cNvPr id="2" name="Rectangle 1"/>
+          <p:cNvSpPr/>
+          <p:nvPr/>
+        </p:nvSpPr>
+        <p:spPr>
+          <a:xfrm>
+            <a:off x="0" y="0"/>
+            <a:ext cx="12191695" cy="6858000"/>
+          </a:xfrm>
+          <a:prstGeom prst="rect">
+            <a:avLst/>
+          </a:prstGeom>
+          <a:solidFill>
+            <a:srgbClr val="0E1116"/>
+          </a:solidFill>
+          <a:ln>
+            <a:noFill/>
+          </a:ln>
+          <a:effectLst/>
+        </p:spPr>
+        <p:style>
+          <a:lnRef idx="1">
+            <a:schemeClr val="accent1"/>
+          </a:lnRef>
+          <a:fillRef idx="3">
+            <a:schemeClr val="accent1"/>
+          </a:fillRef>
+          <a:effectRef idx="2">
+            <a:schemeClr val="accent1"/>
+          </a:effectRef>
+          <a:fontRef idx="minor">
+            <a:schemeClr val="lt1"/>
+          </a:fontRef>
+        </p:style>
+        <p:txBody>
+          <a:bodyPr rtlCol="0" anchor="ctr"/>
+          <a:lstStyle/>
+          <a:p>
+            <a:pPr algn="ctr"/>
+          </a:p>
+        </p:txBody>
+      </p:sp>
+      <p:sp>
+        <p:nvSpPr>
+          <p:cNvPr id="3" name="Rectangle 2"/>
+          <p:cNvSpPr/>
+          <p:nvPr/>
+        </p:nvSpPr>
+        <p:spPr>
+          <a:xfrm>
+            <a:off x="566928" y="457200"/>
+            <a:ext cx="566928" cy="41148"/>
+          </a:xfrm>
+          <a:prstGeom prst="rect">
+            <a:avLst/>
+          </a:prstGeom>
+          <a:solidFill>
+            <a:srgbClr val="3EC5C9"/>
+          </a:solidFill>
+          <a:ln>
+            <a:noFill/>
+          </a:ln>
+          <a:effectLst/>
+        </p:spPr>
+        <p:style>
+          <a:lnRef idx="1">
+            <a:schemeClr val="accent1"/>
+          </a:lnRef>
+          <a:fillRef idx="3">
+            <a:schemeClr val="accent1"/>
+          </a:fillRef>
+          <a:effectRef idx="2">
+            <a:schemeClr val="accent1"/>
+          </a:effectRef>
+          <a:fontRef idx="minor">
+            <a:schemeClr val="lt1"/>
+          </a:fontRef>
+        </p:style>
+        <p:txBody>
+          <a:bodyPr rtlCol="0" anchor="ctr"/>
+          <a:lstStyle/>
+          <a:p>
+            <a:pPr algn="ctr"/>
+          </a:p>
+        </p:txBody>
+      </p:sp>
+      <p:sp>
+        <p:nvSpPr>
+          <p:cNvPr id="4" name="TextBox 3"/>
+          <p:cNvSpPr txBox="1"/>
+          <p:nvPr/>
+        </p:nvSpPr>
+        <p:spPr>
+          <a:xfrm>
+            <a:off x="566928" y="566928"/>
+            <a:ext cx="10058400" cy="274320"/>
+          </a:xfrm>
+          <a:prstGeom prst="rect">
+            <a:avLst/>
+          </a:prstGeom>
+          <a:noFill/>
+        </p:spPr>
+        <p:txBody>
+          <a:bodyPr wrap="square" lIns="0" rIns="0" tIns="0" bIns="0" anchor="t">
+            <a:spAutoFit/>
+          </a:bodyPr>
+          <a:lstStyle/>
+          <a:p>
+            <a:pPr algn="l">
+              <a:spcBef>
+                <a:spcPts val="0"/>
+              </a:spcBef>
+              <a:spcAft>
+                <a:spcPts val="0"/>
+              </a:spcAft>
+            </a:pPr>
+            <a:r>
+              <a:rPr sz="1150" b="1">
+                <a:solidFill>
+                  <a:srgbClr val="3EC5C9"/>
+                </a:solidFill>
+                <a:latin typeface="PingFang SC"/>
+                <a:ea typeface="PingFang SC"/>
+                <a:cs typeface="PingFang SC"/>
+              </a:rPr>
+              <a:t>TASKS</a:t>
+            </a:r>
+          </a:p>
+        </p:txBody>
+      </p:sp>
+      <p:sp>
+        <p:nvSpPr>
+          <p:cNvPr id="5" name="TextBox 4"/>
+          <p:cNvSpPr txBox="1"/>
+          <p:nvPr/>
+        </p:nvSpPr>
+        <p:spPr>
+          <a:xfrm>
+            <a:off x="566928" y="822960"/>
+            <a:ext cx="10607040" cy="566928"/>
+          </a:xfrm>
+          <a:prstGeom prst="rect">
+            <a:avLst/>
+          </a:prstGeom>
+          <a:noFill/>
+        </p:spPr>
+        <p:txBody>
+          <a:bodyPr wrap="square" lIns="0" rIns="0" tIns="0" bIns="0" anchor="t">
+            <a:spAutoFit/>
+          </a:bodyPr>
+          <a:lstStyle/>
+          <a:p>
+            <a:pPr algn="l">
+              <a:spcBef>
+                <a:spcPts val="0"/>
+              </a:spcBef>
+              <a:spcAft>
+                <a:spcPts val="0"/>
+              </a:spcAft>
+            </a:pPr>
+            <a:r>
+              <a:rPr sz="2900" b="1">
+                <a:solidFill>
+                  <a:srgbClr val="E6EDF3"/>
+                </a:solidFill>
+                <a:latin typeface="PingFang SC"/>
+                <a:ea typeface="PingFang SC"/>
+                <a:cs typeface="PingFang SC"/>
+              </a:rPr>
+              <a:t>这套硬件该练什么任务</a:t>
+            </a:r>
+          </a:p>
+        </p:txBody>
+      </p:sp>
+      <p:sp>
+        <p:nvSpPr>
+          <p:cNvPr id="6" name="TextBox 5"/>
+          <p:cNvSpPr txBox="1"/>
+          <p:nvPr/>
+        </p:nvSpPr>
+        <p:spPr>
+          <a:xfrm>
+            <a:off x="566928" y="1389888"/>
+            <a:ext cx="10607040" cy="310896"/>
+          </a:xfrm>
+          <a:prstGeom prst="rect">
+            <a:avLst/>
+          </a:prstGeom>
+          <a:noFill/>
+        </p:spPr>
+        <p:txBody>
+          <a:bodyPr wrap="square" lIns="0" rIns="0" tIns="0" bIns="0" anchor="t">
+            <a:spAutoFit/>
+          </a:bodyPr>
+          <a:lstStyle/>
+          <a:p>
+            <a:pPr algn="l">
+              <a:spcBef>
+                <a:spcPts val="0"/>
+              </a:spcBef>
+              <a:spcAft>
+                <a:spcPts val="0"/>
+              </a:spcAft>
+            </a:pPr>
+            <a:r>
+              <a:rPr sz="1300" b="0">
+                <a:solidFill>
+                  <a:srgbClr val="8B949E"/>
+                </a:solidFill>
+                <a:latin typeface="PingFang SC"/>
+                <a:ea typeface="PingFang SC"/>
+                <a:cs typeface="PingFang SC"/>
+              </a:rPr>
+              <a:t>判据：50 条示教能不能学会，以及是否真的需要双臂</a:t>
+            </a:r>
+          </a:p>
+        </p:txBody>
+      </p:sp>
+      <p:sp>
+        <p:nvSpPr>
+          <p:cNvPr id="7" name="Rectangle 6"/>
+          <p:cNvSpPr/>
+          <p:nvPr/>
+        </p:nvSpPr>
+        <p:spPr>
+          <a:xfrm>
+            <a:off x="566928" y="6345936"/>
+            <a:ext cx="11057839" cy="9525"/>
+          </a:xfrm>
+          <a:prstGeom prst="rect">
+            <a:avLst/>
+          </a:prstGeom>
+          <a:solidFill>
+            <a:srgbClr val="2A313C"/>
+          </a:solidFill>
+          <a:ln>
+            <a:noFill/>
+          </a:ln>
+          <a:effectLst/>
+        </p:spPr>
+        <p:style>
+          <a:lnRef idx="1">
+            <a:schemeClr val="accent1"/>
+          </a:lnRef>
+          <a:fillRef idx="3">
+            <a:schemeClr val="accent1"/>
+          </a:fillRef>
+          <a:effectRef idx="2">
+            <a:schemeClr val="accent1"/>
+          </a:effectRef>
+          <a:fontRef idx="minor">
+            <a:schemeClr val="lt1"/>
+          </a:fontRef>
+        </p:style>
+        <p:txBody>
+          <a:bodyPr rtlCol="0" anchor="ctr"/>
+          <a:lstStyle/>
+          <a:p>
+            <a:pPr algn="ctr"/>
+          </a:p>
+        </p:txBody>
+      </p:sp>
+      <p:sp>
+        <p:nvSpPr>
+          <p:cNvPr id="8" name="TextBox 7"/>
+          <p:cNvSpPr txBox="1"/>
+          <p:nvPr/>
+        </p:nvSpPr>
+        <p:spPr>
+          <a:xfrm>
+            <a:off x="566928" y="6428232"/>
+            <a:ext cx="8229600" cy="256032"/>
+          </a:xfrm>
+          <a:prstGeom prst="rect">
+            <a:avLst/>
+          </a:prstGeom>
+          <a:noFill/>
+        </p:spPr>
+        <p:txBody>
+          <a:bodyPr wrap="square" lIns="0" rIns="0" tIns="0" bIns="0" anchor="t">
+            <a:spAutoFit/>
+          </a:bodyPr>
+          <a:lstStyle/>
+          <a:p>
+            <a:pPr algn="l">
+              <a:spcBef>
+                <a:spcPts val="0"/>
+              </a:spcBef>
+              <a:spcAft>
+                <a:spcPts val="0"/>
+              </a:spcAft>
+            </a:pPr>
+            <a:r>
+              <a:rPr sz="950" b="0">
+                <a:solidFill>
+                  <a:srgbClr val="8B949E"/>
+                </a:solidFill>
+                <a:latin typeface="PingFang SC"/>
+                <a:ea typeface="PingFang SC"/>
+                <a:cs typeface="PingFang SC"/>
+              </a:rPr>
+              <a:t>第三轮 · 操作方式 / 开源数据 / 仿真 · 2026-10-29</a:t>
+            </a:r>
+          </a:p>
+        </p:txBody>
+      </p:sp>
+      <p:sp>
+        <p:nvSpPr>
+          <p:cNvPr id="9" name="TextBox 8"/>
+          <p:cNvSpPr txBox="1"/>
+          <p:nvPr/>
+        </p:nvSpPr>
+        <p:spPr>
+          <a:xfrm>
+            <a:off x="10710367" y="6428232"/>
+            <a:ext cx="914400" cy="256032"/>
+          </a:xfrm>
+          <a:prstGeom prst="rect">
+            <a:avLst/>
+          </a:prstGeom>
+          <a:noFill/>
+        </p:spPr>
+        <p:txBody>
+          <a:bodyPr wrap="square" lIns="0" rIns="0" tIns="0" bIns="0" anchor="t">
+            <a:spAutoFit/>
+          </a:bodyPr>
+          <a:lstStyle/>
+          <a:p>
+            <a:pPr algn="r">
+              <a:spcBef>
+                <a:spcPts val="0"/>
+              </a:spcBef>
+              <a:spcAft>
+                <a:spcPts val="0"/>
+              </a:spcAft>
+            </a:pPr>
+            <a:r>
+              <a:rPr sz="1000" b="1">
+                <a:solidFill>
+                  <a:srgbClr val="3EC5C9"/>
+                </a:solidFill>
+                <a:latin typeface="Helvetica Neue"/>
+                <a:ea typeface="PingFang SC"/>
+                <a:cs typeface="PingFang SC"/>
+              </a:rPr>
+              <a:t>17</a:t>
+            </a:r>
+          </a:p>
+        </p:txBody>
+      </p:sp>
+      <p:graphicFrame>
+        <p:nvGraphicFramePr>
+          <p:cNvPr id="10" name="Table 9"/>
+          <p:cNvGraphicFramePr>
+            <a:graphicFrameLocks noGrp="1"/>
+          </p:cNvGraphicFramePr>
+          <p:nvPr/>
+        </p:nvGraphicFramePr>
+        <p:xfrm>
+          <a:off x="566928" y="1737360"/>
+          <a:ext cx="11055096" cy="3200400"/>
+        </p:xfrm>
+        <a:graphic>
+          <a:graphicData uri="http://schemas.openxmlformats.org/drawingml/2006/table">
+            <a:tbl>
+              <a:tblPr firstRow="1" bandRow="1">
+                <a:tableStyleId>{5C22544A-7EE6-4342-B048-85BDC9FD1C3A}</a:tableStyleId>
+              </a:tblPr>
+              <a:tblGrid>
+                <a:gridCol w="2103120"/>
+                <a:gridCol w="3108960"/>
+                <a:gridCol w="2103120"/>
+                <a:gridCol w="3739896"/>
+              </a:tblGrid>
+              <a:tr h="457200">
+                <a:tc>
+                  <a:txBody>
+                    <a:bodyPr wrap="square"/>
+                    <a:lstStyle/>
+                    <a:p>
+                      <a:pPr algn="l"/>
+                      <a:r>
+                        <a:rPr sz="1019" b="1">
+                          <a:solidFill>
+                            <a:srgbClr val="8B949E"/>
+                          </a:solidFill>
+                          <a:latin typeface="PingFang SC"/>
+                          <a:ea typeface="PingFang SC"/>
+                          <a:cs typeface="PingFang SC"/>
+                        </a:rPr>
+                        <a:t>任务</a:t>
+                      </a:r>
+                    </a:p>
+                  </a:txBody>
+                  <a:tcPr marL="91440" marR="54864" marT="18288" marB="18288" anchor="ctr">
+                    <a:solidFill>
+                      <a:srgbClr val="1C222B"/>
+                    </a:solidFill>
+                  </a:tcPr>
+                </a:tc>
+                <a:tc>
+                  <a:txBody>
+                    <a:bodyPr wrap="square"/>
+                    <a:lstStyle/>
+                    <a:p>
+                      <a:pPr algn="l"/>
+                      <a:r>
+                        <a:rPr sz="1019" b="1">
+                          <a:solidFill>
+                            <a:srgbClr val="8B949E"/>
+                          </a:solidFill>
+                          <a:latin typeface="PingFang SC"/>
+                          <a:ea typeface="PingFang SC"/>
+                          <a:cs typeface="PingFang SC"/>
+                        </a:rPr>
+                        <a:t>观测 / 动作</a:t>
+                      </a:r>
+                    </a:p>
+                  </a:txBody>
+                  <a:tcPr marL="91440" marR="54864" marT="18288" marB="18288" anchor="ctr">
+                    <a:solidFill>
+                      <a:srgbClr val="1C222B"/>
+                    </a:solidFill>
+                  </a:tcPr>
+                </a:tc>
+                <a:tc>
+                  <a:txBody>
+                    <a:bodyPr wrap="square"/>
+                    <a:lstStyle/>
+                    <a:p>
+                      <a:pPr algn="l"/>
+                      <a:r>
+                        <a:rPr sz="1019" b="1">
+                          <a:solidFill>
+                            <a:srgbClr val="8B949E"/>
+                          </a:solidFill>
+                          <a:latin typeface="PingFang SC"/>
+                          <a:ea typeface="PingFang SC"/>
+                          <a:cs typeface="PingFang SC"/>
+                        </a:rPr>
+                        <a:t>50 条示教够吗</a:t>
+                      </a:r>
+                    </a:p>
+                  </a:txBody>
+                  <a:tcPr marL="91440" marR="54864" marT="18288" marB="18288" anchor="ctr">
+                    <a:solidFill>
+                      <a:srgbClr val="1C222B"/>
+                    </a:solidFill>
+                  </a:tcPr>
+                </a:tc>
+                <a:tc>
+                  <a:txBody>
+                    <a:bodyPr wrap="square"/>
+                    <a:lstStyle/>
+                    <a:p>
+                      <a:pPr algn="l"/>
+                      <a:r>
+                        <a:rPr sz="1019" b="1">
+                          <a:solidFill>
+                            <a:srgbClr val="8B949E"/>
+                          </a:solidFill>
+                          <a:latin typeface="PingFang SC"/>
+                          <a:ea typeface="PingFang SC"/>
+                          <a:cs typeface="PingFang SC"/>
+                        </a:rPr>
+                        <a:t>说明</a:t>
+                      </a:r>
+                    </a:p>
+                  </a:txBody>
+                  <a:tcPr marL="91440" marR="54864" marT="18288" marB="18288" anchor="ctr">
+                    <a:solidFill>
+                      <a:srgbClr val="1C222B"/>
+                    </a:solidFill>
+                  </a:tcPr>
+                </a:tc>
+              </a:tr>
+              <a:tr h="457200">
+                <a:tc>
+                  <a:txBody>
+                    <a:bodyPr wrap="square"/>
+                    <a:lstStyle/>
+                    <a:p>
+                      <a:pPr algn="l"/>
+                      <a:r>
+                        <a:rPr sz="980" b="0">
+                          <a:solidFill>
+                            <a:srgbClr val="E6EDF3"/>
+                          </a:solidFill>
+                          <a:latin typeface="PingFang SC"/>
+                          <a:ea typeface="PingFang SC"/>
+                          <a:cs typeface="PingFang SC"/>
+                        </a:rPr>
+                        <a:t>抓取放置（单臂）</a:t>
+                      </a:r>
+                    </a:p>
+                  </a:txBody>
+                  <a:tcPr marL="91440" marR="54864" marT="18288" marB="18288" anchor="ctr">
+                    <a:solidFill>
+                      <a:srgbClr val="161B22"/>
+                    </a:solidFill>
+                  </a:tcPr>
+                </a:tc>
+                <a:tc>
+                  <a:txBody>
+                    <a:bodyPr wrap="square"/>
+                    <a:lstStyle/>
+                    <a:p>
+                      <a:pPr algn="l"/>
+                      <a:r>
+                        <a:rPr sz="980" b="0">
+                          <a:solidFill>
+                            <a:srgbClr val="E6EDF3"/>
+                          </a:solidFill>
+                          <a:latin typeface="PingFang SC"/>
+                          <a:ea typeface="PingFang SC"/>
+                          <a:cs typeface="PingFang SC"/>
+                        </a:rPr>
+                        <a:t>14 维关节 + 双腕图像</a:t>
+                      </a:r>
+                    </a:p>
+                  </a:txBody>
+                  <a:tcPr marL="91440" marR="54864" marT="18288" marB="18288" anchor="ctr">
+                    <a:solidFill>
+                      <a:srgbClr val="161B22"/>
+                    </a:solidFill>
+                  </a:tcPr>
+                </a:tc>
+                <a:tc>
+                  <a:txBody>
+                    <a:bodyPr wrap="square"/>
+                    <a:lstStyle/>
+                    <a:p>
+                      <a:pPr algn="l"/>
+                      <a:r>
+                        <a:rPr sz="980" b="0">
+                          <a:solidFill>
+                            <a:srgbClr val="3FB950"/>
+                          </a:solidFill>
+                          <a:latin typeface="PingFang SC"/>
+                          <a:ea typeface="PingFang SC"/>
+                          <a:cs typeface="PingFang SC"/>
+                        </a:rPr>
+                        <a:t>✓ 够</a:t>
+                      </a:r>
+                    </a:p>
+                  </a:txBody>
+                  <a:tcPr marL="91440" marR="54864" marT="18288" marB="18288" anchor="ctr">
+                    <a:solidFill>
+                      <a:srgbClr val="161B22"/>
+                    </a:solidFill>
+                  </a:tcPr>
+                </a:tc>
+                <a:tc>
+                  <a:txBody>
+                    <a:bodyPr wrap="square"/>
+                    <a:lstStyle/>
+                    <a:p>
+                      <a:pPr algn="l"/>
+                      <a:r>
+                        <a:rPr sz="980" b="0">
+                          <a:solidFill>
+                            <a:srgbClr val="E6EDF3"/>
+                          </a:solidFill>
+                          <a:latin typeface="PingFang SC"/>
+                          <a:ea typeface="PingFang SC"/>
+                          <a:cs typeface="PingFang SC"/>
+                        </a:rPr>
+                        <a:t>ACT / DP 已验证可行，先做这个</a:t>
+                      </a:r>
+                    </a:p>
+                  </a:txBody>
+                  <a:tcPr marL="91440" marR="54864" marT="18288" marB="18288" anchor="ctr">
+                    <a:solidFill>
+                      <a:srgbClr val="161B22"/>
+                    </a:solidFill>
+                  </a:tcPr>
+                </a:tc>
+              </a:tr>
+              <a:tr h="457200">
+                <a:tc>
+                  <a:txBody>
+                    <a:bodyPr wrap="square"/>
+                    <a:lstStyle/>
+                    <a:p>
+                      <a:pPr algn="l"/>
+                      <a:r>
+                        <a:rPr sz="980" b="0">
+                          <a:solidFill>
+                            <a:srgbClr val="E6EDF3"/>
+                          </a:solidFill>
+                          <a:latin typeface="PingFang SC"/>
+                          <a:ea typeface="PingFang SC"/>
+                          <a:cs typeface="PingFang SC"/>
+                        </a:rPr>
+                        <a:t>开抽屉 / 按按钮</a:t>
+                      </a:r>
+                    </a:p>
+                  </a:txBody>
+                  <a:tcPr marL="91440" marR="54864" marT="18288" marB="18288" anchor="ctr">
+                    <a:solidFill>
+                      <a:srgbClr val="0E1116"/>
+                    </a:solidFill>
+                  </a:tcPr>
+                </a:tc>
+                <a:tc>
+                  <a:txBody>
+                    <a:bodyPr wrap="square"/>
+                    <a:lstStyle/>
+                    <a:p>
+                      <a:pPr algn="l"/>
+                      <a:r>
+                        <a:rPr sz="980" b="0">
+                          <a:solidFill>
+                            <a:srgbClr val="E6EDF3"/>
+                          </a:solidFill>
+                          <a:latin typeface="PingFang SC"/>
+                          <a:ea typeface="PingFang SC"/>
+                          <a:cs typeface="PingFang SC"/>
+                        </a:rPr>
+                        <a:t>同上 + 力反馈缺失</a:t>
+                      </a:r>
+                    </a:p>
+                  </a:txBody>
+                  <a:tcPr marL="91440" marR="54864" marT="18288" marB="18288" anchor="ctr">
+                    <a:solidFill>
+                      <a:srgbClr val="0E1116"/>
+                    </a:solidFill>
+                  </a:tcPr>
+                </a:tc>
+                <a:tc>
+                  <a:txBody>
+                    <a:bodyPr wrap="square"/>
+                    <a:lstStyle/>
+                    <a:p>
+                      <a:pPr algn="l"/>
+                      <a:r>
+                        <a:rPr sz="980" b="0">
+                          <a:solidFill>
+                            <a:srgbClr val="3FB950"/>
+                          </a:solidFill>
+                          <a:latin typeface="PingFang SC"/>
+                          <a:ea typeface="PingFang SC"/>
+                          <a:cs typeface="PingFang SC"/>
+                        </a:rPr>
+                        <a:t>✓ 勉强够</a:t>
+                      </a:r>
+                    </a:p>
+                  </a:txBody>
+                  <a:tcPr marL="91440" marR="54864" marT="18288" marB="18288" anchor="ctr">
+                    <a:solidFill>
+                      <a:srgbClr val="0E1116"/>
+                    </a:solidFill>
+                  </a:tcPr>
+                </a:tc>
+                <a:tc>
+                  <a:txBody>
+                    <a:bodyPr wrap="square"/>
+                    <a:lstStyle/>
+                    <a:p>
+                      <a:pPr algn="l"/>
+                      <a:r>
+                        <a:rPr sz="980" b="0">
+                          <a:solidFill>
+                            <a:srgbClr val="E6EDF3"/>
+                          </a:solidFill>
+                          <a:latin typeface="PingFang SC"/>
+                          <a:ea typeface="PingFang SC"/>
+                          <a:cs typeface="PingFang SC"/>
+                        </a:rPr>
+                        <a:t>接触类，建议配 MIT 阻抗</a:t>
+                      </a:r>
+                    </a:p>
+                  </a:txBody>
+                  <a:tcPr marL="91440" marR="54864" marT="18288" marB="18288" anchor="ctr">
+                    <a:solidFill>
+                      <a:srgbClr val="0E1116"/>
+                    </a:solidFill>
+                  </a:tcPr>
+                </a:tc>
+              </a:tr>
+              <a:tr h="457200">
+                <a:tc>
+                  <a:txBody>
+                    <a:bodyPr wrap="square"/>
+                    <a:lstStyle/>
+                    <a:p>
+                      <a:pPr algn="l"/>
+                      <a:r>
+                        <a:rPr sz="980" b="0">
+                          <a:solidFill>
+                            <a:srgbClr val="E6EDF3"/>
+                          </a:solidFill>
+                          <a:latin typeface="PingFang SC"/>
+                          <a:ea typeface="PingFang SC"/>
+                          <a:cs typeface="PingFang SC"/>
+                        </a:rPr>
+                        <a:t>双臂传递</a:t>
+                      </a:r>
+                    </a:p>
+                  </a:txBody>
+                  <a:tcPr marL="91440" marR="54864" marT="18288" marB="18288" anchor="ctr">
+                    <a:solidFill>
+                      <a:srgbClr val="161B22"/>
+                    </a:solidFill>
+                  </a:tcPr>
+                </a:tc>
+                <a:tc>
+                  <a:txBody>
+                    <a:bodyPr wrap="square"/>
+                    <a:lstStyle/>
+                    <a:p>
+                      <a:pPr algn="l"/>
+                      <a:r>
+                        <a:rPr sz="980" b="0">
+                          <a:solidFill>
+                            <a:srgbClr val="E6EDF3"/>
+                          </a:solidFill>
+                          <a:latin typeface="PingFang SC"/>
+                          <a:ea typeface="PingFang SC"/>
+                          <a:cs typeface="PingFang SC"/>
+                        </a:rPr>
+                        <a:t>14 维 + 头相机</a:t>
+                      </a:r>
+                    </a:p>
+                  </a:txBody>
+                  <a:tcPr marL="91440" marR="54864" marT="18288" marB="18288" anchor="ctr">
+                    <a:solidFill>
+                      <a:srgbClr val="161B22"/>
+                    </a:solidFill>
+                  </a:tcPr>
+                </a:tc>
+                <a:tc>
+                  <a:txBody>
+                    <a:bodyPr wrap="square"/>
+                    <a:lstStyle/>
+                    <a:p>
+                      <a:pPr algn="l"/>
+                      <a:r>
+                        <a:rPr sz="980" b="0">
+                          <a:solidFill>
+                            <a:srgbClr val="D29922"/>
+                          </a:solidFill>
+                          <a:latin typeface="PingFang SC"/>
+                          <a:ea typeface="PingFang SC"/>
+                          <a:cs typeface="PingFang SC"/>
+                        </a:rPr>
+                        <a:t>⚠ 需要头相机</a:t>
+                      </a:r>
+                    </a:p>
+                  </a:txBody>
+                  <a:tcPr marL="91440" marR="54864" marT="18288" marB="18288" anchor="ctr">
+                    <a:solidFill>
+                      <a:srgbClr val="161B22"/>
+                    </a:solidFill>
+                  </a:tcPr>
+                </a:tc>
+                <a:tc>
+                  <a:txBody>
+                    <a:bodyPr wrap="square"/>
+                    <a:lstStyle/>
+                    <a:p>
+                      <a:pPr algn="l"/>
+                      <a:r>
+                        <a:rPr sz="980" b="0">
+                          <a:solidFill>
+                            <a:srgbClr val="E6EDF3"/>
+                          </a:solidFill>
+                          <a:latin typeface="PingFang SC"/>
+                          <a:ea typeface="PingFang SC"/>
+                          <a:cs typeface="PingFang SC"/>
+                        </a:rPr>
+                        <a:t>只有双腕相机时看不到对方夹爪</a:t>
+                      </a:r>
+                    </a:p>
+                  </a:txBody>
+                  <a:tcPr marL="91440" marR="54864" marT="18288" marB="18288" anchor="ctr">
+                    <a:solidFill>
+                      <a:srgbClr val="161B22"/>
+                    </a:solidFill>
+                  </a:tcPr>
+                </a:tc>
+              </a:tr>
+              <a:tr h="457200">
+                <a:tc>
+                  <a:txBody>
+                    <a:bodyPr wrap="square"/>
+                    <a:lstStyle/>
+                    <a:p>
+                      <a:pPr algn="l"/>
+                      <a:r>
+                        <a:rPr sz="980" b="0">
+                          <a:solidFill>
+                            <a:srgbClr val="E6EDF3"/>
+                          </a:solidFill>
+                          <a:latin typeface="PingFang SC"/>
+                          <a:ea typeface="PingFang SC"/>
+                          <a:cs typeface="PingFang SC"/>
+                        </a:rPr>
+                        <a:t>线缆整理</a:t>
+                      </a:r>
+                    </a:p>
+                  </a:txBody>
+                  <a:tcPr marL="91440" marR="54864" marT="18288" marB="18288" anchor="ctr">
+                    <a:solidFill>
+                      <a:srgbClr val="0E1116"/>
+                    </a:solidFill>
+                  </a:tcPr>
+                </a:tc>
+                <a:tc>
+                  <a:txBody>
+                    <a:bodyPr wrap="square"/>
+                    <a:lstStyle/>
+                    <a:p>
+                      <a:pPr algn="l"/>
+                      <a:r>
+                        <a:rPr sz="980" b="0">
+                          <a:solidFill>
+                            <a:srgbClr val="E6EDF3"/>
+                          </a:solidFill>
+                          <a:latin typeface="PingFang SC"/>
+                          <a:ea typeface="PingFang SC"/>
+                          <a:cs typeface="PingFang SC"/>
+                        </a:rPr>
+                        <a:t>14 维 + 头相机</a:t>
+                      </a:r>
+                    </a:p>
+                  </a:txBody>
+                  <a:tcPr marL="91440" marR="54864" marT="18288" marB="18288" anchor="ctr">
+                    <a:solidFill>
+                      <a:srgbClr val="0E1116"/>
+                    </a:solidFill>
+                  </a:tcPr>
+                </a:tc>
+                <a:tc>
+                  <a:txBody>
+                    <a:bodyPr wrap="square"/>
+                    <a:lstStyle/>
+                    <a:p>
+                      <a:pPr algn="l"/>
+                      <a:r>
+                        <a:rPr sz="980" b="0">
+                          <a:solidFill>
+                            <a:srgbClr val="F85149"/>
+                          </a:solidFill>
+                          <a:latin typeface="PingFang SC"/>
+                          <a:ea typeface="PingFang SC"/>
+                          <a:cs typeface="PingFang SC"/>
+                        </a:rPr>
+                        <a:t>✗ 不够</a:t>
+                      </a:r>
+                    </a:p>
+                  </a:txBody>
+                  <a:tcPr marL="91440" marR="54864" marT="18288" marB="18288" anchor="ctr">
+                    <a:solidFill>
+                      <a:srgbClr val="0E1116"/>
+                    </a:solidFill>
+                  </a:tcPr>
+                </a:tc>
+                <a:tc>
+                  <a:txBody>
+                    <a:bodyPr wrap="square"/>
+                    <a:lstStyle/>
+                    <a:p>
+                      <a:pPr algn="l"/>
+                      <a:r>
+                        <a:rPr sz="980" b="0">
+                          <a:solidFill>
+                            <a:srgbClr val="E6EDF3"/>
+                          </a:solidFill>
+                          <a:latin typeface="PingFang SC"/>
+                          <a:ea typeface="PingFang SC"/>
+                          <a:cs typeface="PingFang SC"/>
+                        </a:rPr>
+                        <a:t>形变物体，50 条学不会</a:t>
+                      </a:r>
+                    </a:p>
+                  </a:txBody>
+                  <a:tcPr marL="91440" marR="54864" marT="18288" marB="18288" anchor="ctr">
+                    <a:solidFill>
+                      <a:srgbClr val="0E1116"/>
+                    </a:solidFill>
+                  </a:tcPr>
+                </a:tc>
+              </a:tr>
+              <a:tr h="457200">
+                <a:tc>
+                  <a:txBody>
+                    <a:bodyPr wrap="square"/>
+                    <a:lstStyle/>
+                    <a:p>
+                      <a:pPr algn="l"/>
+                      <a:r>
+                        <a:rPr sz="980" b="0">
+                          <a:solidFill>
+                            <a:srgbClr val="E6EDF3"/>
+                          </a:solidFill>
+                          <a:latin typeface="PingFang SC"/>
+                          <a:ea typeface="PingFang SC"/>
+                          <a:cs typeface="PingFang SC"/>
+                        </a:rPr>
+                        <a:t>料箱抓取</a:t>
+                      </a:r>
+                    </a:p>
+                  </a:txBody>
+                  <a:tcPr marL="91440" marR="54864" marT="18288" marB="18288" anchor="ctr">
+                    <a:solidFill>
+                      <a:srgbClr val="161B22"/>
+                    </a:solidFill>
+                  </a:tcPr>
+                </a:tc>
+                <a:tc>
+                  <a:txBody>
+                    <a:bodyPr wrap="square"/>
+                    <a:lstStyle/>
+                    <a:p>
+                      <a:pPr algn="l"/>
+                      <a:r>
+                        <a:rPr sz="980" b="0">
+                          <a:solidFill>
+                            <a:srgbClr val="E6EDF3"/>
+                          </a:solidFill>
+                          <a:latin typeface="PingFang SC"/>
+                          <a:ea typeface="PingFang SC"/>
+                          <a:cs typeface="PingFang SC"/>
+                        </a:rPr>
+                        <a:t>14 维 + 头相机</a:t>
+                      </a:r>
+                    </a:p>
+                  </a:txBody>
+                  <a:tcPr marL="91440" marR="54864" marT="18288" marB="18288" anchor="ctr">
+                    <a:solidFill>
+                      <a:srgbClr val="161B22"/>
+                    </a:solidFill>
+                  </a:tcPr>
+                </a:tc>
+                <a:tc>
+                  <a:txBody>
+                    <a:bodyPr wrap="square"/>
+                    <a:lstStyle/>
+                    <a:p>
+                      <a:pPr algn="l"/>
+                      <a:r>
+                        <a:rPr sz="980" b="0">
+                          <a:solidFill>
+                            <a:srgbClr val="D29922"/>
+                          </a:solidFill>
+                          <a:latin typeface="PingFang SC"/>
+                          <a:ea typeface="PingFang SC"/>
+                          <a:cs typeface="PingFang SC"/>
+                        </a:rPr>
+                        <a:t>⚠ 勉强</a:t>
+                      </a:r>
+                    </a:p>
+                  </a:txBody>
+                  <a:tcPr marL="91440" marR="54864" marT="18288" marB="18288" anchor="ctr">
+                    <a:solidFill>
+                      <a:srgbClr val="161B22"/>
+                    </a:solidFill>
+                  </a:tcPr>
+                </a:tc>
+                <a:tc>
+                  <a:txBody>
+                    <a:bodyPr wrap="square"/>
+                    <a:lstStyle/>
+                    <a:p>
+                      <a:pPr algn="l"/>
+                      <a:r>
+                        <a:rPr sz="980" b="0">
+                          <a:solidFill>
+                            <a:srgbClr val="E6EDF3"/>
+                          </a:solidFill>
+                          <a:latin typeface="PingFang SC"/>
+                          <a:ea typeface="PingFang SC"/>
+                          <a:cs typeface="PingFang SC"/>
+                        </a:rPr>
+                        <a:t>杂乱场景，需要更多数据</a:t>
+                      </a:r>
+                    </a:p>
+                  </a:txBody>
+                  <a:tcPr marL="91440" marR="54864" marT="18288" marB="18288" anchor="ctr">
+                    <a:solidFill>
+                      <a:srgbClr val="161B22"/>
+                    </a:solidFill>
+                  </a:tcPr>
+                </a:tc>
+              </a:tr>
+              <a:tr h="457200">
+                <a:tc>
+                  <a:txBody>
+                    <a:bodyPr wrap="square"/>
+                    <a:lstStyle/>
+                    <a:p>
+                      <a:pPr algn="l"/>
+                      <a:r>
+                        <a:rPr sz="980" b="0">
+                          <a:solidFill>
+                            <a:srgbClr val="E6EDF3"/>
+                          </a:solidFill>
+                          <a:latin typeface="PingFang SC"/>
+                          <a:ea typeface="PingFang SC"/>
+                          <a:cs typeface="PingFang SC"/>
+                        </a:rPr>
+                        <a:t>移动抓取</a:t>
+                      </a:r>
+                    </a:p>
+                  </a:txBody>
+                  <a:tcPr marL="91440" marR="54864" marT="18288" marB="18288" anchor="ctr">
+                    <a:solidFill>
+                      <a:srgbClr val="0E1116"/>
+                    </a:solidFill>
+                  </a:tcPr>
+                </a:tc>
+                <a:tc>
+                  <a:txBody>
+                    <a:bodyPr wrap="square"/>
+                    <a:lstStyle/>
+                    <a:p>
+                      <a:pPr algn="l"/>
+                      <a:r>
+                        <a:rPr sz="980" b="0">
+                          <a:solidFill>
+                            <a:srgbClr val="E6EDF3"/>
+                          </a:solidFill>
+                          <a:latin typeface="PingFang SC"/>
+                          <a:ea typeface="PingFang SC"/>
+                          <a:cs typeface="PingFang SC"/>
+                        </a:rPr>
+                        <a:t>底盘 + 双臂</a:t>
+                      </a:r>
+                    </a:p>
+                  </a:txBody>
+                  <a:tcPr marL="91440" marR="54864" marT="18288" marB="18288" anchor="ctr">
+                    <a:solidFill>
+                      <a:srgbClr val="0E1116"/>
+                    </a:solidFill>
+                  </a:tcPr>
+                </a:tc>
+                <a:tc>
+                  <a:txBody>
+                    <a:bodyPr wrap="square"/>
+                    <a:lstStyle/>
+                    <a:p>
+                      <a:pPr algn="l"/>
+                      <a:r>
+                        <a:rPr sz="980" b="0">
+                          <a:solidFill>
+                            <a:srgbClr val="F85149"/>
+                          </a:solidFill>
+                          <a:latin typeface="PingFang SC"/>
+                          <a:ea typeface="PingFang SC"/>
+                          <a:cs typeface="PingFang SC"/>
+                        </a:rPr>
+                        <a:t>✗ 不该一起训</a:t>
+                      </a:r>
+                    </a:p>
+                  </a:txBody>
+                  <a:tcPr marL="91440" marR="54864" marT="18288" marB="18288" anchor="ctr">
+                    <a:solidFill>
+                      <a:srgbClr val="0E1116"/>
+                    </a:solidFill>
+                  </a:tcPr>
+                </a:tc>
+                <a:tc>
+                  <a:txBody>
+                    <a:bodyPr wrap="square"/>
+                    <a:lstStyle/>
+                    <a:p>
+                      <a:pPr algn="l"/>
+                      <a:r>
+                        <a:rPr sz="980" b="0">
+                          <a:solidFill>
+                            <a:srgbClr val="E6EDF3"/>
+                          </a:solidFill>
+                          <a:latin typeface="PingFang SC"/>
+                          <a:ea typeface="PingFang SC"/>
+                          <a:cs typeface="PingFang SC"/>
+                        </a:rPr>
+                        <a:t>底盘交给 Nav2，别进策略</a:t>
+                      </a:r>
+                    </a:p>
+                  </a:txBody>
+                  <a:tcPr marL="91440" marR="54864" marT="18288" marB="18288" anchor="ctr">
+                    <a:solidFill>
+                      <a:srgbClr val="0E1116"/>
+                    </a:solidFill>
+                  </a:tcPr>
+                </a:tc>
+              </a:tr>
+            </a:tbl>
+          </a:graphicData>
+        </a:graphic>
+      </p:graphicFrame>
+      <p:sp>
+        <p:nvSpPr>
+          <p:cNvPr id="11" name="TextBox 10"/>
+          <p:cNvSpPr txBox="1"/>
+          <p:nvPr/>
+        </p:nvSpPr>
+        <p:spPr>
+          <a:xfrm>
+            <a:off x="566928" y="4983480"/>
+            <a:ext cx="10881360" cy="1188720"/>
+          </a:xfrm>
+          <a:prstGeom prst="rect">
+            <a:avLst/>
+          </a:prstGeom>
+          <a:noFill/>
+        </p:spPr>
+        <p:txBody>
+          <a:bodyPr wrap="square" lIns="0" rIns="0" tIns="0" bIns="0" anchor="t">
+            <a:spAutoFit/>
+          </a:bodyPr>
+          <a:lstStyle/>
+          <a:p>
+            <a:pPr algn="l">
+              <a:spcBef>
+                <a:spcPts val="0"/>
+              </a:spcBef>
+              <a:spcAft>
+                <a:spcPts val="0"/>
+              </a:spcAft>
+            </a:pPr>
+            <a:r>
+              <a:rPr sz="1250" b="1">
+                <a:solidFill>
+                  <a:srgbClr val="3EC5C9"/>
+                </a:solidFill>
+                <a:latin typeface="PingFang SC"/>
+                <a:ea typeface="PingFang SC"/>
+                <a:cs typeface="PingFang SC"/>
+              </a:rPr>
+              <a:t>优先级建议</a:t>
+            </a:r>
+          </a:p>
+          <a:p>
+            <a:pPr>
+              <a:spcBef>
+                <a:spcPts val="0"/>
+              </a:spcBef>
+              <a:spcAft>
+                <a:spcPts val="0"/>
+              </a:spcAft>
+            </a:pPr>
+            <a:r>
+              <a:rPr sz="1200" b="0">
+                <a:solidFill>
+                  <a:srgbClr val="E6EDF3"/>
+                </a:solidFill>
+                <a:latin typeface="PingFang SC"/>
+                <a:ea typeface="PingFang SC"/>
+                <a:cs typeface="PingFang SC"/>
+              </a:rPr>
+              <a:t>1. 单臂抓放：数据最便宜，ACT 已验证；2. 用拖动示教把采集成本压下来；3. 加头相机后再上双臂任务；4. 底盘与操作解耦，不要塞进同一个策略。</a:t>
+            </a:r>
+          </a:p>
+        </p:txBody>
+      </p:sp>
+    </p:spTree>
+  </p:cSld>
+  <p:clrMapOvr>
+    <a:masterClrMapping/>
+  </p:clrMapOvr>
+</p:sld>
+</file>
+
+<file path=ppt/slides/slide18.xml><?xml version="1.0" encoding="utf-8"?>
+<p:sld xmlns:a="http://schemas.openxmlformats.org/drawingml/2006/main" xmlns:p="http://schemas.openxmlformats.org/presentationml/2006/main" xmlns:r="http://schemas.openxmlformats.org/officeDocument/2006/relationships">
+  <p:cSld>
+    <p:spTree>
+      <p:nvGrpSpPr>
+        <p:cNvPr id="1" name=""/>
+        <p:cNvGrpSpPr/>
+        <p:nvPr/>
+      </p:nvGrpSpPr>
+      <p:grpSpPr/>
+      <p:sp>
+        <p:nvSpPr>
+          <p:cNvPr id="2" name="Rectangle 1"/>
+          <p:cNvSpPr/>
+          <p:nvPr/>
+        </p:nvSpPr>
+        <p:spPr>
+          <a:xfrm>
+            <a:off x="0" y="0"/>
+            <a:ext cx="12191695" cy="6858000"/>
+          </a:xfrm>
+          <a:prstGeom prst="rect">
+            <a:avLst/>
+          </a:prstGeom>
+          <a:solidFill>
+            <a:srgbClr val="0E1116"/>
+          </a:solidFill>
+          <a:ln>
+            <a:noFill/>
+          </a:ln>
+          <a:effectLst/>
+        </p:spPr>
+        <p:style>
+          <a:lnRef idx="1">
+            <a:schemeClr val="accent1"/>
+          </a:lnRef>
+          <a:fillRef idx="3">
+            <a:schemeClr val="accent1"/>
+          </a:fillRef>
+          <a:effectRef idx="2">
+            <a:schemeClr val="accent1"/>
+          </a:effectRef>
+          <a:fontRef idx="minor">
+            <a:schemeClr val="lt1"/>
+          </a:fontRef>
+        </p:style>
+        <p:txBody>
+          <a:bodyPr rtlCol="0" anchor="ctr"/>
+          <a:lstStyle/>
+          <a:p>
+            <a:pPr algn="ctr"/>
+          </a:p>
+        </p:txBody>
+      </p:sp>
+      <p:sp>
+        <p:nvSpPr>
+          <p:cNvPr id="3" name="Rectangle 2"/>
+          <p:cNvSpPr/>
+          <p:nvPr/>
+        </p:nvSpPr>
+        <p:spPr>
+          <a:xfrm>
+            <a:off x="566928" y="457200"/>
+            <a:ext cx="566928" cy="41148"/>
+          </a:xfrm>
+          <a:prstGeom prst="rect">
+            <a:avLst/>
+          </a:prstGeom>
+          <a:solidFill>
+            <a:srgbClr val="3EC5C9"/>
+          </a:solidFill>
+          <a:ln>
+            <a:noFill/>
+          </a:ln>
+          <a:effectLst/>
+        </p:spPr>
+        <p:style>
+          <a:lnRef idx="1">
+            <a:schemeClr val="accent1"/>
+          </a:lnRef>
+          <a:fillRef idx="3">
+            <a:schemeClr val="accent1"/>
+          </a:fillRef>
+          <a:effectRef idx="2">
+            <a:schemeClr val="accent1"/>
+          </a:effectRef>
+          <a:fontRef idx="minor">
+            <a:schemeClr val="lt1"/>
+          </a:fontRef>
+        </p:style>
+        <p:txBody>
+          <a:bodyPr rtlCol="0" anchor="ctr"/>
+          <a:lstStyle/>
+          <a:p>
+            <a:pPr algn="ctr"/>
+          </a:p>
+        </p:txBody>
+      </p:sp>
+      <p:sp>
+        <p:nvSpPr>
+          <p:cNvPr id="4" name="TextBox 3"/>
+          <p:cNvSpPr txBox="1"/>
+          <p:nvPr/>
+        </p:nvSpPr>
+        <p:spPr>
+          <a:xfrm>
+            <a:off x="566928" y="566928"/>
+            <a:ext cx="10058400" cy="274320"/>
+          </a:xfrm>
+          <a:prstGeom prst="rect">
+            <a:avLst/>
+          </a:prstGeom>
+          <a:noFill/>
+        </p:spPr>
+        <p:txBody>
+          <a:bodyPr wrap="square" lIns="0" rIns="0" tIns="0" bIns="0" anchor="t">
+            <a:spAutoFit/>
+          </a:bodyPr>
+          <a:lstStyle/>
+          <a:p>
+            <a:pPr algn="l">
+              <a:spcBef>
+                <a:spcPts val="0"/>
+              </a:spcBef>
+              <a:spcAft>
+                <a:spcPts val="0"/>
+              </a:spcAft>
+            </a:pPr>
+            <a:r>
+              <a:rPr sz="1150" b="1">
+                <a:solidFill>
+                  <a:srgbClr val="3EC5C9"/>
+                </a:solidFill>
+                <a:latin typeface="PingFang SC"/>
+                <a:ea typeface="PingFang SC"/>
+                <a:cs typeface="PingFang SC"/>
+              </a:rPr>
+              <a:t>NEXT</a:t>
+            </a:r>
+          </a:p>
+        </p:txBody>
+      </p:sp>
+      <p:sp>
+        <p:nvSpPr>
+          <p:cNvPr id="5" name="TextBox 4"/>
+          <p:cNvSpPr txBox="1"/>
+          <p:nvPr/>
+        </p:nvSpPr>
+        <p:spPr>
+          <a:xfrm>
+            <a:off x="566928" y="822960"/>
+            <a:ext cx="10607040" cy="566928"/>
+          </a:xfrm>
+          <a:prstGeom prst="rect">
+            <a:avLst/>
+          </a:prstGeom>
+          <a:noFill/>
+        </p:spPr>
+        <p:txBody>
+          <a:bodyPr wrap="square" lIns="0" rIns="0" tIns="0" bIns="0" anchor="t">
+            <a:spAutoFit/>
+          </a:bodyPr>
+          <a:lstStyle/>
+          <a:p>
+            <a:pPr algn="l">
+              <a:spcBef>
+                <a:spcPts val="0"/>
+              </a:spcBef>
+              <a:spcAft>
+                <a:spcPts val="0"/>
+              </a:spcAft>
+            </a:pPr>
+            <a:r>
+              <a:rPr sz="2900" b="1">
+                <a:solidFill>
+                  <a:srgbClr val="E6EDF3"/>
+                </a:solidFill>
+                <a:latin typeface="PingFang SC"/>
+                <a:ea typeface="PingFang SC"/>
+                <a:cs typeface="PingFang SC"/>
+              </a:rPr>
+              <a:t>接下来的顺序</a:t>
+            </a:r>
+          </a:p>
+        </p:txBody>
+      </p:sp>
+      <p:sp>
+        <p:nvSpPr>
+          <p:cNvPr id="6" name="TextBox 5"/>
+          <p:cNvSpPr txBox="1"/>
+          <p:nvPr/>
+        </p:nvSpPr>
+        <p:spPr>
+          <a:xfrm>
+            <a:off x="566928" y="1389888"/>
+            <a:ext cx="10607040" cy="310896"/>
+          </a:xfrm>
+          <a:prstGeom prst="rect">
+            <a:avLst/>
+          </a:prstGeom>
+          <a:noFill/>
+        </p:spPr>
+        <p:txBody>
+          <a:bodyPr wrap="square" lIns="0" rIns="0" tIns="0" bIns="0" anchor="t">
+            <a:spAutoFit/>
+          </a:bodyPr>
+          <a:lstStyle/>
+          <a:p>
+            <a:pPr algn="l">
+              <a:spcBef>
+                <a:spcPts val="0"/>
+              </a:spcBef>
+              <a:spcAft>
+                <a:spcPts val="0"/>
+              </a:spcAft>
+            </a:pPr>
+            <a:r>
+              <a:rPr sz="1300" b="0">
+                <a:solidFill>
+                  <a:srgbClr val="8B949E"/>
+                </a:solidFill>
+                <a:latin typeface="PingFang SC"/>
+                <a:ea typeface="PingFang SC"/>
+                <a:cs typeface="PingFang SC"/>
+              </a:rPr>
+              <a:t>先让机器可信，再让它更便宜地产数据，最后才是训练</a:t>
+            </a:r>
+          </a:p>
+        </p:txBody>
+      </p:sp>
+      <p:sp>
+        <p:nvSpPr>
+          <p:cNvPr id="7" name="Rectangle 6"/>
+          <p:cNvSpPr/>
+          <p:nvPr/>
+        </p:nvSpPr>
+        <p:spPr>
+          <a:xfrm>
+            <a:off x="566928" y="6345936"/>
+            <a:ext cx="11057839" cy="9525"/>
+          </a:xfrm>
+          <a:prstGeom prst="rect">
+            <a:avLst/>
+          </a:prstGeom>
+          <a:solidFill>
+            <a:srgbClr val="2A313C"/>
+          </a:solidFill>
+          <a:ln>
+            <a:noFill/>
+          </a:ln>
+          <a:effectLst/>
+        </p:spPr>
+        <p:style>
+          <a:lnRef idx="1">
+            <a:schemeClr val="accent1"/>
+          </a:lnRef>
+          <a:fillRef idx="3">
+            <a:schemeClr val="accent1"/>
+          </a:fillRef>
+          <a:effectRef idx="2">
+            <a:schemeClr val="accent1"/>
+          </a:effectRef>
+          <a:fontRef idx="minor">
+            <a:schemeClr val="lt1"/>
+          </a:fontRef>
+        </p:style>
+        <p:txBody>
+          <a:bodyPr rtlCol="0" anchor="ctr"/>
+          <a:lstStyle/>
+          <a:p>
+            <a:pPr algn="ctr"/>
+          </a:p>
+        </p:txBody>
+      </p:sp>
+      <p:sp>
+        <p:nvSpPr>
+          <p:cNvPr id="8" name="TextBox 7"/>
+          <p:cNvSpPr txBox="1"/>
+          <p:nvPr/>
+        </p:nvSpPr>
+        <p:spPr>
+          <a:xfrm>
+            <a:off x="566928" y="6428232"/>
+            <a:ext cx="8229600" cy="256032"/>
+          </a:xfrm>
+          <a:prstGeom prst="rect">
+            <a:avLst/>
+          </a:prstGeom>
+          <a:noFill/>
+        </p:spPr>
+        <p:txBody>
+          <a:bodyPr wrap="square" lIns="0" rIns="0" tIns="0" bIns="0" anchor="t">
+            <a:spAutoFit/>
+          </a:bodyPr>
+          <a:lstStyle/>
+          <a:p>
+            <a:pPr algn="l">
+              <a:spcBef>
+                <a:spcPts val="0"/>
+              </a:spcBef>
+              <a:spcAft>
+                <a:spcPts val="0"/>
+              </a:spcAft>
+            </a:pPr>
+            <a:r>
+              <a:rPr sz="950" b="0">
+                <a:solidFill>
+                  <a:srgbClr val="8B949E"/>
+                </a:solidFill>
+                <a:latin typeface="PingFang SC"/>
+                <a:ea typeface="PingFang SC"/>
+                <a:cs typeface="PingFang SC"/>
+              </a:rPr>
+              <a:t>第三轮 · 操作方式 / 开源数据 / 仿真 · 2026-10-29</a:t>
+            </a:r>
+          </a:p>
+        </p:txBody>
+      </p:sp>
+      <p:sp>
+        <p:nvSpPr>
+          <p:cNvPr id="9" name="TextBox 8"/>
+          <p:cNvSpPr txBox="1"/>
+          <p:nvPr/>
+        </p:nvSpPr>
+        <p:spPr>
+          <a:xfrm>
+            <a:off x="10710367" y="6428232"/>
+            <a:ext cx="914400" cy="256032"/>
+          </a:xfrm>
+          <a:prstGeom prst="rect">
+            <a:avLst/>
+          </a:prstGeom>
+          <a:noFill/>
+        </p:spPr>
+        <p:txBody>
+          <a:bodyPr wrap="square" lIns="0" rIns="0" tIns="0" bIns="0" anchor="t">
+            <a:spAutoFit/>
+          </a:bodyPr>
+          <a:lstStyle/>
+          <a:p>
+            <a:pPr algn="r">
+              <a:spcBef>
+                <a:spcPts val="0"/>
+              </a:spcBef>
+              <a:spcAft>
+                <a:spcPts val="0"/>
+              </a:spcAft>
+            </a:pPr>
+            <a:r>
+              <a:rPr sz="1000" b="1">
+                <a:solidFill>
+                  <a:srgbClr val="3EC5C9"/>
+                </a:solidFill>
+                <a:latin typeface="Helvetica Neue"/>
+                <a:ea typeface="PingFang SC"/>
+                <a:cs typeface="PingFang SC"/>
+              </a:rPr>
+              <a:t>18</a:t>
+            </a:r>
+          </a:p>
+        </p:txBody>
+      </p:sp>
+      <p:sp>
+        <p:nvSpPr>
+          <p:cNvPr id="10" name="Rounded Rectangle 9"/>
+          <p:cNvSpPr/>
+          <p:nvPr/>
+        </p:nvSpPr>
+        <p:spPr>
+          <a:xfrm>
+            <a:off x="566928" y="1783080"/>
+            <a:ext cx="5349240" cy="2377440"/>
+          </a:xfrm>
+          <a:prstGeom prst="roundRect">
+            <a:avLst>
+              <a:gd name="adj" fmla="val 6000"/>
+            </a:avLst>
+          </a:prstGeom>
+          <a:solidFill>
+            <a:srgbClr val="161B22"/>
+          </a:solidFill>
+          <a:ln w="12700">
+            <a:solidFill>
+              <a:srgbClr val="2A313C"/>
+            </a:solidFill>
+          </a:ln>
+          <a:effectLst/>
+        </p:spPr>
+        <p:style>
+          <a:lnRef idx="1">
+            <a:schemeClr val="accent1"/>
+          </a:lnRef>
+          <a:fillRef idx="3">
+            <a:schemeClr val="accent1"/>
+          </a:fillRef>
+          <a:effectRef idx="2">
+            <a:schemeClr val="accent1"/>
+          </a:effectRef>
+          <a:fontRef idx="minor">
+            <a:schemeClr val="lt1"/>
+          </a:fontRef>
+        </p:style>
+        <p:txBody>
+          <a:bodyPr rtlCol="0" anchor="ctr"/>
+          <a:lstStyle/>
+          <a:p>
+            <a:pPr algn="ctr"/>
+          </a:p>
+        </p:txBody>
+      </p:sp>
+      <p:sp>
+        <p:nvSpPr>
+          <p:cNvPr id="11" name="Rectangle 10"/>
+          <p:cNvSpPr/>
+          <p:nvPr/>
+        </p:nvSpPr>
+        <p:spPr>
+          <a:xfrm>
+            <a:off x="566928" y="1874520"/>
+            <a:ext cx="41148" cy="2194560"/>
+          </a:xfrm>
+          <a:prstGeom prst="rect">
+            <a:avLst/>
+          </a:prstGeom>
+          <a:solidFill>
+            <a:srgbClr val="3FB950"/>
+          </a:solidFill>
+          <a:ln>
+            <a:noFill/>
+          </a:ln>
+          <a:effectLst/>
+        </p:spPr>
+        <p:style>
+          <a:lnRef idx="1">
+            <a:schemeClr val="accent1"/>
+          </a:lnRef>
+          <a:fillRef idx="3">
+            <a:schemeClr val="accent1"/>
+          </a:fillRef>
+          <a:effectRef idx="2">
+            <a:schemeClr val="accent1"/>
+          </a:effectRef>
+          <a:fontRef idx="minor">
+            <a:schemeClr val="lt1"/>
+          </a:fontRef>
+        </p:style>
+        <p:txBody>
+          <a:bodyPr rtlCol="0" anchor="ctr"/>
+          <a:lstStyle/>
+          <a:p>
+            <a:pPr algn="ctr"/>
+          </a:p>
+        </p:txBody>
+      </p:sp>
+      <p:sp>
+        <p:nvSpPr>
+          <p:cNvPr id="12" name="TextBox 11"/>
+          <p:cNvSpPr txBox="1"/>
+          <p:nvPr/>
+        </p:nvSpPr>
+        <p:spPr>
+          <a:xfrm>
+            <a:off x="768096" y="1911096"/>
+            <a:ext cx="4983480" cy="274320"/>
+          </a:xfrm>
+          <a:prstGeom prst="rect">
+            <a:avLst/>
+          </a:prstGeom>
+          <a:noFill/>
+        </p:spPr>
+        <p:txBody>
+          <a:bodyPr wrap="square" lIns="0" rIns="0" tIns="0" bIns="0" anchor="t">
+            <a:spAutoFit/>
+          </a:bodyPr>
+          <a:lstStyle/>
+          <a:p>
+            <a:pPr algn="l">
+              <a:spcBef>
+                <a:spcPts val="0"/>
+              </a:spcBef>
+              <a:spcAft>
+                <a:spcPts val="0"/>
+              </a:spcAft>
+            </a:pPr>
+            <a:r>
+              <a:rPr sz="1350" b="1">
+                <a:solidFill>
+                  <a:srgbClr val="3FB950"/>
+                </a:solidFill>
+                <a:latin typeface="PingFang SC"/>
+                <a:ea typeface="PingFang SC"/>
+                <a:cs typeface="PingFang SC"/>
+              </a:rPr>
+              <a:t>已经做完</a:t>
+            </a:r>
+          </a:p>
+        </p:txBody>
+      </p:sp>
+      <p:sp>
+        <p:nvSpPr>
+          <p:cNvPr id="13" name="TextBox 12"/>
+          <p:cNvSpPr txBox="1"/>
+          <p:nvPr/>
+        </p:nvSpPr>
+        <p:spPr>
+          <a:xfrm>
+            <a:off x="768096" y="2240280"/>
+            <a:ext cx="4983480" cy="1810512"/>
+          </a:xfrm>
+          <a:prstGeom prst="rect">
+            <a:avLst/>
+          </a:prstGeom>
+          <a:noFill/>
+        </p:spPr>
+        <p:txBody>
+          <a:bodyPr wrap="square" lIns="0" rIns="0" tIns="0" bIns="0" anchor="t">
+            <a:spAutoFit/>
+          </a:bodyPr>
+          <a:lstStyle/>
+          <a:p>
+            <a:pPr algn="l">
+              <a:lnSpc>
+                <a:spcPct val="115000"/>
+              </a:lnSpc>
+              <a:spcBef>
+                <a:spcPts val="0"/>
+              </a:spcBef>
+              <a:spcAft>
+                <a:spcPts val="300"/>
+              </a:spcAft>
+            </a:pPr>
+            <a:r>
+              <a:rPr sz="1100" b="0">
+                <a:solidFill>
+                  <a:srgbClr val="E6EDF3"/>
+                </a:solidFill>
+                <a:latin typeface="PingFang SC"/>
+                <a:ea typeface="PingFang SC"/>
+                <a:cs typeface="PingFang SC"/>
+              </a:rPr>
+              <a:t>· 6 种操作方式 + 主从开关，已在真机验证</a:t>
+            </a:r>
+          </a:p>
+          <a:p>
+            <a:pPr>
+              <a:lnSpc>
+                <a:spcPct val="115000"/>
+              </a:lnSpc>
+              <a:spcBef>
+                <a:spcPts val="0"/>
+              </a:spcBef>
+              <a:spcAft>
+                <a:spcPts val="300"/>
+              </a:spcAft>
+            </a:pPr>
+            <a:r>
+              <a:rPr sz="1100" b="0">
+                <a:solidFill>
+                  <a:srgbClr val="E6EDF3"/>
+                </a:solidFill>
+                <a:latin typeface="PingFang SC"/>
+                <a:ea typeface="PingFang SC"/>
+                <a:cs typeface="PingFang SC"/>
+              </a:rPr>
+              <a:t>· 模式切换改为「以硬件回报为准」</a:t>
+            </a:r>
+          </a:p>
+          <a:p>
+            <a:pPr>
+              <a:lnSpc>
+                <a:spcPct val="115000"/>
+              </a:lnSpc>
+              <a:spcBef>
+                <a:spcPts val="0"/>
+              </a:spcBef>
+              <a:spcAft>
+                <a:spcPts val="300"/>
+              </a:spcAft>
+            </a:pPr>
+            <a:r>
+              <a:rPr sz="1100" b="0">
+                <a:solidFill>
+                  <a:srgbClr val="E6EDF3"/>
+                </a:solidFill>
+                <a:latin typeface="PingFang SC"/>
+                <a:ea typeface="PingFang SC"/>
+                <a:cs typeface="PingFang SC"/>
+              </a:rPr>
+              <a:t>· MOVE P 改为一次性下发，不再与规划器打架</a:t>
+            </a:r>
+          </a:p>
+          <a:p>
+            <a:pPr>
+              <a:lnSpc>
+                <a:spcPct val="115000"/>
+              </a:lnSpc>
+              <a:spcBef>
+                <a:spcPts val="0"/>
+              </a:spcBef>
+              <a:spcAft>
+                <a:spcPts val="300"/>
+              </a:spcAft>
+            </a:pPr>
+            <a:r>
+              <a:rPr sz="1100" b="0">
+                <a:solidFill>
+                  <a:srgbClr val="E6EDF3"/>
+                </a:solidFill>
+                <a:latin typeface="PingFang SC"/>
+                <a:ea typeface="PingFang SC"/>
+                <a:cs typeface="PingFang SC"/>
+              </a:rPr>
+              <a:t>· 总线静默时拒绝采纳零位</a:t>
+            </a:r>
+          </a:p>
+          <a:p>
+            <a:pPr>
+              <a:lnSpc>
+                <a:spcPct val="115000"/>
+              </a:lnSpc>
+              <a:spcBef>
+                <a:spcPts val="0"/>
+              </a:spcBef>
+              <a:spcAft>
+                <a:spcPts val="300"/>
+              </a:spcAft>
+            </a:pPr>
+            <a:r>
+              <a:rPr sz="1100" b="0">
+                <a:solidFill>
+                  <a:srgbClr val="E6EDF3"/>
+                </a:solidFill>
+                <a:latin typeface="PingFang SC"/>
+                <a:ea typeface="PingFang SC"/>
+                <a:cs typeface="PingFang SC"/>
+              </a:rPr>
+              <a:t>· 46 项离线断言 + 23 项真机检查</a:t>
+            </a:r>
+          </a:p>
+          <a:p>
+            <a:pPr>
+              <a:lnSpc>
+                <a:spcPct val="115000"/>
+              </a:lnSpc>
+              <a:spcBef>
+                <a:spcPts val="0"/>
+              </a:spcBef>
+              <a:spcAft>
+                <a:spcPts val="300"/>
+              </a:spcAft>
+            </a:pPr>
+            <a:r>
+              <a:rPr sz="1100" b="0">
+                <a:solidFill>
+                  <a:srgbClr val="E6EDF3"/>
+                </a:solidFill>
+                <a:latin typeface="PingFang SC"/>
+                <a:ea typeface="PingFang SC"/>
+                <a:cs typeface="PingFang SC"/>
+              </a:rPr>
+              <a:t>· MuJoCo 真模型抓放跑通</a:t>
+            </a:r>
+          </a:p>
+        </p:txBody>
+      </p:sp>
+      <p:sp>
+        <p:nvSpPr>
+          <p:cNvPr id="14" name="Rounded Rectangle 13"/>
+          <p:cNvSpPr/>
+          <p:nvPr/>
+        </p:nvSpPr>
+        <p:spPr>
+          <a:xfrm>
+            <a:off x="6099048" y="1783080"/>
+            <a:ext cx="5349240" cy="2377440"/>
+          </a:xfrm>
+          <a:prstGeom prst="roundRect">
+            <a:avLst>
+              <a:gd name="adj" fmla="val 6000"/>
+            </a:avLst>
+          </a:prstGeom>
+          <a:solidFill>
+            <a:srgbClr val="161B22"/>
+          </a:solidFill>
+          <a:ln w="12700">
+            <a:solidFill>
+              <a:srgbClr val="2A313C"/>
+            </a:solidFill>
+          </a:ln>
+          <a:effectLst/>
+        </p:spPr>
+        <p:style>
+          <a:lnRef idx="1">
+            <a:schemeClr val="accent1"/>
+          </a:lnRef>
+          <a:fillRef idx="3">
+            <a:schemeClr val="accent1"/>
+          </a:fillRef>
+          <a:effectRef idx="2">
+            <a:schemeClr val="accent1"/>
+          </a:effectRef>
+          <a:fontRef idx="minor">
+            <a:schemeClr val="lt1"/>
+          </a:fontRef>
+        </p:style>
+        <p:txBody>
+          <a:bodyPr rtlCol="0" anchor="ctr"/>
+          <a:lstStyle/>
+          <a:p>
+            <a:pPr algn="ctr"/>
+          </a:p>
+        </p:txBody>
+      </p:sp>
+      <p:sp>
+        <p:nvSpPr>
+          <p:cNvPr id="15" name="Rectangle 14"/>
+          <p:cNvSpPr/>
+          <p:nvPr/>
+        </p:nvSpPr>
+        <p:spPr>
+          <a:xfrm>
+            <a:off x="6099048" y="1874520"/>
+            <a:ext cx="41148" cy="2194560"/>
+          </a:xfrm>
+          <a:prstGeom prst="rect">
+            <a:avLst/>
+          </a:prstGeom>
+          <a:solidFill>
+            <a:srgbClr val="58A6FF"/>
+          </a:solidFill>
+          <a:ln>
+            <a:noFill/>
+          </a:ln>
+          <a:effectLst/>
+        </p:spPr>
+        <p:style>
+          <a:lnRef idx="1">
+            <a:schemeClr val="accent1"/>
+          </a:lnRef>
+          <a:fillRef idx="3">
+            <a:schemeClr val="accent1"/>
+          </a:fillRef>
+          <a:effectRef idx="2">
+            <a:schemeClr val="accent1"/>
+          </a:effectRef>
+          <a:fontRef idx="minor">
+            <a:schemeClr val="lt1"/>
+          </a:fontRef>
+        </p:style>
+        <p:txBody>
+          <a:bodyPr rtlCol="0" anchor="ctr"/>
+          <a:lstStyle/>
+          <a:p>
+            <a:pPr algn="ctr"/>
+          </a:p>
+        </p:txBody>
+      </p:sp>
+      <p:sp>
+        <p:nvSpPr>
+          <p:cNvPr id="16" name="TextBox 15"/>
+          <p:cNvSpPr txBox="1"/>
+          <p:nvPr/>
+        </p:nvSpPr>
+        <p:spPr>
+          <a:xfrm>
+            <a:off x="6300216" y="1911096"/>
+            <a:ext cx="4983480" cy="274320"/>
+          </a:xfrm>
+          <a:prstGeom prst="rect">
+            <a:avLst/>
+          </a:prstGeom>
+          <a:noFill/>
+        </p:spPr>
+        <p:txBody>
+          <a:bodyPr wrap="square" lIns="0" rIns="0" tIns="0" bIns="0" anchor="t">
+            <a:spAutoFit/>
+          </a:bodyPr>
+          <a:lstStyle/>
+          <a:p>
+            <a:pPr algn="l">
+              <a:spcBef>
+                <a:spcPts val="0"/>
+              </a:spcBef>
+              <a:spcAft>
+                <a:spcPts val="0"/>
+              </a:spcAft>
+            </a:pPr>
+            <a:r>
+              <a:rPr sz="1350" b="1">
+                <a:solidFill>
+                  <a:srgbClr val="58A6FF"/>
+                </a:solidFill>
+                <a:latin typeface="PingFang SC"/>
+                <a:ea typeface="PingFang SC"/>
+                <a:cs typeface="PingFang SC"/>
+              </a:rPr>
+              <a:t>接下来</a:t>
+            </a:r>
+          </a:p>
+        </p:txBody>
+      </p:sp>
+      <p:sp>
+        <p:nvSpPr>
+          <p:cNvPr id="17" name="TextBox 16"/>
+          <p:cNvSpPr txBox="1"/>
+          <p:nvPr/>
+        </p:nvSpPr>
+        <p:spPr>
+          <a:xfrm>
+            <a:off x="6300216" y="2240280"/>
+            <a:ext cx="4983480" cy="1810512"/>
+          </a:xfrm>
+          <a:prstGeom prst="rect">
+            <a:avLst/>
+          </a:prstGeom>
+          <a:noFill/>
+        </p:spPr>
+        <p:txBody>
+          <a:bodyPr wrap="square" lIns="0" rIns="0" tIns="0" bIns="0" anchor="t">
+            <a:spAutoFit/>
+          </a:bodyPr>
+          <a:lstStyle/>
+          <a:p>
+            <a:pPr algn="l">
+              <a:lnSpc>
+                <a:spcPct val="115000"/>
+              </a:lnSpc>
+              <a:spcBef>
+                <a:spcPts val="0"/>
+              </a:spcBef>
+              <a:spcAft>
+                <a:spcPts val="300"/>
+              </a:spcAft>
+            </a:pPr>
+            <a:r>
+              <a:rPr sz="1100" b="0">
+                <a:solidFill>
+                  <a:srgbClr val="E6EDF3"/>
+                </a:solidFill>
+                <a:latin typeface="PingFang SC"/>
+                <a:ea typeface="PingFang SC"/>
+                <a:cs typeface="PingFang SC"/>
+              </a:rPr>
+              <a:t>1. 用拖动示教录 20~50 条单臂抓放</a:t>
+            </a:r>
+          </a:p>
+          <a:p>
+            <a:pPr>
+              <a:lnSpc>
+                <a:spcPct val="115000"/>
+              </a:lnSpc>
+              <a:spcBef>
+                <a:spcPts val="0"/>
+              </a:spcBef>
+              <a:spcAft>
+                <a:spcPts val="300"/>
+              </a:spcAft>
+            </a:pPr>
+            <a:r>
+              <a:rPr sz="1100" b="0">
+                <a:solidFill>
+                  <a:srgbClr val="E6EDF3"/>
+                </a:solidFill>
+                <a:latin typeface="PingFang SC"/>
+                <a:ea typeface="PingFang SC"/>
+                <a:cs typeface="PingFang SC"/>
+              </a:rPr>
+              <a:t>2. 拉 HITdongdong/piper_dual_tube 对比数据质量</a:t>
+            </a:r>
+          </a:p>
+          <a:p>
+            <a:pPr>
+              <a:lnSpc>
+                <a:spcPct val="115000"/>
+              </a:lnSpc>
+              <a:spcBef>
+                <a:spcPts val="0"/>
+              </a:spcBef>
+              <a:spcAft>
+                <a:spcPts val="300"/>
+              </a:spcAft>
+            </a:pPr>
+            <a:r>
+              <a:rPr sz="1100" b="0">
+                <a:solidFill>
+                  <a:srgbClr val="E6EDF3"/>
+                </a:solidFill>
+                <a:latin typeface="PingFang SC"/>
+                <a:ea typeface="PingFang SC"/>
+                <a:cs typeface="PingFang SC"/>
+              </a:rPr>
+              <a:t>3. 用 LBST 的 14 维 SmolVLA 做微调起点</a:t>
+            </a:r>
+          </a:p>
+          <a:p>
+            <a:pPr>
+              <a:lnSpc>
+                <a:spcPct val="115000"/>
+              </a:lnSpc>
+              <a:spcBef>
+                <a:spcPts val="0"/>
+              </a:spcBef>
+              <a:spcAft>
+                <a:spcPts val="300"/>
+              </a:spcAft>
+            </a:pPr>
+            <a:r>
+              <a:rPr sz="1100" b="0">
+                <a:solidFill>
+                  <a:srgbClr val="E6EDF3"/>
+                </a:solidFill>
+                <a:latin typeface="PingFang SC"/>
+                <a:ea typeface="PingFang SC"/>
+                <a:cs typeface="PingFang SC"/>
+              </a:rPr>
+              <a:t>4. 加头相机后再碰双臂传递</a:t>
+            </a:r>
+          </a:p>
+          <a:p>
+            <a:pPr>
+              <a:lnSpc>
+                <a:spcPct val="115000"/>
+              </a:lnSpc>
+              <a:spcBef>
+                <a:spcPts val="0"/>
+              </a:spcBef>
+              <a:spcAft>
+                <a:spcPts val="300"/>
+              </a:spcAft>
+            </a:pPr>
+            <a:r>
+              <a:rPr sz="1100" b="0">
+                <a:solidFill>
+                  <a:srgbClr val="E6EDF3"/>
+                </a:solidFill>
+                <a:latin typeface="PingFang SC"/>
+                <a:ea typeface="PingFang SC"/>
+                <a:cs typeface="PingFang SC"/>
+              </a:rPr>
+              <a:t>5. MIT 增益在接触任务上做第一次受控标定</a:t>
+            </a:r>
+          </a:p>
+        </p:txBody>
+      </p:sp>
+      <p:sp>
+        <p:nvSpPr>
+          <p:cNvPr id="18" name="TextBox 17"/>
+          <p:cNvSpPr txBox="1"/>
+          <p:nvPr/>
+        </p:nvSpPr>
+        <p:spPr>
+          <a:xfrm>
+            <a:off x="566928" y="4434840"/>
+            <a:ext cx="10881360" cy="1645920"/>
+          </a:xfrm>
+          <a:prstGeom prst="rect">
+            <a:avLst/>
+          </a:prstGeom>
+          <a:noFill/>
+        </p:spPr>
+        <p:txBody>
+          <a:bodyPr wrap="square" lIns="0" rIns="0" tIns="0" bIns="0" anchor="t">
+            <a:spAutoFit/>
+          </a:bodyPr>
+          <a:lstStyle/>
+          <a:p>
+            <a:pPr algn="l">
+              <a:spcBef>
+                <a:spcPts val="0"/>
+              </a:spcBef>
+              <a:spcAft>
+                <a:spcPts val="0"/>
+              </a:spcAft>
+            </a:pPr>
+            <a:r>
+              <a:rPr sz="1300" b="1">
+                <a:solidFill>
+                  <a:srgbClr val="3EC5C9"/>
+                </a:solidFill>
+                <a:latin typeface="PingFang SC"/>
+                <a:ea typeface="PingFang SC"/>
+                <a:cs typeface="PingFang SC"/>
+              </a:rPr>
+              <a:t>一句话总结</a:t>
+            </a:r>
+          </a:p>
+          <a:p>
+            <a:pPr>
+              <a:spcBef>
+                <a:spcPts val="0"/>
+              </a:spcBef>
+              <a:spcAft>
+                <a:spcPts val="0"/>
+              </a:spcAft>
+            </a:pPr>
+            <a:r>
+              <a:rPr sz="1250" b="0">
+                <a:solidFill>
+                  <a:srgbClr val="E6EDF3"/>
+                </a:solidFill>
+                <a:latin typeface="PingFang SC"/>
+                <a:ea typeface="PingFang SC"/>
+                <a:cs typeface="PingFang SC"/>
+              </a:rPr>
+              <a:t>这一轮没有找到「下载就能用」的捷径 —— 但找到了两条真实可用的双臂数据集、一个 14 维的现成微调起点，以及一个能在笔记本上跑的仿真。</a:t>
+            </a:r>
+          </a:p>
+          <a:p>
+            <a:pPr>
+              <a:spcBef>
+                <a:spcPts val="0"/>
+              </a:spcBef>
+              <a:spcAft>
+                <a:spcPts val="0"/>
+              </a:spcAft>
+            </a:pPr>
+            <a:r>
+              <a:rPr sz="1250" b="0">
+                <a:solidFill>
+                  <a:srgbClr val="3FB950"/>
+                </a:solidFill>
+                <a:latin typeface="PingFang SC"/>
+                <a:ea typeface="PingFang SC"/>
+                <a:cs typeface="PingFang SC"/>
+              </a:rPr>
+              <a:t>真正省时间的是拖动示教和主从臂：把「把手臂摆到想要的位置」这件事从点按钮变成用手搬。</a:t>
             </a:r>
           </a:p>
         </p:txBody>

--- a/docs/AgileX-第三轮-操作方式与仿真.pptx
+++ b/docs/AgileX-第三轮-操作方式与仿真.pptx
@@ -9934,6 +9934,27 @@
               <a:t>已有人做到：yuffish/robotwin-pi0_aloha-agilex_clean-50 的 norm_stats 就是 14-in-32。</a:t>
             </a:r>
           </a:p>
+          <a:p>
+            <a:pPr>
+              <a:spcBef>
+                <a:spcPts val="0"/>
+              </a:spcBef>
+              <a:spcAft>
+                <a:spcPts val="0"/>
+              </a:spcAft>
+            </a:pPr>
+            <a:r>
+              <a:rPr sz="1150" b="0">
+                <a:solidFill>
+                  <a:srgbClr val="3FB950"/>
+                </a:solidFill>
+                <a:latin typeface="PingFang SC"/>
+                <a:ea typeface="PingFang SC"/>
+                <a:cs typeface="PingFang SC"/>
+              </a:rPr>
+              <a:t>已实际下载验证：数据集抽 1 条 episode → state[14]/action[14] + 3 相机（弧度）；LBST 权重头部 state_proj[960,32]、action_out_proj[32,720] → 确为 32 维 padding。</a:t>
+            </a:r>
+          </a:p>
         </p:txBody>
       </p:sp>
     </p:spTree>
@@ -13788,8 +13809,8 @@
         </p:nvSpPr>
         <p:spPr>
           <a:xfrm>
-            <a:off x="566928" y="1783080"/>
-            <a:ext cx="5349240" cy="2377440"/>
+            <a:off x="566928" y="1737360"/>
+            <a:ext cx="5349240" cy="2697480"/>
           </a:xfrm>
           <a:prstGeom prst="roundRect">
             <a:avLst>
@@ -13836,8 +13857,8 @@
         </p:nvSpPr>
         <p:spPr>
           <a:xfrm>
-            <a:off x="566928" y="1874520"/>
-            <a:ext cx="41148" cy="2194560"/>
+            <a:off x="566928" y="1828800"/>
+            <a:ext cx="41148" cy="2514600"/>
           </a:xfrm>
           <a:prstGeom prst="rect">
             <a:avLst/>
@@ -13880,7 +13901,7 @@
         </p:nvSpPr>
         <p:spPr>
           <a:xfrm>
-            <a:off x="768096" y="1911096"/>
+            <a:off x="768096" y="1865376"/>
             <a:ext cx="4983480" cy="274320"/>
           </a:xfrm>
           <a:prstGeom prst="rect">
@@ -13924,8 +13945,8 @@
         </p:nvSpPr>
         <p:spPr>
           <a:xfrm>
-            <a:off x="768096" y="2240280"/>
-            <a:ext cx="4983480" cy="1810512"/>
+            <a:off x="768096" y="2194560"/>
+            <a:ext cx="4983480" cy="2130552"/>
           </a:xfrm>
           <a:prstGeom prst="rect">
             <a:avLst/>
@@ -13950,7 +13971,7 @@
               </a:spcAft>
             </a:pPr>
             <a:r>
-              <a:rPr sz="1100" b="0">
+              <a:rPr sz="1050" b="0">
                 <a:solidFill>
                   <a:srgbClr val="E6EDF3"/>
                 </a:solidFill>
@@ -13958,7 +13979,7 @@
                 <a:ea typeface="PingFang SC"/>
                 <a:cs typeface="PingFang SC"/>
               </a:rPr>
-              <a:t>· 6 种操作方式 + 主从开关，已在真机验证</a:t>
+              <a:t>· 6 种操作方式 + 主从开关，真机验证过</a:t>
             </a:r>
           </a:p>
           <a:p>
@@ -13974,7 +13995,7 @@
               </a:spcAft>
             </a:pPr>
             <a:r>
-              <a:rPr sz="1100" b="0">
+              <a:rPr sz="1050" b="0">
                 <a:solidFill>
                   <a:srgbClr val="E6EDF3"/>
                 </a:solidFill>
@@ -13982,7 +14003,7 @@
                 <a:ea typeface="PingFang SC"/>
                 <a:cs typeface="PingFang SC"/>
               </a:rPr>
-              <a:t>· 模式切换改为「以硬件回报为准」</a:t>
+              <a:t>· 模式切换以硬件回报为准</a:t>
             </a:r>
           </a:p>
           <a:p>
@@ -13998,7 +14019,7 @@
               </a:spcAft>
             </a:pPr>
             <a:r>
-              <a:rPr sz="1100" b="0">
+              <a:rPr sz="1050" b="0">
                 <a:solidFill>
                   <a:srgbClr val="E6EDF3"/>
                 </a:solidFill>
@@ -14006,7 +14027,7 @@
                 <a:ea typeface="PingFang SC"/>
                 <a:cs typeface="PingFang SC"/>
               </a:rPr>
-              <a:t>· MOVE P 改为一次性下发，不再与规划器打架</a:t>
+              <a:t>· MOVE P 改一次性下发，不再打架</a:t>
             </a:r>
           </a:p>
           <a:p>
@@ -14022,7 +14043,7 @@
               </a:spcAft>
             </a:pPr>
             <a:r>
-              <a:rPr sz="1100" b="0">
+              <a:rPr sz="1050" b="0">
                 <a:solidFill>
                   <a:srgbClr val="E6EDF3"/>
                 </a:solidFill>
@@ -14046,7 +14067,7 @@
               </a:spcAft>
             </a:pPr>
             <a:r>
-              <a:rPr sz="1100" b="0">
+              <a:rPr sz="1050" b="0">
                 <a:solidFill>
                   <a:srgbClr val="E6EDF3"/>
                 </a:solidFill>
@@ -14070,7 +14091,79 @@
               </a:spcAft>
             </a:pPr>
             <a:r>
-              <a:rPr sz="1100" b="0">
+              <a:rPr sz="1050" b="0">
+                <a:solidFill>
+                  <a:srgbClr val="E6EDF3"/>
+                </a:solidFill>
+                <a:latin typeface="PingFang SC"/>
+                <a:ea typeface="PingFang SC"/>
+                <a:cs typeface="PingFang SC"/>
+              </a:rPr>
+              <a:t>· 轨迹可从文件/目录加载并回放</a:t>
+            </a:r>
+          </a:p>
+          <a:p>
+            <a:pPr>
+              <a:lnSpc>
+                <a:spcPct val="115000"/>
+              </a:lnSpc>
+              <a:spcBef>
+                <a:spcPts val="0"/>
+              </a:spcBef>
+              <a:spcAft>
+                <a:spcPts val="300"/>
+              </a:spcAft>
+            </a:pPr>
+            <a:r>
+              <a:rPr sz="1050" b="0">
+                <a:solidFill>
+                  <a:srgbClr val="E6EDF3"/>
+                </a:solidFill>
+                <a:latin typeface="PingFang SC"/>
+                <a:ea typeface="PingFang SC"/>
+                <a:cs typeface="PingFang SC"/>
+              </a:rPr>
+              <a:t>· 数据集已下载 1 条并核对 schema</a:t>
+            </a:r>
+          </a:p>
+          <a:p>
+            <a:pPr>
+              <a:lnSpc>
+                <a:spcPct val="115000"/>
+              </a:lnSpc>
+              <a:spcBef>
+                <a:spcPts val="0"/>
+              </a:spcBef>
+              <a:spcAft>
+                <a:spcPts val="300"/>
+              </a:spcAft>
+            </a:pPr>
+            <a:r>
+              <a:rPr sz="1050" b="0">
+                <a:solidFill>
+                  <a:srgbClr val="E6EDF3"/>
+                </a:solidFill>
+                <a:latin typeface="PingFang SC"/>
+                <a:ea typeface="PingFang SC"/>
+                <a:cs typeface="PingFang SC"/>
+              </a:rPr>
+              <a:t>· LBST 14 维权重已核对形状</a:t>
+            </a:r>
+          </a:p>
+          <a:p>
+            <a:pPr>
+              <a:lnSpc>
+                <a:spcPct val="115000"/>
+              </a:lnSpc>
+              <a:spcBef>
+                <a:spcPts val="0"/>
+              </a:spcBef>
+              <a:spcAft>
+                <a:spcPts val="300"/>
+              </a:spcAft>
+            </a:pPr>
+            <a:r>
+              <a:rPr sz="1050" b="0">
                 <a:solidFill>
                   <a:srgbClr val="E6EDF3"/>
                 </a:solidFill>
@@ -14091,8 +14184,8 @@
         </p:nvSpPr>
         <p:spPr>
           <a:xfrm>
-            <a:off x="6099048" y="1783080"/>
-            <a:ext cx="5349240" cy="2377440"/>
+            <a:off x="6099048" y="1737360"/>
+            <a:ext cx="5349240" cy="2697480"/>
           </a:xfrm>
           <a:prstGeom prst="roundRect">
             <a:avLst>
@@ -14139,8 +14232,8 @@
         </p:nvSpPr>
         <p:spPr>
           <a:xfrm>
-            <a:off x="6099048" y="1874520"/>
-            <a:ext cx="41148" cy="2194560"/>
+            <a:off x="6099048" y="1828800"/>
+            <a:ext cx="41148" cy="2514600"/>
           </a:xfrm>
           <a:prstGeom prst="rect">
             <a:avLst/>
@@ -14183,7 +14276,7 @@
         </p:nvSpPr>
         <p:spPr>
           <a:xfrm>
-            <a:off x="6300216" y="1911096"/>
+            <a:off x="6300216" y="1865376"/>
             <a:ext cx="4983480" cy="274320"/>
           </a:xfrm>
           <a:prstGeom prst="rect">
@@ -14227,8 +14320,8 @@
         </p:nvSpPr>
         <p:spPr>
           <a:xfrm>
-            <a:off x="6300216" y="2240280"/>
-            <a:ext cx="4983480" cy="1810512"/>
+            <a:off x="6300216" y="2194560"/>
+            <a:ext cx="4983480" cy="2130552"/>
           </a:xfrm>
           <a:prstGeom prst="rect">
             <a:avLst/>
@@ -14370,8 +14463,8 @@
         </p:nvSpPr>
         <p:spPr>
           <a:xfrm>
-            <a:off x="566928" y="4434840"/>
-            <a:ext cx="10881360" cy="1645920"/>
+            <a:off x="566928" y="4617720"/>
+            <a:ext cx="10881360" cy="1554480"/>
           </a:xfrm>
           <a:prstGeom prst="rect">
             <a:avLst/>
@@ -21195,7 +21288,55 @@
                 <a:ea typeface="PingFang SC"/>
                 <a:cs typeface="PingFang SC"/>
               </a:rPr>
-              <a:t>load   给一个 6 角度点的列表 + dt（秒/帧）</a:t>
+              <a:t>load   点列表，或从磁盘读文件 / 目录</a:t>
+            </a:r>
+          </a:p>
+          <a:p>
+            <a:pPr>
+              <a:lnSpc>
+                <a:spcPct val="115000"/>
+              </a:lnSpc>
+              <a:spcBef>
+                <a:spcPts val="0"/>
+              </a:spcBef>
+              <a:spcAft>
+                <a:spcPts val="300"/>
+              </a:spcAft>
+            </a:pPr>
+            <a:r>
+              <a:rPr sz="1200" b="0">
+                <a:solidFill>
+                  <a:srgbClr val="E6EDF3"/>
+                </a:solidFill>
+                <a:latin typeface="PingFang SC"/>
+                <a:ea typeface="PingFang SC"/>
+                <a:cs typeface="PingFang SC"/>
+              </a:rPr>
+              <a:t>       .json 或 episode 的 timeline.csv</a:t>
+            </a:r>
+          </a:p>
+          <a:p>
+            <a:pPr>
+              <a:lnSpc>
+                <a:spcPct val="115000"/>
+              </a:lnSpc>
+              <a:spcBef>
+                <a:spcPts val="0"/>
+              </a:spcBef>
+              <a:spcAft>
+                <a:spcPts val="300"/>
+              </a:spcAft>
+            </a:pPr>
+            <a:r>
+              <a:rPr sz="1200" b="0">
+                <a:solidFill>
+                  <a:srgbClr val="E6EDF3"/>
+                </a:solidFill>
+                <a:latin typeface="PingFang SC"/>
+                <a:ea typeface="PingFang SC"/>
+                <a:cs typeface="PingFang SC"/>
+              </a:rPr>
+              <a:t>       （用目标列 L_t* / R_t*，不是实测列）</a:t>
             </a:r>
           </a:p>
           <a:p>
